--- a/00-fundamentos/slides/Introducción al Aprendizaje No Supervisado - UDEM.pptx
+++ b/00-fundamentos/slides/Introducción al Aprendizaje No Supervisado - UDEM.pptx
@@ -5,21 +5,23 @@
     <p:sldMasterId id="2147483648" r:id="rId1"/>
   </p:sldMasterIdLst>
   <p:sldIdLst>
-    <p:sldId id="256" r:id="rId7"/>
-    <p:sldId id="257" r:id="rId8"/>
-    <p:sldId id="258" r:id="rId9"/>
-    <p:sldId id="259" r:id="rId10"/>
-    <p:sldId id="260" r:id="rId11"/>
-    <p:sldId id="261" r:id="rId12"/>
-    <p:sldId id="262" r:id="rId13"/>
-    <p:sldId id="263" r:id="rId14"/>
-    <p:sldId id="264" r:id="rId15"/>
-    <p:sldId id="265" r:id="rId16"/>
-    <p:sldId id="266" r:id="rId17"/>
-    <p:sldId id="267" r:id="rId18"/>
-    <p:sldId id="268" r:id="rId19"/>
+    <p:sldId id="256" r:id="rId2"/>
+    <p:sldId id="257" r:id="rId3"/>
+    <p:sldId id="258" r:id="rId4"/>
+    <p:sldId id="259" r:id="rId5"/>
+    <p:sldId id="260" r:id="rId6"/>
+    <p:sldId id="261" r:id="rId7"/>
+    <p:sldId id="262" r:id="rId8"/>
+    <p:sldId id="263" r:id="rId9"/>
+    <p:sldId id="264" r:id="rId10"/>
+    <p:sldId id="265" r:id="rId11"/>
+    <p:sldId id="269" r:id="rId12"/>
+    <p:sldId id="266" r:id="rId13"/>
+    <p:sldId id="270" r:id="rId14"/>
+    <p:sldId id="267" r:id="rId15"/>
+    <p:sldId id="268" r:id="rId16"/>
   </p:sldIdLst>
-  <p:sldSz cx="9144000" cy="5143500" type="screen4x3"/>
+  <p:sldSz cx="9144000" cy="5143500" type="screen16x9"/>
   <p:notesSz cx="6858000" cy="9144000"/>
   <p:defaultTextStyle>
     <a:defPPr>
@@ -116,6 +118,22 @@
       </a:defRPr>
     </a:lvl9pPr>
   </p:defaultTextStyle>
+  <p:extLst>
+    <p:ext uri="{EFAFB233-063F-42B5-8137-9DF3F51BA10A}">
+      <p15:sldGuideLst xmlns:p15="http://schemas.microsoft.com/office/powerpoint/2012/main">
+        <p15:guide id="1" orient="horz" pos="2160">
+          <p15:clr>
+            <a:srgbClr val="A4A3A4"/>
+          </p15:clr>
+        </p15:guide>
+        <p15:guide id="2" pos="2880">
+          <p15:clr>
+            <a:srgbClr val="A4A3A4"/>
+          </p15:clr>
+        </p15:guide>
+      </p15:sldGuideLst>
+    </p:ext>
+  </p:extLst>
 </p:presentation>
 </file>
 
@@ -157,10 +175,9 @@
           <a:lstStyle/>
           <a:p>
             <a:r>
-              <a:rPr lang="en-US" smtClean="0"/>
+              <a:rPr lang="en-US"/>
               <a:t>Click to edit Master title style</a:t>
             </a:r>
-            <a:endParaRPr lang="en-US"/>
           </a:p>
         </p:txBody>
       </p:sp>
@@ -276,10 +293,9 @@
           </a:lstStyle>
           <a:p>
             <a:r>
-              <a:rPr lang="en-US" smtClean="0"/>
+              <a:rPr lang="en-US"/>
               <a:t>Click to edit Master subtitle style</a:t>
             </a:r>
-            <a:endParaRPr lang="en-US"/>
           </a:p>
         </p:txBody>
       </p:sp>
@@ -300,7 +316,7 @@
           <a:p>
             <a:fld id="{5BCAD085-E8A6-8845-BD4E-CB4CCA059FC4}" type="datetimeFigureOut">
               <a:rPr lang="en-US" smtClean="0"/>
-              <a:t>1/27/13</a:t>
+              <a:t>10/21/26</a:t>
             </a:fld>
             <a:endParaRPr lang="en-US"/>
           </a:p>
@@ -342,7 +358,7 @@
           <a:p>
             <a:fld id="{C1FF6DA9-008F-8B48-92A6-B652298478BF}" type="slidenum">
               <a:rPr lang="en-US" smtClean="0"/>
-              <a:t>‹#›</a:t>
+              <a:t>‹Nº›</a:t>
             </a:fld>
             <a:endParaRPr lang="en-US"/>
           </a:p>
@@ -394,10 +410,9 @@
           <a:lstStyle/>
           <a:p>
             <a:r>
-              <a:rPr lang="en-US" smtClean="0"/>
+              <a:rPr lang="en-US"/>
               <a:t>Click to edit Master title style</a:t>
             </a:r>
-            <a:endParaRPr lang="en-US"/>
           </a:p>
         </p:txBody>
       </p:sp>
@@ -418,38 +433,37 @@
           <a:p>
             <a:pPr lvl="0"/>
             <a:r>
-              <a:rPr lang="en-US" smtClean="0"/>
+              <a:rPr lang="en-US"/>
               <a:t>Click to edit Master text styles</a:t>
             </a:r>
           </a:p>
           <a:p>
             <a:pPr lvl="1"/>
             <a:r>
-              <a:rPr lang="en-US" smtClean="0"/>
+              <a:rPr lang="en-US"/>
               <a:t>Second level</a:t>
             </a:r>
           </a:p>
           <a:p>
             <a:pPr lvl="2"/>
             <a:r>
-              <a:rPr lang="en-US" smtClean="0"/>
+              <a:rPr lang="en-US"/>
               <a:t>Third level</a:t>
             </a:r>
           </a:p>
           <a:p>
             <a:pPr lvl="3"/>
             <a:r>
-              <a:rPr lang="en-US" smtClean="0"/>
+              <a:rPr lang="en-US"/>
               <a:t>Fourth level</a:t>
             </a:r>
           </a:p>
           <a:p>
             <a:pPr lvl="4"/>
             <a:r>
-              <a:rPr lang="en-US" smtClean="0"/>
+              <a:rPr lang="en-US"/>
               <a:t>Fifth level</a:t>
             </a:r>
-            <a:endParaRPr lang="en-US"/>
           </a:p>
         </p:txBody>
       </p:sp>
@@ -470,7 +484,7 @@
           <a:p>
             <a:fld id="{5BCAD085-E8A6-8845-BD4E-CB4CCA059FC4}" type="datetimeFigureOut">
               <a:rPr lang="en-US" smtClean="0"/>
-              <a:t>1/27/13</a:t>
+              <a:t>10/21/26</a:t>
             </a:fld>
             <a:endParaRPr lang="en-US"/>
           </a:p>
@@ -512,7 +526,7 @@
           <a:p>
             <a:fld id="{C1FF6DA9-008F-8B48-92A6-B652298478BF}" type="slidenum">
               <a:rPr lang="en-US" smtClean="0"/>
-              <a:t>‹#›</a:t>
+              <a:t>‹Nº›</a:t>
             </a:fld>
             <a:endParaRPr lang="en-US"/>
           </a:p>
@@ -569,10 +583,9 @@
           <a:lstStyle/>
           <a:p>
             <a:r>
-              <a:rPr lang="en-US" smtClean="0"/>
+              <a:rPr lang="en-US"/>
               <a:t>Click to edit Master title style</a:t>
             </a:r>
-            <a:endParaRPr lang="en-US"/>
           </a:p>
         </p:txBody>
       </p:sp>
@@ -598,38 +611,37 @@
           <a:p>
             <a:pPr lvl="0"/>
             <a:r>
-              <a:rPr lang="en-US" smtClean="0"/>
+              <a:rPr lang="en-US"/>
               <a:t>Click to edit Master text styles</a:t>
             </a:r>
           </a:p>
           <a:p>
             <a:pPr lvl="1"/>
             <a:r>
-              <a:rPr lang="en-US" smtClean="0"/>
+              <a:rPr lang="en-US"/>
               <a:t>Second level</a:t>
             </a:r>
           </a:p>
           <a:p>
             <a:pPr lvl="2"/>
             <a:r>
-              <a:rPr lang="en-US" smtClean="0"/>
+              <a:rPr lang="en-US"/>
               <a:t>Third level</a:t>
             </a:r>
           </a:p>
           <a:p>
             <a:pPr lvl="3"/>
             <a:r>
-              <a:rPr lang="en-US" smtClean="0"/>
+              <a:rPr lang="en-US"/>
               <a:t>Fourth level</a:t>
             </a:r>
           </a:p>
           <a:p>
             <a:pPr lvl="4"/>
             <a:r>
-              <a:rPr lang="en-US" smtClean="0"/>
+              <a:rPr lang="en-US"/>
               <a:t>Fifth level</a:t>
             </a:r>
-            <a:endParaRPr lang="en-US"/>
           </a:p>
         </p:txBody>
       </p:sp>
@@ -650,7 +662,7 @@
           <a:p>
             <a:fld id="{5BCAD085-E8A6-8845-BD4E-CB4CCA059FC4}" type="datetimeFigureOut">
               <a:rPr lang="en-US" smtClean="0"/>
-              <a:t>1/27/13</a:t>
+              <a:t>10/21/26</a:t>
             </a:fld>
             <a:endParaRPr lang="en-US"/>
           </a:p>
@@ -692,7 +704,7 @@
           <a:p>
             <a:fld id="{C1FF6DA9-008F-8B48-92A6-B652298478BF}" type="slidenum">
               <a:rPr lang="en-US" smtClean="0"/>
-              <a:t>‹#›</a:t>
+              <a:t>‹Nº›</a:t>
             </a:fld>
             <a:endParaRPr lang="en-US"/>
           </a:p>
@@ -744,10 +756,9 @@
           <a:lstStyle/>
           <a:p>
             <a:r>
-              <a:rPr lang="en-US" smtClean="0"/>
+              <a:rPr lang="en-US"/>
               <a:t>Click to edit Master title style</a:t>
             </a:r>
-            <a:endParaRPr lang="en-US"/>
           </a:p>
         </p:txBody>
       </p:sp>
@@ -768,38 +779,37 @@
           <a:p>
             <a:pPr lvl="0"/>
             <a:r>
-              <a:rPr lang="en-US" smtClean="0"/>
+              <a:rPr lang="en-US"/>
               <a:t>Click to edit Master text styles</a:t>
             </a:r>
           </a:p>
           <a:p>
             <a:pPr lvl="1"/>
             <a:r>
-              <a:rPr lang="en-US" smtClean="0"/>
+              <a:rPr lang="en-US"/>
               <a:t>Second level</a:t>
             </a:r>
           </a:p>
           <a:p>
             <a:pPr lvl="2"/>
             <a:r>
-              <a:rPr lang="en-US" smtClean="0"/>
+              <a:rPr lang="en-US"/>
               <a:t>Third level</a:t>
             </a:r>
           </a:p>
           <a:p>
             <a:pPr lvl="3"/>
             <a:r>
-              <a:rPr lang="en-US" smtClean="0"/>
+              <a:rPr lang="en-US"/>
               <a:t>Fourth level</a:t>
             </a:r>
           </a:p>
           <a:p>
             <a:pPr lvl="4"/>
             <a:r>
-              <a:rPr lang="en-US" smtClean="0"/>
+              <a:rPr lang="en-US"/>
               <a:t>Fifth level</a:t>
             </a:r>
-            <a:endParaRPr lang="en-US"/>
           </a:p>
         </p:txBody>
       </p:sp>
@@ -820,7 +830,7 @@
           <a:p>
             <a:fld id="{5BCAD085-E8A6-8845-BD4E-CB4CCA059FC4}" type="datetimeFigureOut">
               <a:rPr lang="en-US" smtClean="0"/>
-              <a:t>1/27/13</a:t>
+              <a:t>10/21/26</a:t>
             </a:fld>
             <a:endParaRPr lang="en-US"/>
           </a:p>
@@ -862,7 +872,7 @@
           <a:p>
             <a:fld id="{C1FF6DA9-008F-8B48-92A6-B652298478BF}" type="slidenum">
               <a:rPr lang="en-US" smtClean="0"/>
-              <a:t>‹#›</a:t>
+              <a:t>‹Nº›</a:t>
             </a:fld>
             <a:endParaRPr lang="en-US"/>
           </a:p>
@@ -923,10 +933,9 @@
           </a:lstStyle>
           <a:p>
             <a:r>
-              <a:rPr lang="en-US" smtClean="0"/>
+              <a:rPr lang="en-US"/>
               <a:t>Click to edit Master title style</a:t>
             </a:r>
-            <a:endParaRPr lang="en-US"/>
           </a:p>
         </p:txBody>
       </p:sp>
@@ -1043,7 +1052,7 @@
           <a:p>
             <a:pPr lvl="0"/>
             <a:r>
-              <a:rPr lang="en-US" smtClean="0"/>
+              <a:rPr lang="en-US"/>
               <a:t>Click to edit Master text styles</a:t>
             </a:r>
           </a:p>
@@ -1066,7 +1075,7 @@
           <a:p>
             <a:fld id="{5BCAD085-E8A6-8845-BD4E-CB4CCA059FC4}" type="datetimeFigureOut">
               <a:rPr lang="en-US" smtClean="0"/>
-              <a:t>1/27/13</a:t>
+              <a:t>10/21/26</a:t>
             </a:fld>
             <a:endParaRPr lang="en-US"/>
           </a:p>
@@ -1108,7 +1117,7 @@
           <a:p>
             <a:fld id="{C1FF6DA9-008F-8B48-92A6-B652298478BF}" type="slidenum">
               <a:rPr lang="en-US" smtClean="0"/>
-              <a:t>‹#›</a:t>
+              <a:t>‹Nº›</a:t>
             </a:fld>
             <a:endParaRPr lang="en-US"/>
           </a:p>
@@ -1160,10 +1169,9 @@
           <a:lstStyle/>
           <a:p>
             <a:r>
-              <a:rPr lang="en-US" smtClean="0"/>
+              <a:rPr lang="en-US"/>
               <a:t>Click to edit Master title style</a:t>
             </a:r>
-            <a:endParaRPr lang="en-US"/>
           </a:p>
         </p:txBody>
       </p:sp>
@@ -1217,38 +1225,37 @@
           <a:p>
             <a:pPr lvl="0"/>
             <a:r>
-              <a:rPr lang="en-US" smtClean="0"/>
+              <a:rPr lang="en-US"/>
               <a:t>Click to edit Master text styles</a:t>
             </a:r>
           </a:p>
           <a:p>
             <a:pPr lvl="1"/>
             <a:r>
-              <a:rPr lang="en-US" smtClean="0"/>
+              <a:rPr lang="en-US"/>
               <a:t>Second level</a:t>
             </a:r>
           </a:p>
           <a:p>
             <a:pPr lvl="2"/>
             <a:r>
-              <a:rPr lang="en-US" smtClean="0"/>
+              <a:rPr lang="en-US"/>
               <a:t>Third level</a:t>
             </a:r>
           </a:p>
           <a:p>
             <a:pPr lvl="3"/>
             <a:r>
-              <a:rPr lang="en-US" smtClean="0"/>
+              <a:rPr lang="en-US"/>
               <a:t>Fourth level</a:t>
             </a:r>
           </a:p>
           <a:p>
             <a:pPr lvl="4"/>
             <a:r>
-              <a:rPr lang="en-US" smtClean="0"/>
+              <a:rPr lang="en-US"/>
               <a:t>Fifth level</a:t>
             </a:r>
-            <a:endParaRPr lang="en-US"/>
           </a:p>
         </p:txBody>
       </p:sp>
@@ -1302,38 +1309,37 @@
           <a:p>
             <a:pPr lvl="0"/>
             <a:r>
-              <a:rPr lang="en-US" smtClean="0"/>
+              <a:rPr lang="en-US"/>
               <a:t>Click to edit Master text styles</a:t>
             </a:r>
           </a:p>
           <a:p>
             <a:pPr lvl="1"/>
             <a:r>
-              <a:rPr lang="en-US" smtClean="0"/>
+              <a:rPr lang="en-US"/>
               <a:t>Second level</a:t>
             </a:r>
           </a:p>
           <a:p>
             <a:pPr lvl="2"/>
             <a:r>
-              <a:rPr lang="en-US" smtClean="0"/>
+              <a:rPr lang="en-US"/>
               <a:t>Third level</a:t>
             </a:r>
           </a:p>
           <a:p>
             <a:pPr lvl="3"/>
             <a:r>
-              <a:rPr lang="en-US" smtClean="0"/>
+              <a:rPr lang="en-US"/>
               <a:t>Fourth level</a:t>
             </a:r>
           </a:p>
           <a:p>
             <a:pPr lvl="4"/>
             <a:r>
-              <a:rPr lang="en-US" smtClean="0"/>
+              <a:rPr lang="en-US"/>
               <a:t>Fifth level</a:t>
             </a:r>
-            <a:endParaRPr lang="en-US"/>
           </a:p>
         </p:txBody>
       </p:sp>
@@ -1354,7 +1360,7 @@
           <a:p>
             <a:fld id="{5BCAD085-E8A6-8845-BD4E-CB4CCA059FC4}" type="datetimeFigureOut">
               <a:rPr lang="en-US" smtClean="0"/>
-              <a:t>1/27/13</a:t>
+              <a:t>10/21/26</a:t>
             </a:fld>
             <a:endParaRPr lang="en-US"/>
           </a:p>
@@ -1396,7 +1402,7 @@
           <a:p>
             <a:fld id="{C1FF6DA9-008F-8B48-92A6-B652298478BF}" type="slidenum">
               <a:rPr lang="en-US" smtClean="0"/>
-              <a:t>‹#›</a:t>
+              <a:t>‹Nº›</a:t>
             </a:fld>
             <a:endParaRPr lang="en-US"/>
           </a:p>
@@ -1452,10 +1458,9 @@
           </a:lstStyle>
           <a:p>
             <a:r>
-              <a:rPr lang="en-US" smtClean="0"/>
+              <a:rPr lang="en-US"/>
               <a:t>Click to edit Master title style</a:t>
             </a:r>
-            <a:endParaRPr lang="en-US"/>
           </a:p>
         </p:txBody>
       </p:sp>
@@ -1518,7 +1523,7 @@
           <a:p>
             <a:pPr lvl="0"/>
             <a:r>
-              <a:rPr lang="en-US" smtClean="0"/>
+              <a:rPr lang="en-US"/>
               <a:t>Click to edit Master text styles</a:t>
             </a:r>
           </a:p>
@@ -1574,38 +1579,37 @@
           <a:p>
             <a:pPr lvl="0"/>
             <a:r>
-              <a:rPr lang="en-US" smtClean="0"/>
+              <a:rPr lang="en-US"/>
               <a:t>Click to edit Master text styles</a:t>
             </a:r>
           </a:p>
           <a:p>
             <a:pPr lvl="1"/>
             <a:r>
-              <a:rPr lang="en-US" smtClean="0"/>
+              <a:rPr lang="en-US"/>
               <a:t>Second level</a:t>
             </a:r>
           </a:p>
           <a:p>
             <a:pPr lvl="2"/>
             <a:r>
-              <a:rPr lang="en-US" smtClean="0"/>
+              <a:rPr lang="en-US"/>
               <a:t>Third level</a:t>
             </a:r>
           </a:p>
           <a:p>
             <a:pPr lvl="3"/>
             <a:r>
-              <a:rPr lang="en-US" smtClean="0"/>
+              <a:rPr lang="en-US"/>
               <a:t>Fourth level</a:t>
             </a:r>
           </a:p>
           <a:p>
             <a:pPr lvl="4"/>
             <a:r>
-              <a:rPr lang="en-US" smtClean="0"/>
+              <a:rPr lang="en-US"/>
               <a:t>Fifth level</a:t>
             </a:r>
-            <a:endParaRPr lang="en-US"/>
           </a:p>
         </p:txBody>
       </p:sp>
@@ -1668,7 +1672,7 @@
           <a:p>
             <a:pPr lvl="0"/>
             <a:r>
-              <a:rPr lang="en-US" smtClean="0"/>
+              <a:rPr lang="en-US"/>
               <a:t>Click to edit Master text styles</a:t>
             </a:r>
           </a:p>
@@ -1724,38 +1728,37 @@
           <a:p>
             <a:pPr lvl="0"/>
             <a:r>
-              <a:rPr lang="en-US" smtClean="0"/>
+              <a:rPr lang="en-US"/>
               <a:t>Click to edit Master text styles</a:t>
             </a:r>
           </a:p>
           <a:p>
             <a:pPr lvl="1"/>
             <a:r>
-              <a:rPr lang="en-US" smtClean="0"/>
+              <a:rPr lang="en-US"/>
               <a:t>Second level</a:t>
             </a:r>
           </a:p>
           <a:p>
             <a:pPr lvl="2"/>
             <a:r>
-              <a:rPr lang="en-US" smtClean="0"/>
+              <a:rPr lang="en-US"/>
               <a:t>Third level</a:t>
             </a:r>
           </a:p>
           <a:p>
             <a:pPr lvl="3"/>
             <a:r>
-              <a:rPr lang="en-US" smtClean="0"/>
+              <a:rPr lang="en-US"/>
               <a:t>Fourth level</a:t>
             </a:r>
           </a:p>
           <a:p>
             <a:pPr lvl="4"/>
             <a:r>
-              <a:rPr lang="en-US" smtClean="0"/>
+              <a:rPr lang="en-US"/>
               <a:t>Fifth level</a:t>
             </a:r>
-            <a:endParaRPr lang="en-US"/>
           </a:p>
         </p:txBody>
       </p:sp>
@@ -1776,7 +1779,7 @@
           <a:p>
             <a:fld id="{5BCAD085-E8A6-8845-BD4E-CB4CCA059FC4}" type="datetimeFigureOut">
               <a:rPr lang="en-US" smtClean="0"/>
-              <a:t>1/27/13</a:t>
+              <a:t>10/21/26</a:t>
             </a:fld>
             <a:endParaRPr lang="en-US"/>
           </a:p>
@@ -1818,7 +1821,7 @@
           <a:p>
             <a:fld id="{C1FF6DA9-008F-8B48-92A6-B652298478BF}" type="slidenum">
               <a:rPr lang="en-US" smtClean="0"/>
-              <a:t>‹#›</a:t>
+              <a:t>‹Nº›</a:t>
             </a:fld>
             <a:endParaRPr lang="en-US"/>
           </a:p>
@@ -1870,10 +1873,9 @@
           <a:lstStyle/>
           <a:p>
             <a:r>
-              <a:rPr lang="en-US" smtClean="0"/>
+              <a:rPr lang="en-US"/>
               <a:t>Click to edit Master title style</a:t>
             </a:r>
-            <a:endParaRPr lang="en-US"/>
           </a:p>
         </p:txBody>
       </p:sp>
@@ -1894,7 +1896,7 @@
           <a:p>
             <a:fld id="{5BCAD085-E8A6-8845-BD4E-CB4CCA059FC4}" type="datetimeFigureOut">
               <a:rPr lang="en-US" smtClean="0"/>
-              <a:t>1/27/13</a:t>
+              <a:t>10/21/26</a:t>
             </a:fld>
             <a:endParaRPr lang="en-US"/>
           </a:p>
@@ -1936,7 +1938,7 @@
           <a:p>
             <a:fld id="{C1FF6DA9-008F-8B48-92A6-B652298478BF}" type="slidenum">
               <a:rPr lang="en-US" smtClean="0"/>
-              <a:t>‹#›</a:t>
+              <a:t>‹Nº›</a:t>
             </a:fld>
             <a:endParaRPr lang="en-US"/>
           </a:p>
@@ -1989,7 +1991,7 @@
           <a:p>
             <a:fld id="{5BCAD085-E8A6-8845-BD4E-CB4CCA059FC4}" type="datetimeFigureOut">
               <a:rPr lang="en-US" smtClean="0"/>
-              <a:t>1/27/13</a:t>
+              <a:t>10/21/26</a:t>
             </a:fld>
             <a:endParaRPr lang="en-US"/>
           </a:p>
@@ -2031,7 +2033,7 @@
           <a:p>
             <a:fld id="{C1FF6DA9-008F-8B48-92A6-B652298478BF}" type="slidenum">
               <a:rPr lang="en-US" smtClean="0"/>
-              <a:t>‹#›</a:t>
+              <a:t>‹Nº›</a:t>
             </a:fld>
             <a:endParaRPr lang="en-US"/>
           </a:p>
@@ -2092,10 +2094,9 @@
           </a:lstStyle>
           <a:p>
             <a:r>
-              <a:rPr lang="en-US" smtClean="0"/>
+              <a:rPr lang="en-US"/>
               <a:t>Click to edit Master title style</a:t>
             </a:r>
-            <a:endParaRPr lang="en-US"/>
           </a:p>
         </p:txBody>
       </p:sp>
@@ -2149,38 +2150,37 @@
           <a:p>
             <a:pPr lvl="0"/>
             <a:r>
-              <a:rPr lang="en-US" smtClean="0"/>
+              <a:rPr lang="en-US"/>
               <a:t>Click to edit Master text styles</a:t>
             </a:r>
           </a:p>
           <a:p>
             <a:pPr lvl="1"/>
             <a:r>
-              <a:rPr lang="en-US" smtClean="0"/>
+              <a:rPr lang="en-US"/>
               <a:t>Second level</a:t>
             </a:r>
           </a:p>
           <a:p>
             <a:pPr lvl="2"/>
             <a:r>
-              <a:rPr lang="en-US" smtClean="0"/>
+              <a:rPr lang="en-US"/>
               <a:t>Third level</a:t>
             </a:r>
           </a:p>
           <a:p>
             <a:pPr lvl="3"/>
             <a:r>
-              <a:rPr lang="en-US" smtClean="0"/>
+              <a:rPr lang="en-US"/>
               <a:t>Fourth level</a:t>
             </a:r>
           </a:p>
           <a:p>
             <a:pPr lvl="4"/>
             <a:r>
-              <a:rPr lang="en-US" smtClean="0"/>
+              <a:rPr lang="en-US"/>
               <a:t>Fifth level</a:t>
             </a:r>
-            <a:endParaRPr lang="en-US"/>
           </a:p>
         </p:txBody>
       </p:sp>
@@ -2243,7 +2243,7 @@
           <a:p>
             <a:pPr lvl="0"/>
             <a:r>
-              <a:rPr lang="en-US" smtClean="0"/>
+              <a:rPr lang="en-US"/>
               <a:t>Click to edit Master text styles</a:t>
             </a:r>
           </a:p>
@@ -2266,7 +2266,7 @@
           <a:p>
             <a:fld id="{5BCAD085-E8A6-8845-BD4E-CB4CCA059FC4}" type="datetimeFigureOut">
               <a:rPr lang="en-US" smtClean="0"/>
-              <a:t>1/27/13</a:t>
+              <a:t>10/21/26</a:t>
             </a:fld>
             <a:endParaRPr lang="en-US"/>
           </a:p>
@@ -2308,7 +2308,7 @@
           <a:p>
             <a:fld id="{C1FF6DA9-008F-8B48-92A6-B652298478BF}" type="slidenum">
               <a:rPr lang="en-US" smtClean="0"/>
-              <a:t>‹#›</a:t>
+              <a:t>‹Nº›</a:t>
             </a:fld>
             <a:endParaRPr lang="en-US"/>
           </a:p>
@@ -2369,10 +2369,9 @@
           </a:lstStyle>
           <a:p>
             <a:r>
-              <a:rPr lang="en-US" smtClean="0"/>
+              <a:rPr lang="en-US"/>
               <a:t>Click to edit Master title style</a:t>
             </a:r>
-            <a:endParaRPr lang="en-US"/>
           </a:p>
         </p:txBody>
       </p:sp>
@@ -2496,7 +2495,7 @@
           <a:p>
             <a:pPr lvl="0"/>
             <a:r>
-              <a:rPr lang="en-US" smtClean="0"/>
+              <a:rPr lang="en-US"/>
               <a:t>Click to edit Master text styles</a:t>
             </a:r>
           </a:p>
@@ -2519,7 +2518,7 @@
           <a:p>
             <a:fld id="{5BCAD085-E8A6-8845-BD4E-CB4CCA059FC4}" type="datetimeFigureOut">
               <a:rPr lang="en-US" smtClean="0"/>
-              <a:t>1/27/13</a:t>
+              <a:t>10/21/26</a:t>
             </a:fld>
             <a:endParaRPr lang="en-US"/>
           </a:p>
@@ -2561,7 +2560,7 @@
           <a:p>
             <a:fld id="{C1FF6DA9-008F-8B48-92A6-B652298478BF}" type="slidenum">
               <a:rPr lang="en-US" smtClean="0"/>
-              <a:t>‹#›</a:t>
+              <a:t>‹Nº›</a:t>
             </a:fld>
             <a:endParaRPr lang="en-US"/>
           </a:p>
@@ -2628,10 +2627,9 @@
           <a:lstStyle/>
           <a:p>
             <a:r>
-              <a:rPr lang="en-US" smtClean="0"/>
+              <a:rPr lang="en-US"/>
               <a:t>Click to edit Master title style</a:t>
             </a:r>
-            <a:endParaRPr lang="en-US"/>
           </a:p>
         </p:txBody>
       </p:sp>
@@ -2662,38 +2660,37 @@
           <a:p>
             <a:pPr lvl="0"/>
             <a:r>
-              <a:rPr lang="en-US" smtClean="0"/>
+              <a:rPr lang="en-US"/>
               <a:t>Click to edit Master text styles</a:t>
             </a:r>
           </a:p>
           <a:p>
             <a:pPr lvl="1"/>
             <a:r>
-              <a:rPr lang="en-US" smtClean="0"/>
+              <a:rPr lang="en-US"/>
               <a:t>Second level</a:t>
             </a:r>
           </a:p>
           <a:p>
             <a:pPr lvl="2"/>
             <a:r>
-              <a:rPr lang="en-US" smtClean="0"/>
+              <a:rPr lang="en-US"/>
               <a:t>Third level</a:t>
             </a:r>
           </a:p>
           <a:p>
             <a:pPr lvl="3"/>
             <a:r>
-              <a:rPr lang="en-US" smtClean="0"/>
+              <a:rPr lang="en-US"/>
               <a:t>Fourth level</a:t>
             </a:r>
           </a:p>
           <a:p>
             <a:pPr lvl="4"/>
             <a:r>
-              <a:rPr lang="en-US" smtClean="0"/>
+              <a:rPr lang="en-US"/>
               <a:t>Fifth level</a:t>
             </a:r>
-            <a:endParaRPr lang="en-US"/>
           </a:p>
         </p:txBody>
       </p:sp>
@@ -2732,7 +2729,7 @@
           <a:p>
             <a:fld id="{5BCAD085-E8A6-8845-BD4E-CB4CCA059FC4}" type="datetimeFigureOut">
               <a:rPr lang="en-US" smtClean="0"/>
-              <a:t>1/27/13</a:t>
+              <a:t>10/21/26</a:t>
             </a:fld>
             <a:endParaRPr lang="en-US"/>
           </a:p>
@@ -2810,7 +2807,7 @@
           <a:p>
             <a:fld id="{C1FF6DA9-008F-8B48-92A6-B652298478BF}" type="slidenum">
               <a:rPr lang="en-US" smtClean="0"/>
-              <a:t>‹#›</a:t>
+              <a:t>‹Nº›</a:t>
             </a:fld>
             <a:endParaRPr lang="en-US"/>
           </a:p>
@@ -3091,7 +3088,7 @@
 </file>
 
 <file path=ppt/slides/slide1.xml><?xml version="1.0" encoding="utf-8"?>
-<p:sld xmlns:a="http://schemas.openxmlformats.org/drawingml/2006/main" xmlns:p="http://schemas.openxmlformats.org/presentationml/2006/main" xmlns:r="http://schemas.openxmlformats.org/officeDocument/2006/relationships">
+<p:sld xmlns:a="http://schemas.openxmlformats.org/drawingml/2006/main" xmlns:r="http://schemas.openxmlformats.org/officeDocument/2006/relationships" xmlns:p="http://schemas.openxmlformats.org/presentationml/2006/main">
   <p:cSld>
     <p:bg>
       <p:bgPr>
@@ -3107,7 +3104,14 @@
         <p:cNvGrpSpPr/>
         <p:nvPr/>
       </p:nvGrpSpPr>
-      <p:grpSpPr/>
+      <p:grpSpPr>
+        <a:xfrm>
+          <a:off x="0" y="0"/>
+          <a:ext cx="0" cy="0"/>
+          <a:chOff x="0" y="0"/>
+          <a:chExt cx="0" cy="0"/>
+        </a:xfrm>
+      </p:grpSpPr>
       <p:sp>
         <p:nvSpPr>
           <p:cNvPr id="2" name="Rectangle 1"/>
@@ -3146,7 +3150,9 @@
         <p:txBody>
           <a:bodyPr rtlCol="0" anchor="ctr"/>
           <a:lstStyle/>
-          <a:p/>
+          <a:p>
+            <a:endParaRPr/>
+          </a:p>
         </p:txBody>
       </p:sp>
       <p:sp>
@@ -3166,7 +3172,7 @@
           <a:noFill/>
         </p:spPr>
         <p:txBody>
-          <a:bodyPr wrap="square" lIns="0" rIns="0" tIns="0" bIns="0" anchor="ctr">
+          <a:bodyPr wrap="square" lIns="0" tIns="0" rIns="0" bIns="0" anchor="ctr">
             <a:spAutoFit/>
           </a:bodyPr>
           <a:lstStyle/>
@@ -3258,7 +3264,9 @@
         <p:txBody>
           <a:bodyPr rtlCol="0" anchor="ctr"/>
           <a:lstStyle/>
-          <a:p/>
+          <a:p>
+            <a:endParaRPr/>
+          </a:p>
         </p:txBody>
       </p:sp>
       <p:sp>
@@ -3278,7 +3286,7 @@
           <a:noFill/>
         </p:spPr>
         <p:txBody>
-          <a:bodyPr wrap="square" lIns="0" rIns="0" tIns="0" bIns="0" anchor="t">
+          <a:bodyPr wrap="square" lIns="0" tIns="0" rIns="0" bIns="0" anchor="t">
             <a:spAutoFit/>
           </a:bodyPr>
           <a:lstStyle/>
@@ -3332,7 +3340,7 @@
           </a:fontRef>
         </p:style>
         <p:txBody>
-          <a:bodyPr rtlCol="0" anchor="ctr" lIns="0" rIns="0" tIns="0" bIns="0"/>
+          <a:bodyPr lIns="0" tIns="0" rIns="0" bIns="0" rtlCol="0" anchor="ctr"/>
           <a:lstStyle/>
           <a:p>
             <a:pPr algn="ctr"/>
@@ -3365,7 +3373,7 @@
           <a:noFill/>
         </p:spPr>
         <p:txBody>
-          <a:bodyPr wrap="square" lIns="0" rIns="0" tIns="0" bIns="0" anchor="ctr">
+          <a:bodyPr wrap="square" lIns="0" tIns="0" rIns="0" bIns="0" anchor="ctr">
             <a:spAutoFit/>
           </a:bodyPr>
           <a:lstStyle/>
@@ -3392,7 +3400,7 @@
 </file>
 
 <file path=ppt/slides/slide10.xml><?xml version="1.0" encoding="utf-8"?>
-<p:sld xmlns:a="http://schemas.openxmlformats.org/drawingml/2006/main" xmlns:p="http://schemas.openxmlformats.org/presentationml/2006/main" xmlns:r="http://schemas.openxmlformats.org/officeDocument/2006/relationships">
+<p:sld xmlns:a="http://schemas.openxmlformats.org/drawingml/2006/main" xmlns:r="http://schemas.openxmlformats.org/officeDocument/2006/relationships" xmlns:p="http://schemas.openxmlformats.org/presentationml/2006/main">
   <p:cSld>
     <p:bg>
       <p:bgPr>
@@ -3408,7 +3416,14 @@
         <p:cNvGrpSpPr/>
         <p:nvPr/>
       </p:nvGrpSpPr>
-      <p:grpSpPr/>
+      <p:grpSpPr>
+        <a:xfrm>
+          <a:off x="0" y="0"/>
+          <a:ext cx="0" cy="0"/>
+          <a:chOff x="0" y="0"/>
+          <a:chExt cx="0" cy="0"/>
+        </a:xfrm>
+      </p:grpSpPr>
       <p:sp>
         <p:nvSpPr>
           <p:cNvPr id="2" name="Rectangle 1"/>
@@ -3447,7 +3462,9 @@
         <p:txBody>
           <a:bodyPr rtlCol="0" anchor="ctr"/>
           <a:lstStyle/>
-          <a:p/>
+          <a:p>
+            <a:endParaRPr/>
+          </a:p>
         </p:txBody>
       </p:sp>
       <p:sp>
@@ -3488,7 +3505,9 @@
         <p:txBody>
           <a:bodyPr rtlCol="0" anchor="ctr"/>
           <a:lstStyle/>
-          <a:p/>
+          <a:p>
+            <a:endParaRPr/>
+          </a:p>
         </p:txBody>
       </p:sp>
       <p:sp>
@@ -3508,7 +3527,7 @@
           <a:noFill/>
         </p:spPr>
         <p:txBody>
-          <a:bodyPr wrap="square" lIns="0" rIns="0" tIns="0" bIns="0" anchor="ctr">
+          <a:bodyPr wrap="square" lIns="0" tIns="0" rIns="0" bIns="0" anchor="ctr">
             <a:spAutoFit/>
           </a:bodyPr>
           <a:lstStyle/>
@@ -3564,7 +3583,9 @@
         <p:txBody>
           <a:bodyPr rtlCol="0" anchor="ctr"/>
           <a:lstStyle/>
-          <a:p/>
+          <a:p>
+            <a:endParaRPr/>
+          </a:p>
         </p:txBody>
       </p:sp>
       <p:sp>
@@ -3584,7 +3605,7 @@
           <a:noFill/>
         </p:spPr>
         <p:txBody>
-          <a:bodyPr wrap="square" lIns="0" rIns="0" tIns="0" bIns="0" anchor="ctr">
+          <a:bodyPr wrap="square" lIns="0" tIns="0" rIns="0" bIns="0" anchor="ctr">
             <a:spAutoFit/>
           </a:bodyPr>
           <a:lstStyle/>
@@ -3636,7 +3657,7 @@
         </p:nvGraphicFramePr>
         <p:xfrm>
           <a:off x="5486400" y="1097280"/>
-          <a:ext cx="3200400" cy="1645919"/>
+          <a:ext cx="3200400" cy="1316732"/>
         </p:xfrm>
         <a:graphic>
           <a:graphicData uri="http://schemas.openxmlformats.org/drawingml/2006/table">
@@ -3645,8 +3666,20 @@
                 <a:tableStyleId>{5C22544A-7EE6-4342-B048-85BDC9FD1C3A}</a:tableStyleId>
               </a:tblPr>
               <a:tblGrid>
-                <a:gridCol w="1691640"/>
-                <a:gridCol w="1508760"/>
+                <a:gridCol w="1691640">
+                  <a:extLst>
+                    <a:ext uri="{9D8B030D-6E8A-4147-A177-3AD203B41FA5}">
+                      <a16:colId xmlns:a16="http://schemas.microsoft.com/office/drawing/2014/main" val="20000"/>
+                    </a:ext>
+                  </a:extLst>
+                </a:gridCol>
+                <a:gridCol w="1508760">
+                  <a:extLst>
+                    <a:ext uri="{9D8B030D-6E8A-4147-A177-3AD203B41FA5}">
+                      <a16:colId xmlns:a16="http://schemas.microsoft.com/office/drawing/2014/main" val="20001"/>
+                    </a:ext>
+                  </a:extLst>
+                </a:gridCol>
               </a:tblGrid>
               <a:tr h="329183">
                 <a:tc>
@@ -3693,6 +3726,11 @@
                     </a:solidFill>
                   </a:tcPr>
                 </a:tc>
+                <a:extLst>
+                  <a:ext uri="{0D108BD9-81ED-4DB2-BD59-A6C34878D82A}">
+                    <a16:rowId xmlns:a16="http://schemas.microsoft.com/office/drawing/2014/main" val="10000"/>
+                  </a:ext>
+                </a:extLst>
               </a:tr>
               <a:tr h="329183">
                 <a:tc>
@@ -3739,6 +3777,11 @@
                     </a:solidFill>
                   </a:tcPr>
                 </a:tc>
+                <a:extLst>
+                  <a:ext uri="{0D108BD9-81ED-4DB2-BD59-A6C34878D82A}">
+                    <a16:rowId xmlns:a16="http://schemas.microsoft.com/office/drawing/2014/main" val="10001"/>
+                  </a:ext>
+                </a:extLst>
               </a:tr>
               <a:tr h="329183">
                 <a:tc>
@@ -3785,6 +3828,11 @@
                     </a:solidFill>
                   </a:tcPr>
                 </a:tc>
+                <a:extLst>
+                  <a:ext uri="{0D108BD9-81ED-4DB2-BD59-A6C34878D82A}">
+                    <a16:rowId xmlns:a16="http://schemas.microsoft.com/office/drawing/2014/main" val="10002"/>
+                  </a:ext>
+                </a:extLst>
               </a:tr>
               <a:tr h="329183">
                 <a:tc>
@@ -3831,52 +3879,11 @@
                     </a:solidFill>
                   </a:tcPr>
                 </a:tc>
-              </a:tr>
-              <a:tr h="329187">
-                <a:tc>
-                  <a:txBody>
-                    <a:bodyPr/>
-                    <a:lstStyle/>
-                    <a:p>
-                      <a:r>
-                        <a:rPr sz="1100" b="0" i="0">
-                          <a:solidFill>
-                            <a:srgbClr val="1A1A1A"/>
-                          </a:solidFill>
-                          <a:latin typeface="Calibri"/>
-                        </a:rPr>
-                        <a:t>ARI (con etiqueta)</a:t>
-                      </a:r>
-                    </a:p>
-                  </a:txBody>
-                  <a:tcPr marL="73152" marR="73152" marT="27432" marB="27432">
-                    <a:solidFill>
-                      <a:srgbClr val="FFFFFF"/>
-                    </a:solidFill>
-                  </a:tcPr>
-                </a:tc>
-                <a:tc>
-                  <a:txBody>
-                    <a:bodyPr/>
-                    <a:lstStyle/>
-                    <a:p>
-                      <a:r>
-                        <a:rPr sz="1100" b="0" i="0">
-                          <a:solidFill>
-                            <a:srgbClr val="1A1A1A"/>
-                          </a:solidFill>
-                          <a:latin typeface="Calibri"/>
-                        </a:rPr>
-                        <a:t>↑  (1 = perfecto)</a:t>
-                      </a:r>
-                    </a:p>
-                  </a:txBody>
-                  <a:tcPr marL="73152" marR="73152" marT="27432" marB="27432">
-                    <a:solidFill>
-                      <a:srgbClr val="FFFFFF"/>
-                    </a:solidFill>
-                  </a:tcPr>
-                </a:tc>
+                <a:extLst>
+                  <a:ext uri="{0D108BD9-81ED-4DB2-BD59-A6C34878D82A}">
+                    <a16:rowId xmlns:a16="http://schemas.microsoft.com/office/drawing/2014/main" val="10003"/>
+                  </a:ext>
+                </a:extLst>
               </a:tr>
             </a:tbl>
           </a:graphicData>
@@ -3890,7 +3897,7 @@
         </p:nvSpPr>
         <p:spPr>
           <a:xfrm>
-            <a:off x="5486400" y="2971800"/>
+            <a:off x="5486400" y="2788920"/>
             <a:ext cx="3200400" cy="731520"/>
           </a:xfrm>
           <a:prstGeom prst="rect">
@@ -3899,7 +3906,7 @@
           <a:noFill/>
         </p:spPr>
         <p:txBody>
-          <a:bodyPr wrap="square" lIns="0" rIns="0" tIns="0" bIns="0" anchor="t">
+          <a:bodyPr wrap="square" lIns="0" tIns="0" rIns="0" bIns="0" anchor="t">
             <a:spAutoFit/>
           </a:bodyPr>
           <a:lstStyle/>
@@ -3912,7 +3919,7 @@
                 </a:solidFill>
                 <a:latin typeface="Calibri"/>
               </a:rPr>
-              <a:t>Las internas usan sólo X; el ARI necesita la etiqueta real, que en la práctica no existe.</a:t>
+              <a:t>En el curso usamos la silhouette: es la más fácil de leer y se puede ver punto por punto.</a:t>
             </a:r>
           </a:p>
         </p:txBody>
@@ -3955,7 +3962,9 @@
         <p:txBody>
           <a:bodyPr rtlCol="0" anchor="ctr"/>
           <a:lstStyle/>
-          <a:p/>
+          <a:p>
+            <a:endParaRPr/>
+          </a:p>
         </p:txBody>
       </p:sp>
       <p:sp>
@@ -3975,7 +3984,7 @@
           <a:noFill/>
         </p:spPr>
         <p:txBody>
-          <a:bodyPr wrap="square" lIns="0" rIns="0" tIns="0" bIns="0" anchor="ctr">
+          <a:bodyPr wrap="square" lIns="0" tIns="0" rIns="0" bIns="0" anchor="ctr">
             <a:spAutoFit/>
           </a:bodyPr>
           <a:lstStyle/>
@@ -4002,7 +4011,952 @@
 </file>
 
 <file path=ppt/slides/slide11.xml><?xml version="1.0" encoding="utf-8"?>
-<p:sld xmlns:a="http://schemas.openxmlformats.org/drawingml/2006/main" xmlns:p="http://schemas.openxmlformats.org/presentationml/2006/main" xmlns:r="http://schemas.openxmlformats.org/officeDocument/2006/relationships">
+<p:sld xmlns:a="http://schemas.openxmlformats.org/drawingml/2006/main" xmlns:r="http://schemas.openxmlformats.org/officeDocument/2006/relationships" xmlns:p="http://schemas.openxmlformats.org/presentationml/2006/main">
+  <p:cSld>
+    <p:spTree>
+      <p:nvGrpSpPr>
+        <p:cNvPr id="1" name="">
+          <a:extLst>
+            <a:ext uri="{FF2B5EF4-FFF2-40B4-BE49-F238E27FC236}">
+              <a16:creationId xmlns:a16="http://schemas.microsoft.com/office/drawing/2014/main" id="{067EB8AA-CED6-8823-114F-99DA32BE9171}"/>
+            </a:ext>
+          </a:extLst>
+        </p:cNvPr>
+        <p:cNvGrpSpPr/>
+        <p:nvPr/>
+      </p:nvGrpSpPr>
+      <p:grpSpPr>
+        <a:xfrm>
+          <a:off x="0" y="0"/>
+          <a:ext cx="0" cy="0"/>
+          <a:chOff x="0" y="0"/>
+          <a:chExt cx="0" cy="0"/>
+        </a:xfrm>
+      </p:grpSpPr>
+      <p:sp>
+        <p:nvSpPr>
+          <p:cNvPr id="2" name="Rectangle 1">
+            <a:extLst>
+              <a:ext uri="{FF2B5EF4-FFF2-40B4-BE49-F238E27FC236}">
+                <a16:creationId xmlns:a16="http://schemas.microsoft.com/office/drawing/2014/main" id="{DA570F9D-FC8C-E761-F7E7-AC40FC6BA162}"/>
+              </a:ext>
+            </a:extLst>
+          </p:cNvPr>
+          <p:cNvSpPr/>
+          <p:nvPr/>
+        </p:nvSpPr>
+        <p:spPr>
+          <a:xfrm>
+            <a:off x="0" y="0"/>
+            <a:ext cx="9144000" cy="914400"/>
+          </a:xfrm>
+          <a:prstGeom prst="rect">
+            <a:avLst/>
+          </a:prstGeom>
+          <a:solidFill>
+            <a:srgbClr val="1A1A1A"/>
+          </a:solidFill>
+          <a:ln>
+            <a:noFill/>
+          </a:ln>
+        </p:spPr>
+        <p:style>
+          <a:lnRef idx="1">
+            <a:schemeClr val="accent1"/>
+          </a:lnRef>
+          <a:fillRef idx="3">
+            <a:schemeClr val="accent1"/>
+          </a:fillRef>
+          <a:effectRef idx="2">
+            <a:schemeClr val="accent1"/>
+          </a:effectRef>
+          <a:fontRef idx="minor">
+            <a:schemeClr val="lt1"/>
+          </a:fontRef>
+        </p:style>
+        <p:txBody>
+          <a:bodyPr rtlCol="0" anchor="ctr"/>
+          <a:lstStyle/>
+          <a:p>
+            <a:endParaRPr/>
+          </a:p>
+        </p:txBody>
+      </p:sp>
+      <p:sp>
+        <p:nvSpPr>
+          <p:cNvPr id="3" name="Rectangle 2">
+            <a:extLst>
+              <a:ext uri="{FF2B5EF4-FFF2-40B4-BE49-F238E27FC236}">
+                <a16:creationId xmlns:a16="http://schemas.microsoft.com/office/drawing/2014/main" id="{E565CA80-58C6-1739-2204-31897BA13FCC}"/>
+              </a:ext>
+            </a:extLst>
+          </p:cNvPr>
+          <p:cNvSpPr/>
+          <p:nvPr/>
+        </p:nvSpPr>
+        <p:spPr>
+          <a:xfrm>
+            <a:off x="0" y="868680"/>
+            <a:ext cx="9144000" cy="45720"/>
+          </a:xfrm>
+          <a:prstGeom prst="rect">
+            <a:avLst/>
+          </a:prstGeom>
+          <a:solidFill>
+            <a:srgbClr val="FFF500"/>
+          </a:solidFill>
+          <a:ln>
+            <a:noFill/>
+          </a:ln>
+        </p:spPr>
+        <p:style>
+          <a:lnRef idx="1">
+            <a:schemeClr val="accent1"/>
+          </a:lnRef>
+          <a:fillRef idx="3">
+            <a:schemeClr val="accent1"/>
+          </a:fillRef>
+          <a:effectRef idx="2">
+            <a:schemeClr val="accent1"/>
+          </a:effectRef>
+          <a:fontRef idx="minor">
+            <a:schemeClr val="lt1"/>
+          </a:fontRef>
+        </p:style>
+        <p:txBody>
+          <a:bodyPr rtlCol="0" anchor="ctr"/>
+          <a:lstStyle/>
+          <a:p>
+            <a:endParaRPr/>
+          </a:p>
+        </p:txBody>
+      </p:sp>
+      <p:sp>
+        <p:nvSpPr>
+          <p:cNvPr id="4" name="TextBox 3">
+            <a:extLst>
+              <a:ext uri="{FF2B5EF4-FFF2-40B4-BE49-F238E27FC236}">
+                <a16:creationId xmlns:a16="http://schemas.microsoft.com/office/drawing/2014/main" id="{87F342DE-9EFD-507F-A894-172113B97098}"/>
+              </a:ext>
+            </a:extLst>
+          </p:cNvPr>
+          <p:cNvSpPr txBox="1"/>
+          <p:nvPr/>
+        </p:nvSpPr>
+        <p:spPr>
+          <a:xfrm>
+            <a:off x="548640" y="137160"/>
+            <a:ext cx="8046720" cy="640080"/>
+          </a:xfrm>
+          <a:prstGeom prst="rect">
+            <a:avLst/>
+          </a:prstGeom>
+          <a:noFill/>
+        </p:spPr>
+        <p:txBody>
+          <a:bodyPr wrap="square" lIns="0" tIns="0" rIns="0" bIns="0" anchor="ctr">
+            <a:spAutoFit/>
+          </a:bodyPr>
+          <a:lstStyle/>
+          <a:p>
+            <a:pPr algn="l"/>
+            <a:r>
+              <a:rPr sz="2800" b="1" i="0">
+                <a:solidFill>
+                  <a:srgbClr val="FFFFFF"/>
+                </a:solidFill>
+                <a:latin typeface="Arial"/>
+              </a:rPr>
+              <a:t>Caso de estudio: minería (Caterpillar)</a:t>
+            </a:r>
+          </a:p>
+        </p:txBody>
+      </p:sp>
+      <p:sp>
+        <p:nvSpPr>
+          <p:cNvPr id="5" name="Rectangle 4">
+            <a:extLst>
+              <a:ext uri="{FF2B5EF4-FFF2-40B4-BE49-F238E27FC236}">
+                <a16:creationId xmlns:a16="http://schemas.microsoft.com/office/drawing/2014/main" id="{E525E8D8-758A-D265-148A-AC1EC1815DAC}"/>
+              </a:ext>
+            </a:extLst>
+          </p:cNvPr>
+          <p:cNvSpPr/>
+          <p:nvPr/>
+        </p:nvSpPr>
+        <p:spPr>
+          <a:xfrm>
+            <a:off x="0" y="4873752"/>
+            <a:ext cx="9144000" cy="274320"/>
+          </a:xfrm>
+          <a:prstGeom prst="rect">
+            <a:avLst/>
+          </a:prstGeom>
+          <a:solidFill>
+            <a:srgbClr val="1A1A1A"/>
+          </a:solidFill>
+          <a:ln>
+            <a:noFill/>
+          </a:ln>
+        </p:spPr>
+        <p:style>
+          <a:lnRef idx="1">
+            <a:schemeClr val="accent1"/>
+          </a:lnRef>
+          <a:fillRef idx="3">
+            <a:schemeClr val="accent1"/>
+          </a:fillRef>
+          <a:effectRef idx="2">
+            <a:schemeClr val="accent1"/>
+          </a:effectRef>
+          <a:fontRef idx="minor">
+            <a:schemeClr val="lt1"/>
+          </a:fontRef>
+        </p:style>
+        <p:txBody>
+          <a:bodyPr rtlCol="0" anchor="ctr"/>
+          <a:lstStyle/>
+          <a:p>
+            <a:endParaRPr/>
+          </a:p>
+        </p:txBody>
+      </p:sp>
+      <p:sp>
+        <p:nvSpPr>
+          <p:cNvPr id="6" name="TextBox 5">
+            <a:extLst>
+              <a:ext uri="{FF2B5EF4-FFF2-40B4-BE49-F238E27FC236}">
+                <a16:creationId xmlns:a16="http://schemas.microsoft.com/office/drawing/2014/main" id="{3BFCC752-4158-A79E-3A04-CF0FA88CBFB6}"/>
+              </a:ext>
+            </a:extLst>
+          </p:cNvPr>
+          <p:cNvSpPr txBox="1"/>
+          <p:nvPr/>
+        </p:nvSpPr>
+        <p:spPr>
+          <a:xfrm>
+            <a:off x="457200" y="4892040"/>
+            <a:ext cx="8229600" cy="228600"/>
+          </a:xfrm>
+          <a:prstGeom prst="rect">
+            <a:avLst/>
+          </a:prstGeom>
+          <a:noFill/>
+        </p:spPr>
+        <p:txBody>
+          <a:bodyPr wrap="square" lIns="0" tIns="0" rIns="0" bIns="0" anchor="ctr">
+            <a:spAutoFit/>
+          </a:bodyPr>
+          <a:lstStyle/>
+          <a:p>
+            <a:pPr algn="l"/>
+            <a:r>
+              <a:rPr sz="800" b="0" i="0">
+                <a:solidFill>
+                  <a:srgbClr val="666666"/>
+                </a:solidFill>
+                <a:latin typeface="Calibri"/>
+              </a:rPr>
+              <a:t>UDEM  |  Modelos de Analítica Predictiva  |  Jorge A. Ramírez García, M.Eng.</a:t>
+            </a:r>
+          </a:p>
+        </p:txBody>
+      </p:sp>
+      <p:pic>
+        <p:nvPicPr>
+          <p:cNvPr id="21" name="Imagen 20">
+            <a:extLst>
+              <a:ext uri="{FF2B5EF4-FFF2-40B4-BE49-F238E27FC236}">
+                <a16:creationId xmlns:a16="http://schemas.microsoft.com/office/drawing/2014/main" id="{B3B7C473-9747-C9F1-48DE-E4F4E9C60C7E}"/>
+              </a:ext>
+            </a:extLst>
+          </p:cNvPr>
+          <p:cNvPicPr>
+            <a:picLocks noChangeAspect="1"/>
+          </p:cNvPicPr>
+          <p:nvPr/>
+        </p:nvPicPr>
+        <p:blipFill>
+          <a:blip r:embed="rId2"/>
+          <a:stretch>
+            <a:fillRect/>
+          </a:stretch>
+        </p:blipFill>
+        <p:spPr>
+          <a:xfrm>
+            <a:off x="457200" y="1234440"/>
+            <a:ext cx="4047666" cy="2377440"/>
+          </a:xfrm>
+          <a:prstGeom prst="rect">
+            <a:avLst/>
+          </a:prstGeom>
+        </p:spPr>
+      </p:pic>
+      <p:sp>
+        <p:nvSpPr>
+          <p:cNvPr id="22" name="TextBox 21"/>
+          <p:cNvSpPr txBox="1"/>
+          <p:nvPr/>
+        </p:nvSpPr>
+        <p:spPr>
+          <a:xfrm>
+            <a:off x="457200" y="3657600"/>
+            <a:ext cx="4047666" cy="228600"/>
+          </a:xfrm>
+          <a:prstGeom prst="rect">
+            <a:avLst/>
+          </a:prstGeom>
+          <a:noFill/>
+        </p:spPr>
+        <p:txBody>
+          <a:bodyPr wrap="square" lIns="0" rIns="0" tIns="0" bIns="0" anchor="t">
+            <a:spAutoFit/>
+          </a:bodyPr>
+          <a:lstStyle/>
+          <a:p>
+            <a:pPr algn="ctr"/>
+            <a:r>
+              <a:rPr sz="900" b="0" i="1">
+                <a:solidFill>
+                  <a:srgbClr val="666666"/>
+                </a:solidFill>
+                <a:latin typeface="Calibri"/>
+              </a:rPr>
+              <a:t>Bandas amarillas = eventos de estado estable</a:t>
+            </a:r>
+          </a:p>
+        </p:txBody>
+      </p:sp>
+      <p:sp>
+        <p:nvSpPr>
+          <p:cNvPr id="23" name="Oval 22"/>
+          <p:cNvSpPr/>
+          <p:nvPr/>
+        </p:nvSpPr>
+        <p:spPr>
+          <a:xfrm>
+            <a:off x="4343400" y="1161288"/>
+            <a:ext cx="320040" cy="320040"/>
+          </a:xfrm>
+          <a:prstGeom prst="ellipse">
+            <a:avLst/>
+          </a:prstGeom>
+          <a:solidFill>
+            <a:srgbClr val="FFF500"/>
+          </a:solidFill>
+          <a:ln>
+            <a:noFill/>
+          </a:ln>
+        </p:spPr>
+        <p:style>
+          <a:lnRef idx="1">
+            <a:schemeClr val="accent1"/>
+          </a:lnRef>
+          <a:fillRef idx="3">
+            <a:schemeClr val="accent1"/>
+          </a:fillRef>
+          <a:effectRef idx="2">
+            <a:schemeClr val="accent1"/>
+          </a:effectRef>
+          <a:fontRef idx="minor">
+            <a:schemeClr val="lt1"/>
+          </a:fontRef>
+        </p:style>
+        <p:txBody>
+          <a:bodyPr rtlCol="0" anchor="ctr" lIns="0" rIns="0" tIns="0" bIns="0"/>
+          <a:lstStyle/>
+          <a:p>
+            <a:pPr algn="ctr"/>
+            <a:r>
+              <a:rPr sz="1300" b="1" i="0">
+                <a:solidFill>
+                  <a:srgbClr val="1A1A1A"/>
+                </a:solidFill>
+                <a:latin typeface="Arial"/>
+              </a:rPr>
+              <a:t>1</a:t>
+            </a:r>
+          </a:p>
+        </p:txBody>
+      </p:sp>
+      <p:sp>
+        <p:nvSpPr>
+          <p:cNvPr id="24" name="TextBox 23"/>
+          <p:cNvSpPr txBox="1"/>
+          <p:nvPr/>
+        </p:nvSpPr>
+        <p:spPr>
+          <a:xfrm>
+            <a:off x="4800600" y="1143000"/>
+            <a:ext cx="3886200" cy="640080"/>
+          </a:xfrm>
+          <a:prstGeom prst="rect">
+            <a:avLst/>
+          </a:prstGeom>
+          <a:noFill/>
+        </p:spPr>
+        <p:txBody>
+          <a:bodyPr wrap="square" lIns="0" rIns="0" tIns="0" bIns="0" anchor="t">
+            <a:spAutoFit/>
+          </a:bodyPr>
+          <a:lstStyle/>
+          <a:p>
+            <a:pPr algn="l"/>
+            <a:r>
+              <a:rPr sz="1100" b="1" i="0">
+                <a:solidFill>
+                  <a:srgbClr val="1A1A1A"/>
+                </a:solidFill>
+                <a:latin typeface="Calibri"/>
+              </a:rPr>
+              <a:t>Definir "estado estable"</a:t>
+            </a:r>
+          </a:p>
+          <a:p>
+            <a:pPr algn="l"/>
+            <a:r>
+              <a:rPr sz="1100" b="0" i="0">
+                <a:solidFill>
+                  <a:srgbClr val="1A1A1A"/>
+                </a:solidFill>
+                <a:latin typeface="Calibri"/>
+              </a:rPr>
+              <a:t>Con carga, de subida, sin cambio de pendiente y a velocidad estable</a:t>
+            </a:r>
+          </a:p>
+        </p:txBody>
+      </p:sp>
+      <p:sp>
+        <p:nvSpPr>
+          <p:cNvPr id="25" name="Rectangle 24"/>
+          <p:cNvSpPr/>
+          <p:nvPr/>
+        </p:nvSpPr>
+        <p:spPr>
+          <a:xfrm>
+            <a:off x="4494276" y="1508760"/>
+            <a:ext cx="18288" cy="292608"/>
+          </a:xfrm>
+          <a:prstGeom prst="rect">
+            <a:avLst/>
+          </a:prstGeom>
+          <a:solidFill>
+            <a:srgbClr val="D9D9D9"/>
+          </a:solidFill>
+          <a:ln>
+            <a:noFill/>
+          </a:ln>
+        </p:spPr>
+        <p:style>
+          <a:lnRef idx="1">
+            <a:schemeClr val="accent1"/>
+          </a:lnRef>
+          <a:fillRef idx="3">
+            <a:schemeClr val="accent1"/>
+          </a:fillRef>
+          <a:effectRef idx="2">
+            <a:schemeClr val="accent1"/>
+          </a:effectRef>
+          <a:fontRef idx="minor">
+            <a:schemeClr val="lt1"/>
+          </a:fontRef>
+        </p:style>
+        <p:txBody>
+          <a:bodyPr rtlCol="0" anchor="ctr"/>
+          <a:lstStyle/>
+          <a:p/>
+        </p:txBody>
+      </p:sp>
+      <p:sp>
+        <p:nvSpPr>
+          <p:cNvPr id="26" name="Oval 25"/>
+          <p:cNvSpPr/>
+          <p:nvPr/>
+        </p:nvSpPr>
+        <p:spPr>
+          <a:xfrm>
+            <a:off x="4343400" y="1837943"/>
+            <a:ext cx="320040" cy="320040"/>
+          </a:xfrm>
+          <a:prstGeom prst="ellipse">
+            <a:avLst/>
+          </a:prstGeom>
+          <a:solidFill>
+            <a:srgbClr val="FFF500"/>
+          </a:solidFill>
+          <a:ln>
+            <a:noFill/>
+          </a:ln>
+        </p:spPr>
+        <p:style>
+          <a:lnRef idx="1">
+            <a:schemeClr val="accent1"/>
+          </a:lnRef>
+          <a:fillRef idx="3">
+            <a:schemeClr val="accent1"/>
+          </a:fillRef>
+          <a:effectRef idx="2">
+            <a:schemeClr val="accent1"/>
+          </a:effectRef>
+          <a:fontRef idx="minor">
+            <a:schemeClr val="lt1"/>
+          </a:fontRef>
+        </p:style>
+        <p:txBody>
+          <a:bodyPr rtlCol="0" anchor="ctr" lIns="0" rIns="0" tIns="0" bIns="0"/>
+          <a:lstStyle/>
+          <a:p>
+            <a:pPr algn="ctr"/>
+            <a:r>
+              <a:rPr sz="1300" b="1" i="0">
+                <a:solidFill>
+                  <a:srgbClr val="1A1A1A"/>
+                </a:solidFill>
+                <a:latin typeface="Arial"/>
+              </a:rPr>
+              <a:t>2</a:t>
+            </a:r>
+          </a:p>
+        </p:txBody>
+      </p:sp>
+      <p:sp>
+        <p:nvSpPr>
+          <p:cNvPr id="27" name="TextBox 26"/>
+          <p:cNvSpPr txBox="1"/>
+          <p:nvPr/>
+        </p:nvSpPr>
+        <p:spPr>
+          <a:xfrm>
+            <a:off x="4800600" y="1819656"/>
+            <a:ext cx="3886200" cy="640080"/>
+          </a:xfrm>
+          <a:prstGeom prst="rect">
+            <a:avLst/>
+          </a:prstGeom>
+          <a:noFill/>
+        </p:spPr>
+        <p:txBody>
+          <a:bodyPr wrap="square" lIns="0" rIns="0" tIns="0" bIns="0" anchor="t">
+            <a:spAutoFit/>
+          </a:bodyPr>
+          <a:lstStyle/>
+          <a:p>
+            <a:pPr algn="l"/>
+            <a:r>
+              <a:rPr sz="1100" b="1" i="0">
+                <a:solidFill>
+                  <a:srgbClr val="1A1A1A"/>
+                </a:solidFill>
+                <a:latin typeface="Calibri"/>
+              </a:rPr>
+              <a:t>Extraer y particionar</a:t>
+            </a:r>
+          </a:p>
+          <a:p>
+            <a:pPr algn="l"/>
+            <a:r>
+              <a:rPr sz="1100" b="0" i="0">
+                <a:solidFill>
+                  <a:srgbClr val="1A1A1A"/>
+                </a:solidFill>
+                <a:latin typeface="Calibri"/>
+              </a:rPr>
+              <a:t>Toda la serie de tiempo → una tabla con estadísticos por evento</a:t>
+            </a:r>
+          </a:p>
+        </p:txBody>
+      </p:sp>
+      <p:sp>
+        <p:nvSpPr>
+          <p:cNvPr id="28" name="Rectangle 27"/>
+          <p:cNvSpPr/>
+          <p:nvPr/>
+        </p:nvSpPr>
+        <p:spPr>
+          <a:xfrm>
+            <a:off x="4494276" y="2185416"/>
+            <a:ext cx="18288" cy="292608"/>
+          </a:xfrm>
+          <a:prstGeom prst="rect">
+            <a:avLst/>
+          </a:prstGeom>
+          <a:solidFill>
+            <a:srgbClr val="D9D9D9"/>
+          </a:solidFill>
+          <a:ln>
+            <a:noFill/>
+          </a:ln>
+        </p:spPr>
+        <p:style>
+          <a:lnRef idx="1">
+            <a:schemeClr val="accent1"/>
+          </a:lnRef>
+          <a:fillRef idx="3">
+            <a:schemeClr val="accent1"/>
+          </a:fillRef>
+          <a:effectRef idx="2">
+            <a:schemeClr val="accent1"/>
+          </a:effectRef>
+          <a:fontRef idx="minor">
+            <a:schemeClr val="lt1"/>
+          </a:fontRef>
+        </p:style>
+        <p:txBody>
+          <a:bodyPr rtlCol="0" anchor="ctr"/>
+          <a:lstStyle/>
+          <a:p/>
+        </p:txBody>
+      </p:sp>
+      <p:sp>
+        <p:nvSpPr>
+          <p:cNvPr id="29" name="Oval 28"/>
+          <p:cNvSpPr/>
+          <p:nvPr/>
+        </p:nvSpPr>
+        <p:spPr>
+          <a:xfrm>
+            <a:off x="4343400" y="2514600"/>
+            <a:ext cx="320040" cy="320040"/>
+          </a:xfrm>
+          <a:prstGeom prst="ellipse">
+            <a:avLst/>
+          </a:prstGeom>
+          <a:solidFill>
+            <a:srgbClr val="F2F2F2"/>
+          </a:solidFill>
+          <a:ln>
+            <a:noFill/>
+          </a:ln>
+        </p:spPr>
+        <p:style>
+          <a:lnRef idx="1">
+            <a:schemeClr val="accent1"/>
+          </a:lnRef>
+          <a:fillRef idx="3">
+            <a:schemeClr val="accent1"/>
+          </a:fillRef>
+          <a:effectRef idx="2">
+            <a:schemeClr val="accent1"/>
+          </a:effectRef>
+          <a:fontRef idx="minor">
+            <a:schemeClr val="lt1"/>
+          </a:fontRef>
+        </p:style>
+        <p:txBody>
+          <a:bodyPr rtlCol="0" anchor="ctr" lIns="0" rIns="0" tIns="0" bIns="0"/>
+          <a:lstStyle/>
+          <a:p>
+            <a:pPr algn="ctr"/>
+            <a:r>
+              <a:rPr sz="1300" b="1" i="0">
+                <a:solidFill>
+                  <a:srgbClr val="B3B3B3"/>
+                </a:solidFill>
+                <a:latin typeface="Arial"/>
+              </a:rPr>
+              <a:t>3</a:t>
+            </a:r>
+          </a:p>
+        </p:txBody>
+      </p:sp>
+      <p:sp>
+        <p:nvSpPr>
+          <p:cNvPr id="30" name="TextBox 29"/>
+          <p:cNvSpPr txBox="1"/>
+          <p:nvPr/>
+        </p:nvSpPr>
+        <p:spPr>
+          <a:xfrm>
+            <a:off x="4800600" y="2496312"/>
+            <a:ext cx="3886200" cy="640080"/>
+          </a:xfrm>
+          <a:prstGeom prst="rect">
+            <a:avLst/>
+          </a:prstGeom>
+          <a:noFill/>
+        </p:spPr>
+        <p:txBody>
+          <a:bodyPr wrap="square" lIns="0" rIns="0" tIns="0" bIns="0" anchor="t">
+            <a:spAutoFit/>
+          </a:bodyPr>
+          <a:lstStyle/>
+          <a:p>
+            <a:pPr algn="l"/>
+            <a:r>
+              <a:rPr sz="1000" b="1" i="0">
+                <a:solidFill>
+                  <a:srgbClr val="B3B3B3"/>
+                </a:solidFill>
+                <a:latin typeface="Calibri"/>
+              </a:rPr>
+              <a:t>Mapear inicio y fin</a:t>
+            </a:r>
+          </a:p>
+          <a:p>
+            <a:pPr algn="l"/>
+            <a:r>
+              <a:rPr sz="1000" b="0" i="0">
+                <a:solidFill>
+                  <a:srgbClr val="B3B3B3"/>
+                </a:solidFill>
+                <a:latin typeface="Calibri"/>
+              </a:rPr>
+              <a:t>Cada evento es una línea recta sobre el mapa de la mina</a:t>
+            </a:r>
+          </a:p>
+        </p:txBody>
+      </p:sp>
+      <p:sp>
+        <p:nvSpPr>
+          <p:cNvPr id="31" name="Rectangle 30"/>
+          <p:cNvSpPr/>
+          <p:nvPr/>
+        </p:nvSpPr>
+        <p:spPr>
+          <a:xfrm>
+            <a:off x="4494276" y="2862072"/>
+            <a:ext cx="18288" cy="292608"/>
+          </a:xfrm>
+          <a:prstGeom prst="rect">
+            <a:avLst/>
+          </a:prstGeom>
+          <a:solidFill>
+            <a:srgbClr val="D9D9D9"/>
+          </a:solidFill>
+          <a:ln>
+            <a:noFill/>
+          </a:ln>
+        </p:spPr>
+        <p:style>
+          <a:lnRef idx="1">
+            <a:schemeClr val="accent1"/>
+          </a:lnRef>
+          <a:fillRef idx="3">
+            <a:schemeClr val="accent1"/>
+          </a:fillRef>
+          <a:effectRef idx="2">
+            <a:schemeClr val="accent1"/>
+          </a:effectRef>
+          <a:fontRef idx="minor">
+            <a:schemeClr val="lt1"/>
+          </a:fontRef>
+        </p:style>
+        <p:txBody>
+          <a:bodyPr rtlCol="0" anchor="ctr"/>
+          <a:lstStyle/>
+          <a:p/>
+        </p:txBody>
+      </p:sp>
+      <p:sp>
+        <p:nvSpPr>
+          <p:cNvPr id="32" name="Oval 31"/>
+          <p:cNvSpPr/>
+          <p:nvPr/>
+        </p:nvSpPr>
+        <p:spPr>
+          <a:xfrm>
+            <a:off x="4343400" y="3191256"/>
+            <a:ext cx="320040" cy="320040"/>
+          </a:xfrm>
+          <a:prstGeom prst="ellipse">
+            <a:avLst/>
+          </a:prstGeom>
+          <a:solidFill>
+            <a:srgbClr val="F2F2F2"/>
+          </a:solidFill>
+          <a:ln>
+            <a:noFill/>
+          </a:ln>
+        </p:spPr>
+        <p:style>
+          <a:lnRef idx="1">
+            <a:schemeClr val="accent1"/>
+          </a:lnRef>
+          <a:fillRef idx="3">
+            <a:schemeClr val="accent1"/>
+          </a:fillRef>
+          <a:effectRef idx="2">
+            <a:schemeClr val="accent1"/>
+          </a:effectRef>
+          <a:fontRef idx="minor">
+            <a:schemeClr val="lt1"/>
+          </a:fontRef>
+        </p:style>
+        <p:txBody>
+          <a:bodyPr rtlCol="0" anchor="ctr" lIns="0" rIns="0" tIns="0" bIns="0"/>
+          <a:lstStyle/>
+          <a:p>
+            <a:pPr algn="ctr"/>
+            <a:r>
+              <a:rPr sz="1300" b="1" i="0">
+                <a:solidFill>
+                  <a:srgbClr val="B3B3B3"/>
+                </a:solidFill>
+                <a:latin typeface="Arial"/>
+              </a:rPr>
+              <a:t>4</a:t>
+            </a:r>
+          </a:p>
+        </p:txBody>
+      </p:sp>
+      <p:sp>
+        <p:nvSpPr>
+          <p:cNvPr id="33" name="TextBox 32"/>
+          <p:cNvSpPr txBox="1"/>
+          <p:nvPr/>
+        </p:nvSpPr>
+        <p:spPr>
+          <a:xfrm>
+            <a:off x="4800600" y="3172968"/>
+            <a:ext cx="3886200" cy="640080"/>
+          </a:xfrm>
+          <a:prstGeom prst="rect">
+            <a:avLst/>
+          </a:prstGeom>
+          <a:noFill/>
+        </p:spPr>
+        <p:txBody>
+          <a:bodyPr wrap="square" lIns="0" rIns="0" tIns="0" bIns="0" anchor="t">
+            <a:spAutoFit/>
+          </a:bodyPr>
+          <a:lstStyle/>
+          <a:p>
+            <a:pPr algn="l"/>
+            <a:r>
+              <a:rPr sz="1000" b="1" i="0">
+                <a:solidFill>
+                  <a:srgbClr val="B3B3B3"/>
+                </a:solidFill>
+                <a:latin typeface="Calibri"/>
+              </a:rPr>
+              <a:t>Agrupar con DBSCAN</a:t>
+            </a:r>
+          </a:p>
+          <a:p>
+            <a:pPr algn="l"/>
+            <a:r>
+              <a:rPr sz="1000" b="0" i="0">
+                <a:solidFill>
+                  <a:srgbClr val="B3B3B3"/>
+                </a:solidFill>
+                <a:latin typeface="Calibri"/>
+              </a:rPr>
+              <a:t>Junta los eventos que recorren el mismo tramo, aunque estén muy cerca de otro</a:t>
+            </a:r>
+          </a:p>
+        </p:txBody>
+      </p:sp>
+      <p:sp>
+        <p:nvSpPr>
+          <p:cNvPr id="34" name="Rounded Rectangle 33"/>
+          <p:cNvSpPr/>
+          <p:nvPr/>
+        </p:nvSpPr>
+        <p:spPr>
+          <a:xfrm>
+            <a:off x="457200" y="3977639"/>
+            <a:ext cx="8229600" cy="640080"/>
+          </a:xfrm>
+          <a:prstGeom prst="roundRect">
+            <a:avLst>
+              <a:gd name="adj" fmla="val 3571"/>
+            </a:avLst>
+          </a:prstGeom>
+          <a:solidFill>
+            <a:srgbClr val="FFFDE0"/>
+          </a:solidFill>
+          <a:ln>
+            <a:noFill/>
+          </a:ln>
+        </p:spPr>
+        <p:style>
+          <a:lnRef idx="1">
+            <a:schemeClr val="accent1"/>
+          </a:lnRef>
+          <a:fillRef idx="3">
+            <a:schemeClr val="accent1"/>
+          </a:fillRef>
+          <a:effectRef idx="2">
+            <a:schemeClr val="accent1"/>
+          </a:effectRef>
+          <a:fontRef idx="minor">
+            <a:schemeClr val="lt1"/>
+          </a:fontRef>
+        </p:style>
+        <p:txBody>
+          <a:bodyPr rtlCol="0" anchor="ctr"/>
+          <a:lstStyle/>
+          <a:p/>
+        </p:txBody>
+      </p:sp>
+      <p:sp>
+        <p:nvSpPr>
+          <p:cNvPr id="35" name="TextBox 34"/>
+          <p:cNvSpPr txBox="1"/>
+          <p:nvPr/>
+        </p:nvSpPr>
+        <p:spPr>
+          <a:xfrm>
+            <a:off x="594360" y="4050791"/>
+            <a:ext cx="7955279" cy="493775"/>
+          </a:xfrm>
+          <a:prstGeom prst="rect">
+            <a:avLst/>
+          </a:prstGeom>
+          <a:noFill/>
+        </p:spPr>
+        <p:txBody>
+          <a:bodyPr wrap="square" lIns="0" rIns="0" tIns="0" bIns="0" anchor="ctr">
+            <a:spAutoFit/>
+          </a:bodyPr>
+          <a:lstStyle/>
+          <a:p>
+            <a:pPr algn="l"/>
+            <a:r>
+              <a:rPr sz="1200" b="0" i="0">
+                <a:solidFill>
+                  <a:srgbClr val="1A1A1A"/>
+                </a:solidFill>
+                <a:latin typeface="Calibri"/>
+              </a:rPr>
+              <a:t>Primero: </a:t>
+            </a:r>
+            <a:r>
+              <a:rPr sz="1200" b="1" i="0">
+                <a:solidFill>
+                  <a:srgbClr val="1A1A1A"/>
+                </a:solidFill>
+                <a:latin typeface="Calibri"/>
+              </a:rPr>
+              <a:t>segmentar la operación</a:t>
+            </a:r>
+            <a:r>
+              <a:rPr sz="1200" b="0" i="0">
+                <a:solidFill>
+                  <a:srgbClr val="1A1A1A"/>
+                </a:solidFill>
+                <a:latin typeface="Calibri"/>
+              </a:rPr>
+              <a:t> de cada máquina en eventos comparables (estado estable).</a:t>
+            </a:r>
+          </a:p>
+        </p:txBody>
+      </p:sp>
+    </p:spTree>
+    <p:extLst>
+      <p:ext uri="{BB962C8B-B14F-4D97-AF65-F5344CB8AC3E}">
+        <p14:creationId xmlns:p14="http://schemas.microsoft.com/office/powerpoint/2010/main" val="942091021"/>
+      </p:ext>
+    </p:extLst>
+  </p:cSld>
+  <p:clrMapOvr>
+    <a:masterClrMapping/>
+  </p:clrMapOvr>
+</p:sld>
+</file>
+
+<file path=ppt/slides/slide12.xml><?xml version="1.0" encoding="utf-8"?>
+<p:sld xmlns:a="http://schemas.openxmlformats.org/drawingml/2006/main" xmlns:r="http://schemas.openxmlformats.org/officeDocument/2006/relationships" xmlns:p="http://schemas.openxmlformats.org/presentationml/2006/main">
   <p:cSld>
     <p:bg>
       <p:bgPr>
@@ -4018,7 +4972,14 @@
         <p:cNvGrpSpPr/>
         <p:nvPr/>
       </p:nvGrpSpPr>
-      <p:grpSpPr/>
+      <p:grpSpPr>
+        <a:xfrm>
+          <a:off x="0" y="0"/>
+          <a:ext cx="0" cy="0"/>
+          <a:chOff x="0" y="0"/>
+          <a:chExt cx="0" cy="0"/>
+        </a:xfrm>
+      </p:grpSpPr>
       <p:sp>
         <p:nvSpPr>
           <p:cNvPr id="2" name="Rectangle 1"/>
@@ -4057,7 +5018,9 @@
         <p:txBody>
           <a:bodyPr rtlCol="0" anchor="ctr"/>
           <a:lstStyle/>
-          <a:p/>
+          <a:p>
+            <a:endParaRPr/>
+          </a:p>
         </p:txBody>
       </p:sp>
       <p:sp>
@@ -4098,7 +5061,9 @@
         <p:txBody>
           <a:bodyPr rtlCol="0" anchor="ctr"/>
           <a:lstStyle/>
-          <a:p/>
+          <a:p>
+            <a:endParaRPr/>
+          </a:p>
         </p:txBody>
       </p:sp>
       <p:sp>
@@ -4118,7 +5083,7 @@
           <a:noFill/>
         </p:spPr>
         <p:txBody>
-          <a:bodyPr wrap="square" lIns="0" rIns="0" tIns="0" bIns="0" anchor="ctr">
+          <a:bodyPr wrap="square" lIns="0" tIns="0" rIns="0" bIns="0" anchor="ctr">
             <a:spAutoFit/>
           </a:bodyPr>
           <a:lstStyle/>
@@ -4174,7 +5139,9 @@
         <p:txBody>
           <a:bodyPr rtlCol="0" anchor="ctr"/>
           <a:lstStyle/>
-          <a:p/>
+          <a:p>
+            <a:endParaRPr/>
+          </a:p>
         </p:txBody>
       </p:sp>
       <p:sp>
@@ -4194,7 +5161,7 @@
           <a:noFill/>
         </p:spPr>
         <p:txBody>
-          <a:bodyPr wrap="square" lIns="0" rIns="0" tIns="0" bIns="0" anchor="ctr">
+          <a:bodyPr wrap="square" lIns="0" tIns="0" rIns="0" bIns="0" anchor="ctr">
             <a:spAutoFit/>
           </a:bodyPr>
           <a:lstStyle/>
@@ -4214,7 +5181,13 @@
       </p:sp>
       <p:pic>
         <p:nvPicPr>
-          <p:cNvPr id="7" name="Picture 6" descr="caso_mina.png"/>
+          <p:cNvPr id="19" name="Imagen 18">
+            <a:extLst>
+              <a:ext uri="{FF2B5EF4-FFF2-40B4-BE49-F238E27FC236}">
+                <a16:creationId xmlns:a16="http://schemas.microsoft.com/office/drawing/2014/main" id="{96801D3E-631F-72FB-C4AA-52976139981D}"/>
+              </a:ext>
+            </a:extLst>
+          </p:cNvPr>
           <p:cNvPicPr>
             <a:picLocks noChangeAspect="1"/>
           </p:cNvPicPr>
@@ -4228,24 +5201,29 @@
         </p:blipFill>
         <p:spPr>
           <a:xfrm>
-            <a:off x="365760" y="1097280"/>
-            <a:ext cx="4937760" cy="2353329"/>
-          </a:xfrm>
-          <a:prstGeom prst="rect">
-            <a:avLst/>
-          </a:prstGeom>
+            <a:off x="457200" y="1051560"/>
+            <a:ext cx="2975400" cy="2651760"/>
+          </a:xfrm>
+          <a:prstGeom prst="rect">
+            <a:avLst/>
+          </a:prstGeom>
+          <a:ln w="9525">
+            <a:solidFill>
+              <a:srgbClr val="D9D9D9"/>
+            </a:solidFill>
+          </a:ln>
         </p:spPr>
       </p:pic>
       <p:sp>
         <p:nvSpPr>
-          <p:cNvPr id="8" name="TextBox 7"/>
+          <p:cNvPr id="20" name="TextBox 19"/>
           <p:cNvSpPr txBox="1"/>
           <p:nvPr/>
         </p:nvSpPr>
         <p:spPr>
           <a:xfrm>
-            <a:off x="457200" y="3657600"/>
-            <a:ext cx="4754880" cy="274320"/>
+            <a:off x="457200" y="3749039"/>
+            <a:ext cx="2975400" cy="228600"/>
           </a:xfrm>
           <a:prstGeom prst="rect">
             <a:avLst/>
@@ -4258,28 +5236,308 @@
           </a:bodyPr>
           <a:lstStyle/>
           <a:p>
+            <a:pPr algn="ctr"/>
+            <a:r>
+              <a:rPr sz="900" b="0" i="1">
+                <a:solidFill>
+                  <a:srgbClr val="666666"/>
+                </a:solidFill>
+                <a:latin typeface="Calibri"/>
+              </a:rPr>
+              <a:t>Cada línea azul = un evento de estado estable</a:t>
+            </a:r>
+          </a:p>
+        </p:txBody>
+      </p:sp>
+      <p:sp>
+        <p:nvSpPr>
+          <p:cNvPr id="21" name="Oval 20"/>
+          <p:cNvSpPr/>
+          <p:nvPr/>
+        </p:nvSpPr>
+        <p:spPr>
+          <a:xfrm>
+            <a:off x="4343400" y="1161288"/>
+            <a:ext cx="320040" cy="320040"/>
+          </a:xfrm>
+          <a:prstGeom prst="ellipse">
+            <a:avLst/>
+          </a:prstGeom>
+          <a:solidFill>
+            <a:srgbClr val="F2F2F2"/>
+          </a:solidFill>
+          <a:ln>
+            <a:noFill/>
+          </a:ln>
+        </p:spPr>
+        <p:style>
+          <a:lnRef idx="1">
+            <a:schemeClr val="accent1"/>
+          </a:lnRef>
+          <a:fillRef idx="3">
+            <a:schemeClr val="accent1"/>
+          </a:fillRef>
+          <a:effectRef idx="2">
+            <a:schemeClr val="accent1"/>
+          </a:effectRef>
+          <a:fontRef idx="minor">
+            <a:schemeClr val="lt1"/>
+          </a:fontRef>
+        </p:style>
+        <p:txBody>
+          <a:bodyPr rtlCol="0" anchor="ctr" lIns="0" rIns="0" tIns="0" bIns="0"/>
+          <a:lstStyle/>
+          <a:p>
+            <a:pPr algn="ctr"/>
+            <a:r>
+              <a:rPr sz="1300" b="1" i="0">
+                <a:solidFill>
+                  <a:srgbClr val="B3B3B3"/>
+                </a:solidFill>
+                <a:latin typeface="Arial"/>
+              </a:rPr>
+              <a:t>1</a:t>
+            </a:r>
+          </a:p>
+        </p:txBody>
+      </p:sp>
+      <p:sp>
+        <p:nvSpPr>
+          <p:cNvPr id="22" name="TextBox 21"/>
+          <p:cNvSpPr txBox="1"/>
+          <p:nvPr/>
+        </p:nvSpPr>
+        <p:spPr>
+          <a:xfrm>
+            <a:off x="4800600" y="1143000"/>
+            <a:ext cx="3886200" cy="640080"/>
+          </a:xfrm>
+          <a:prstGeom prst="rect">
+            <a:avLst/>
+          </a:prstGeom>
+          <a:noFill/>
+        </p:spPr>
+        <p:txBody>
+          <a:bodyPr wrap="square" lIns="0" rIns="0" tIns="0" bIns="0" anchor="t">
+            <a:spAutoFit/>
+          </a:bodyPr>
+          <a:lstStyle/>
+          <a:p>
             <a:pPr algn="l"/>
             <a:r>
-              <a:rPr sz="900" b="0" i="1">
-                <a:solidFill>
-                  <a:srgbClr val="666666"/>
+              <a:rPr sz="1000" b="1" i="0">
+                <a:solidFill>
+                  <a:srgbClr val="B3B3B3"/>
                 </a:solidFill>
                 <a:latin typeface="Calibri"/>
               </a:rPr>
-              <a:t>Ilustración con datos sintéticos.</a:t>
-            </a:r>
-          </a:p>
-        </p:txBody>
-      </p:sp>
-      <p:sp>
-        <p:nvSpPr>
-          <p:cNvPr id="9" name="Oval 8"/>
+              <a:t>Definir "estado estable"</a:t>
+            </a:r>
+          </a:p>
+          <a:p>
+            <a:pPr algn="l"/>
+            <a:r>
+              <a:rPr sz="1000" b="0" i="0">
+                <a:solidFill>
+                  <a:srgbClr val="B3B3B3"/>
+                </a:solidFill>
+                <a:latin typeface="Calibri"/>
+              </a:rPr>
+              <a:t>Con carga, de subida, sin cambio de pendiente y a velocidad estable</a:t>
+            </a:r>
+          </a:p>
+        </p:txBody>
+      </p:sp>
+      <p:sp>
+        <p:nvSpPr>
+          <p:cNvPr id="23" name="Rectangle 22"/>
           <p:cNvSpPr/>
           <p:nvPr/>
         </p:nvSpPr>
         <p:spPr>
           <a:xfrm>
-            <a:off x="5486400" y="1143000"/>
+            <a:off x="4494276" y="1508760"/>
+            <a:ext cx="18288" cy="292608"/>
+          </a:xfrm>
+          <a:prstGeom prst="rect">
+            <a:avLst/>
+          </a:prstGeom>
+          <a:solidFill>
+            <a:srgbClr val="D9D9D9"/>
+          </a:solidFill>
+          <a:ln>
+            <a:noFill/>
+          </a:ln>
+        </p:spPr>
+        <p:style>
+          <a:lnRef idx="1">
+            <a:schemeClr val="accent1"/>
+          </a:lnRef>
+          <a:fillRef idx="3">
+            <a:schemeClr val="accent1"/>
+          </a:fillRef>
+          <a:effectRef idx="2">
+            <a:schemeClr val="accent1"/>
+          </a:effectRef>
+          <a:fontRef idx="minor">
+            <a:schemeClr val="lt1"/>
+          </a:fontRef>
+        </p:style>
+        <p:txBody>
+          <a:bodyPr rtlCol="0" anchor="ctr"/>
+          <a:lstStyle/>
+          <a:p/>
+        </p:txBody>
+      </p:sp>
+      <p:sp>
+        <p:nvSpPr>
+          <p:cNvPr id="24" name="Oval 23"/>
+          <p:cNvSpPr/>
+          <p:nvPr/>
+        </p:nvSpPr>
+        <p:spPr>
+          <a:xfrm>
+            <a:off x="4343400" y="1837943"/>
+            <a:ext cx="320040" cy="320040"/>
+          </a:xfrm>
+          <a:prstGeom prst="ellipse">
+            <a:avLst/>
+          </a:prstGeom>
+          <a:solidFill>
+            <a:srgbClr val="F2F2F2"/>
+          </a:solidFill>
+          <a:ln>
+            <a:noFill/>
+          </a:ln>
+        </p:spPr>
+        <p:style>
+          <a:lnRef idx="1">
+            <a:schemeClr val="accent1"/>
+          </a:lnRef>
+          <a:fillRef idx="3">
+            <a:schemeClr val="accent1"/>
+          </a:fillRef>
+          <a:effectRef idx="2">
+            <a:schemeClr val="accent1"/>
+          </a:effectRef>
+          <a:fontRef idx="minor">
+            <a:schemeClr val="lt1"/>
+          </a:fontRef>
+        </p:style>
+        <p:txBody>
+          <a:bodyPr rtlCol="0" anchor="ctr" lIns="0" rIns="0" tIns="0" bIns="0"/>
+          <a:lstStyle/>
+          <a:p>
+            <a:pPr algn="ctr"/>
+            <a:r>
+              <a:rPr sz="1300" b="1" i="0">
+                <a:solidFill>
+                  <a:srgbClr val="B3B3B3"/>
+                </a:solidFill>
+                <a:latin typeface="Arial"/>
+              </a:rPr>
+              <a:t>2</a:t>
+            </a:r>
+          </a:p>
+        </p:txBody>
+      </p:sp>
+      <p:sp>
+        <p:nvSpPr>
+          <p:cNvPr id="25" name="TextBox 24"/>
+          <p:cNvSpPr txBox="1"/>
+          <p:nvPr/>
+        </p:nvSpPr>
+        <p:spPr>
+          <a:xfrm>
+            <a:off x="4800600" y="1819656"/>
+            <a:ext cx="3886200" cy="640080"/>
+          </a:xfrm>
+          <a:prstGeom prst="rect">
+            <a:avLst/>
+          </a:prstGeom>
+          <a:noFill/>
+        </p:spPr>
+        <p:txBody>
+          <a:bodyPr wrap="square" lIns="0" rIns="0" tIns="0" bIns="0" anchor="t">
+            <a:spAutoFit/>
+          </a:bodyPr>
+          <a:lstStyle/>
+          <a:p>
+            <a:pPr algn="l"/>
+            <a:r>
+              <a:rPr sz="1000" b="1" i="0">
+                <a:solidFill>
+                  <a:srgbClr val="B3B3B3"/>
+                </a:solidFill>
+                <a:latin typeface="Calibri"/>
+              </a:rPr>
+              <a:t>Extraer y particionar</a:t>
+            </a:r>
+          </a:p>
+          <a:p>
+            <a:pPr algn="l"/>
+            <a:r>
+              <a:rPr sz="1000" b="0" i="0">
+                <a:solidFill>
+                  <a:srgbClr val="B3B3B3"/>
+                </a:solidFill>
+                <a:latin typeface="Calibri"/>
+              </a:rPr>
+              <a:t>Toda la serie de tiempo → una tabla con estadísticos por evento</a:t>
+            </a:r>
+          </a:p>
+        </p:txBody>
+      </p:sp>
+      <p:sp>
+        <p:nvSpPr>
+          <p:cNvPr id="26" name="Rectangle 25"/>
+          <p:cNvSpPr/>
+          <p:nvPr/>
+        </p:nvSpPr>
+        <p:spPr>
+          <a:xfrm>
+            <a:off x="4494276" y="2185416"/>
+            <a:ext cx="18288" cy="292608"/>
+          </a:xfrm>
+          <a:prstGeom prst="rect">
+            <a:avLst/>
+          </a:prstGeom>
+          <a:solidFill>
+            <a:srgbClr val="D9D9D9"/>
+          </a:solidFill>
+          <a:ln>
+            <a:noFill/>
+          </a:ln>
+        </p:spPr>
+        <p:style>
+          <a:lnRef idx="1">
+            <a:schemeClr val="accent1"/>
+          </a:lnRef>
+          <a:fillRef idx="3">
+            <a:schemeClr val="accent1"/>
+          </a:fillRef>
+          <a:effectRef idx="2">
+            <a:schemeClr val="accent1"/>
+          </a:effectRef>
+          <a:fontRef idx="minor">
+            <a:schemeClr val="lt1"/>
+          </a:fontRef>
+        </p:style>
+        <p:txBody>
+          <a:bodyPr rtlCol="0" anchor="ctr"/>
+          <a:lstStyle/>
+          <a:p/>
+        </p:txBody>
+      </p:sp>
+      <p:sp>
+        <p:nvSpPr>
+          <p:cNvPr id="27" name="Oval 26"/>
+          <p:cNvSpPr/>
+          <p:nvPr/>
+        </p:nvSpPr>
+        <p:spPr>
+          <a:xfrm>
+            <a:off x="4343400" y="2514600"/>
             <a:ext cx="320040" cy="320040"/>
           </a:xfrm>
           <a:prstGeom prst="ellipse">
@@ -4318,21 +5576,21 @@
                 </a:solidFill>
                 <a:latin typeface="Arial"/>
               </a:rPr>
-              <a:t>1</a:t>
-            </a:r>
-          </a:p>
-        </p:txBody>
-      </p:sp>
-      <p:sp>
-        <p:nvSpPr>
-          <p:cNvPr id="10" name="TextBox 9"/>
+              <a:t>3</a:t>
+            </a:r>
+          </a:p>
+        </p:txBody>
+      </p:sp>
+      <p:sp>
+        <p:nvSpPr>
+          <p:cNvPr id="28" name="TextBox 27"/>
           <p:cNvSpPr txBox="1"/>
           <p:nvPr/>
         </p:nvSpPr>
         <p:spPr>
           <a:xfrm>
-            <a:off x="5943600" y="1097280"/>
-            <a:ext cx="2743200" cy="713232"/>
+            <a:off x="4800600" y="2496312"/>
+            <a:ext cx="3886200" cy="640080"/>
           </a:xfrm>
           <a:prstGeom prst="rect">
             <a:avLst/>
@@ -4349,11 +5607,11 @@
             <a:r>
               <a:rPr sz="1100" b="1" i="0">
                 <a:solidFill>
-                  <a:srgbClr val="666666"/>
+                  <a:srgbClr val="1A1A1A"/>
                 </a:solidFill>
                 <a:latin typeface="Calibri"/>
               </a:rPr>
-              <a:t>Definir "estado estable"</a:t>
+              <a:t>Mapear inicio y fin</a:t>
             </a:r>
           </a:p>
           <a:p>
@@ -4361,31 +5619,31 @@
             <a:r>
               <a:rPr sz="1100" b="0" i="0">
                 <a:solidFill>
-                  <a:srgbClr val="666666"/>
+                  <a:srgbClr val="1A1A1A"/>
                 </a:solidFill>
                 <a:latin typeface="Calibri"/>
               </a:rPr>
-              <a:t>Con carga, de subida sin variación de grado, velocidad estable</a:t>
-            </a:r>
-          </a:p>
-        </p:txBody>
-      </p:sp>
-      <p:sp>
-        <p:nvSpPr>
-          <p:cNvPr id="11" name="Oval 10"/>
+              <a:t>Cada evento es una línea recta sobre el mapa de la mina</a:t>
+            </a:r>
+          </a:p>
+        </p:txBody>
+      </p:sp>
+      <p:sp>
+        <p:nvSpPr>
+          <p:cNvPr id="29" name="Rectangle 28"/>
           <p:cNvSpPr/>
           <p:nvPr/>
         </p:nvSpPr>
         <p:spPr>
           <a:xfrm>
-            <a:off x="5486400" y="1856231"/>
-            <a:ext cx="320040" cy="320040"/>
-          </a:xfrm>
-          <a:prstGeom prst="ellipse">
+            <a:off x="4494276" y="2862072"/>
+            <a:ext cx="18288" cy="292608"/>
+          </a:xfrm>
+          <a:prstGeom prst="rect">
             <a:avLst/>
           </a:prstGeom>
           <a:solidFill>
-            <a:srgbClr val="FFF500"/>
+            <a:srgbClr val="D9D9D9"/>
           </a:solidFill>
           <a:ln>
             <a:noFill/>
@@ -4406,85 +5664,27 @@
           </a:fontRef>
         </p:style>
         <p:txBody>
-          <a:bodyPr rtlCol="0" anchor="ctr" lIns="0" rIns="0" tIns="0" bIns="0"/>
-          <a:lstStyle/>
-          <a:p>
-            <a:pPr algn="ctr"/>
-            <a:r>
-              <a:rPr sz="1300" b="1" i="0">
-                <a:solidFill>
-                  <a:srgbClr val="1A1A1A"/>
-                </a:solidFill>
-                <a:latin typeface="Arial"/>
-              </a:rPr>
-              <a:t>2</a:t>
-            </a:r>
-          </a:p>
-        </p:txBody>
-      </p:sp>
-      <p:sp>
-        <p:nvSpPr>
-          <p:cNvPr id="12" name="TextBox 11"/>
-          <p:cNvSpPr txBox="1"/>
-          <p:nvPr/>
-        </p:nvSpPr>
-        <p:spPr>
-          <a:xfrm>
-            <a:off x="5943600" y="1810512"/>
-            <a:ext cx="2743200" cy="713232"/>
-          </a:xfrm>
-          <a:prstGeom prst="rect">
-            <a:avLst/>
-          </a:prstGeom>
-          <a:noFill/>
-        </p:spPr>
-        <p:txBody>
-          <a:bodyPr wrap="square" lIns="0" rIns="0" tIns="0" bIns="0" anchor="t">
-            <a:spAutoFit/>
-          </a:bodyPr>
-          <a:lstStyle/>
-          <a:p>
-            <a:pPr algn="l"/>
-            <a:r>
-              <a:rPr sz="1100" b="1" i="0">
-                <a:solidFill>
-                  <a:srgbClr val="666666"/>
-                </a:solidFill>
-                <a:latin typeface="Calibri"/>
-              </a:rPr>
-              <a:t>Extraer y particionar</a:t>
-            </a:r>
-          </a:p>
-          <a:p>
-            <a:pPr algn="l"/>
-            <a:r>
-              <a:rPr sz="1100" b="0" i="0">
-                <a:solidFill>
-                  <a:srgbClr val="666666"/>
-                </a:solidFill>
-                <a:latin typeface="Calibri"/>
-              </a:rPr>
-              <a:t>Todos los datos → tabla de estadísticos por evento</a:t>
-            </a:r>
-          </a:p>
-        </p:txBody>
-      </p:sp>
-      <p:sp>
-        <p:nvSpPr>
-          <p:cNvPr id="13" name="Oval 12"/>
+          <a:bodyPr rtlCol="0" anchor="ctr"/>
+          <a:lstStyle/>
+          <a:p/>
+        </p:txBody>
+      </p:sp>
+      <p:sp>
+        <p:nvSpPr>
+          <p:cNvPr id="30" name="Oval 29"/>
           <p:cNvSpPr/>
           <p:nvPr/>
         </p:nvSpPr>
         <p:spPr>
           <a:xfrm>
-            <a:off x="5486400" y="2569463"/>
+            <a:off x="4343400" y="3191256"/>
             <a:ext cx="320040" cy="320040"/>
           </a:xfrm>
           <a:prstGeom prst="ellipse">
             <a:avLst/>
           </a:prstGeom>
           <a:solidFill>
-            <a:srgbClr val="FFF500"/>
+            <a:srgbClr val="F2F2F2"/>
           </a:solidFill>
           <a:ln>
             <a:noFill/>
@@ -4512,25 +5712,25 @@
             <a:r>
               <a:rPr sz="1300" b="1" i="0">
                 <a:solidFill>
-                  <a:srgbClr val="1A1A1A"/>
+                  <a:srgbClr val="B3B3B3"/>
                 </a:solidFill>
                 <a:latin typeface="Arial"/>
               </a:rPr>
-              <a:t>3</a:t>
-            </a:r>
-          </a:p>
-        </p:txBody>
-      </p:sp>
-      <p:sp>
-        <p:nvSpPr>
-          <p:cNvPr id="14" name="TextBox 13"/>
+              <a:t>4</a:t>
+            </a:r>
+          </a:p>
+        </p:txBody>
+      </p:sp>
+      <p:sp>
+        <p:nvSpPr>
+          <p:cNvPr id="31" name="TextBox 30"/>
           <p:cNvSpPr txBox="1"/>
           <p:nvPr/>
         </p:nvSpPr>
         <p:spPr>
           <a:xfrm>
-            <a:off x="5943600" y="2523744"/>
-            <a:ext cx="2743200" cy="713232"/>
+            <a:off x="4800600" y="3172968"/>
+            <a:ext cx="3886200" cy="640080"/>
           </a:xfrm>
           <a:prstGeom prst="rect">
             <a:avLst/>
@@ -4545,138 +5745,39 @@
           <a:p>
             <a:pPr algn="l"/>
             <a:r>
-              <a:rPr sz="1100" b="1" i="0">
-                <a:solidFill>
-                  <a:srgbClr val="666666"/>
+              <a:rPr sz="1000" b="1" i="0">
+                <a:solidFill>
+                  <a:srgbClr val="B3B3B3"/>
                 </a:solidFill>
                 <a:latin typeface="Calibri"/>
               </a:rPr>
-              <a:t>Mapear inicio y fin</a:t>
+              <a:t>Agrupar con DBSCAN</a:t>
             </a:r>
           </a:p>
           <a:p>
             <a:pPr algn="l"/>
             <a:r>
-              <a:rPr sz="1100" b="0" i="0">
-                <a:solidFill>
-                  <a:srgbClr val="666666"/>
+              <a:rPr sz="1000" b="0" i="0">
+                <a:solidFill>
+                  <a:srgbClr val="B3B3B3"/>
                 </a:solidFill>
                 <a:latin typeface="Calibri"/>
               </a:rPr>
-              <a:t>Cada evento es una línea recta sobre el mapa de la mina</a:t>
-            </a:r>
-          </a:p>
-        </p:txBody>
-      </p:sp>
-      <p:sp>
-        <p:nvSpPr>
-          <p:cNvPr id="15" name="Oval 14"/>
+              <a:t>Junta los eventos que recorren el mismo tramo, aunque estén muy cerca de otro</a:t>
+            </a:r>
+          </a:p>
+        </p:txBody>
+      </p:sp>
+      <p:sp>
+        <p:nvSpPr>
+          <p:cNvPr id="32" name="Rounded Rectangle 31"/>
           <p:cNvSpPr/>
           <p:nvPr/>
         </p:nvSpPr>
         <p:spPr>
           <a:xfrm>
-            <a:off x="5486400" y="3282696"/>
-            <a:ext cx="320040" cy="320040"/>
-          </a:xfrm>
-          <a:prstGeom prst="ellipse">
-            <a:avLst/>
-          </a:prstGeom>
-          <a:solidFill>
-            <a:srgbClr val="FFF500"/>
-          </a:solidFill>
-          <a:ln>
-            <a:noFill/>
-          </a:ln>
-        </p:spPr>
-        <p:style>
-          <a:lnRef idx="1">
-            <a:schemeClr val="accent1"/>
-          </a:lnRef>
-          <a:fillRef idx="3">
-            <a:schemeClr val="accent1"/>
-          </a:fillRef>
-          <a:effectRef idx="2">
-            <a:schemeClr val="accent1"/>
-          </a:effectRef>
-          <a:fontRef idx="minor">
-            <a:schemeClr val="lt1"/>
-          </a:fontRef>
-        </p:style>
-        <p:txBody>
-          <a:bodyPr rtlCol="0" anchor="ctr" lIns="0" rIns="0" tIns="0" bIns="0"/>
-          <a:lstStyle/>
-          <a:p>
-            <a:pPr algn="ctr"/>
-            <a:r>
-              <a:rPr sz="1300" b="1" i="0">
-                <a:solidFill>
-                  <a:srgbClr val="1A1A1A"/>
-                </a:solidFill>
-                <a:latin typeface="Arial"/>
-              </a:rPr>
-              <a:t>4</a:t>
-            </a:r>
-          </a:p>
-        </p:txBody>
-      </p:sp>
-      <p:sp>
-        <p:nvSpPr>
-          <p:cNvPr id="16" name="TextBox 15"/>
-          <p:cNvSpPr txBox="1"/>
-          <p:nvPr/>
-        </p:nvSpPr>
-        <p:spPr>
-          <a:xfrm>
-            <a:off x="5943600" y="3236976"/>
-            <a:ext cx="2743200" cy="713232"/>
-          </a:xfrm>
-          <a:prstGeom prst="rect">
-            <a:avLst/>
-          </a:prstGeom>
-          <a:noFill/>
-        </p:spPr>
-        <p:txBody>
-          <a:bodyPr wrap="square" lIns="0" rIns="0" tIns="0" bIns="0" anchor="t">
-            <a:spAutoFit/>
-          </a:bodyPr>
-          <a:lstStyle/>
-          <a:p>
-            <a:pPr algn="l"/>
-            <a:r>
-              <a:rPr sz="1100" b="1" i="0">
-                <a:solidFill>
-                  <a:srgbClr val="666666"/>
-                </a:solidFill>
-                <a:latin typeface="Calibri"/>
-              </a:rPr>
-              <a:t>DBSCAN</a:t>
-            </a:r>
-          </a:p>
-          <a:p>
-            <a:pPr algn="l"/>
-            <a:r>
-              <a:rPr sz="1100" b="0" i="0">
-                <a:solidFill>
-                  <a:srgbClr val="666666"/>
-                </a:solidFill>
-                <a:latin typeface="Calibri"/>
-              </a:rPr>
-              <a:t>Separa los tramos más transitados, incluso los muy cercanos</a:t>
-            </a:r>
-          </a:p>
-        </p:txBody>
-      </p:sp>
-      <p:sp>
-        <p:nvSpPr>
-          <p:cNvPr id="17" name="Rounded Rectangle 16"/>
-          <p:cNvSpPr/>
-          <p:nvPr/>
-        </p:nvSpPr>
-        <p:spPr>
-          <a:xfrm>
-            <a:off x="457200" y="4023360"/>
-            <a:ext cx="8229600" cy="594360"/>
+            <a:off x="457200" y="3977639"/>
+            <a:ext cx="8229600" cy="640080"/>
           </a:xfrm>
           <a:prstGeom prst="roundRect">
             <a:avLst>
@@ -4712,14 +5813,14 @@
       </p:sp>
       <p:sp>
         <p:nvSpPr>
-          <p:cNvPr id="18" name="TextBox 17"/>
+          <p:cNvPr id="33" name="TextBox 32"/>
           <p:cNvSpPr txBox="1"/>
           <p:nvPr/>
         </p:nvSpPr>
         <p:spPr>
           <a:xfrm>
-            <a:off x="594360" y="4096512"/>
-            <a:ext cx="7955279" cy="448056"/>
+            <a:off x="594360" y="4050791"/>
+            <a:ext cx="7955279" cy="493775"/>
           </a:xfrm>
           <a:prstGeom prst="rect">
             <a:avLst/>
@@ -4740,7 +5841,25 @@
                 </a:solidFill>
                 <a:latin typeface="Calibri"/>
               </a:rPr>
-              <a:t>Pregunta: ¿cuál es el tramo más transitado de la mina, para comparar cada máquina en las mismas condiciones?</a:t>
+              <a:t>Pregunta: ¿cuál es el </a:t>
+            </a:r>
+            <a:r>
+              <a:rPr sz="1200" b="1" i="0">
+                <a:solidFill>
+                  <a:srgbClr val="1A1A1A"/>
+                </a:solidFill>
+                <a:latin typeface="Calibri"/>
+              </a:rPr>
+              <a:t>tramo más transitado</a:t>
+            </a:r>
+            <a:r>
+              <a:rPr sz="1200" b="0" i="0">
+                <a:solidFill>
+                  <a:srgbClr val="1A1A1A"/>
+                </a:solidFill>
+                <a:latin typeface="Calibri"/>
+              </a:rPr>
+              <a:t> de la mina, para comparar cada máquina en las mismas condiciones?</a:t>
             </a:r>
           </a:p>
         </p:txBody>
@@ -4753,8 +5872,958 @@
 </p:sld>
 </file>
 
-<file path=ppt/slides/slide12.xml><?xml version="1.0" encoding="utf-8"?>
-<p:sld xmlns:a="http://schemas.openxmlformats.org/drawingml/2006/main" xmlns:p="http://schemas.openxmlformats.org/presentationml/2006/main" xmlns:r="http://schemas.openxmlformats.org/officeDocument/2006/relationships">
+<file path=ppt/slides/slide13.xml><?xml version="1.0" encoding="utf-8"?>
+<p:sld xmlns:a="http://schemas.openxmlformats.org/drawingml/2006/main" xmlns:r="http://schemas.openxmlformats.org/officeDocument/2006/relationships" xmlns:p="http://schemas.openxmlformats.org/presentationml/2006/main">
+  <p:cSld>
+    <p:spTree>
+      <p:nvGrpSpPr>
+        <p:cNvPr id="1" name="">
+          <a:extLst>
+            <a:ext uri="{FF2B5EF4-FFF2-40B4-BE49-F238E27FC236}">
+              <a16:creationId xmlns:a16="http://schemas.microsoft.com/office/drawing/2014/main" id="{9FFEB702-E7E7-E066-F09D-09E7479287C2}"/>
+            </a:ext>
+          </a:extLst>
+        </p:cNvPr>
+        <p:cNvGrpSpPr/>
+        <p:nvPr/>
+      </p:nvGrpSpPr>
+      <p:grpSpPr>
+        <a:xfrm>
+          <a:off x="0" y="0"/>
+          <a:ext cx="0" cy="0"/>
+          <a:chOff x="0" y="0"/>
+          <a:chExt cx="0" cy="0"/>
+        </a:xfrm>
+      </p:grpSpPr>
+      <p:sp>
+        <p:nvSpPr>
+          <p:cNvPr id="2" name="Rectangle 1">
+            <a:extLst>
+              <a:ext uri="{FF2B5EF4-FFF2-40B4-BE49-F238E27FC236}">
+                <a16:creationId xmlns:a16="http://schemas.microsoft.com/office/drawing/2014/main" id="{747FDF68-F7B2-E57A-75C6-F372A886CC7E}"/>
+              </a:ext>
+            </a:extLst>
+          </p:cNvPr>
+          <p:cNvSpPr/>
+          <p:nvPr/>
+        </p:nvSpPr>
+        <p:spPr>
+          <a:xfrm>
+            <a:off x="0" y="0"/>
+            <a:ext cx="9144000" cy="914400"/>
+          </a:xfrm>
+          <a:prstGeom prst="rect">
+            <a:avLst/>
+          </a:prstGeom>
+          <a:solidFill>
+            <a:srgbClr val="1A1A1A"/>
+          </a:solidFill>
+          <a:ln>
+            <a:noFill/>
+          </a:ln>
+        </p:spPr>
+        <p:style>
+          <a:lnRef idx="1">
+            <a:schemeClr val="accent1"/>
+          </a:lnRef>
+          <a:fillRef idx="3">
+            <a:schemeClr val="accent1"/>
+          </a:fillRef>
+          <a:effectRef idx="2">
+            <a:schemeClr val="accent1"/>
+          </a:effectRef>
+          <a:fontRef idx="minor">
+            <a:schemeClr val="lt1"/>
+          </a:fontRef>
+        </p:style>
+        <p:txBody>
+          <a:bodyPr rtlCol="0" anchor="ctr"/>
+          <a:lstStyle/>
+          <a:p>
+            <a:endParaRPr/>
+          </a:p>
+        </p:txBody>
+      </p:sp>
+      <p:sp>
+        <p:nvSpPr>
+          <p:cNvPr id="3" name="Rectangle 2">
+            <a:extLst>
+              <a:ext uri="{FF2B5EF4-FFF2-40B4-BE49-F238E27FC236}">
+                <a16:creationId xmlns:a16="http://schemas.microsoft.com/office/drawing/2014/main" id="{56F5FCCC-DC0C-A3D8-5077-10DEC9BEB8E0}"/>
+              </a:ext>
+            </a:extLst>
+          </p:cNvPr>
+          <p:cNvSpPr/>
+          <p:nvPr/>
+        </p:nvSpPr>
+        <p:spPr>
+          <a:xfrm>
+            <a:off x="0" y="868680"/>
+            <a:ext cx="9144000" cy="45720"/>
+          </a:xfrm>
+          <a:prstGeom prst="rect">
+            <a:avLst/>
+          </a:prstGeom>
+          <a:solidFill>
+            <a:srgbClr val="FFF500"/>
+          </a:solidFill>
+          <a:ln>
+            <a:noFill/>
+          </a:ln>
+        </p:spPr>
+        <p:style>
+          <a:lnRef idx="1">
+            <a:schemeClr val="accent1"/>
+          </a:lnRef>
+          <a:fillRef idx="3">
+            <a:schemeClr val="accent1"/>
+          </a:fillRef>
+          <a:effectRef idx="2">
+            <a:schemeClr val="accent1"/>
+          </a:effectRef>
+          <a:fontRef idx="minor">
+            <a:schemeClr val="lt1"/>
+          </a:fontRef>
+        </p:style>
+        <p:txBody>
+          <a:bodyPr rtlCol="0" anchor="ctr"/>
+          <a:lstStyle/>
+          <a:p>
+            <a:endParaRPr/>
+          </a:p>
+        </p:txBody>
+      </p:sp>
+      <p:sp>
+        <p:nvSpPr>
+          <p:cNvPr id="4" name="TextBox 3">
+            <a:extLst>
+              <a:ext uri="{FF2B5EF4-FFF2-40B4-BE49-F238E27FC236}">
+                <a16:creationId xmlns:a16="http://schemas.microsoft.com/office/drawing/2014/main" id="{20E3D5CF-293E-09C1-33AA-3D9BE31E3EAA}"/>
+              </a:ext>
+            </a:extLst>
+          </p:cNvPr>
+          <p:cNvSpPr txBox="1"/>
+          <p:nvPr/>
+        </p:nvSpPr>
+        <p:spPr>
+          <a:xfrm>
+            <a:off x="548640" y="137160"/>
+            <a:ext cx="8046720" cy="640080"/>
+          </a:xfrm>
+          <a:prstGeom prst="rect">
+            <a:avLst/>
+          </a:prstGeom>
+          <a:noFill/>
+        </p:spPr>
+        <p:txBody>
+          <a:bodyPr wrap="square" lIns="0" tIns="0" rIns="0" bIns="0" anchor="ctr">
+            <a:spAutoFit/>
+          </a:bodyPr>
+          <a:lstStyle/>
+          <a:p>
+            <a:pPr algn="l"/>
+            <a:r>
+              <a:rPr sz="2800" b="1" i="0">
+                <a:solidFill>
+                  <a:srgbClr val="FFFFFF"/>
+                </a:solidFill>
+                <a:latin typeface="Arial"/>
+              </a:rPr>
+              <a:t>Caso de estudio: minería (Caterpillar)</a:t>
+            </a:r>
+          </a:p>
+        </p:txBody>
+      </p:sp>
+      <p:sp>
+        <p:nvSpPr>
+          <p:cNvPr id="5" name="Rectangle 4">
+            <a:extLst>
+              <a:ext uri="{FF2B5EF4-FFF2-40B4-BE49-F238E27FC236}">
+                <a16:creationId xmlns:a16="http://schemas.microsoft.com/office/drawing/2014/main" id="{C41DA8E0-9770-A4E0-4809-F12A19FE0209}"/>
+              </a:ext>
+            </a:extLst>
+          </p:cNvPr>
+          <p:cNvSpPr/>
+          <p:nvPr/>
+        </p:nvSpPr>
+        <p:spPr>
+          <a:xfrm>
+            <a:off x="0" y="4873752"/>
+            <a:ext cx="9144000" cy="274320"/>
+          </a:xfrm>
+          <a:prstGeom prst="rect">
+            <a:avLst/>
+          </a:prstGeom>
+          <a:solidFill>
+            <a:srgbClr val="1A1A1A"/>
+          </a:solidFill>
+          <a:ln>
+            <a:noFill/>
+          </a:ln>
+        </p:spPr>
+        <p:style>
+          <a:lnRef idx="1">
+            <a:schemeClr val="accent1"/>
+          </a:lnRef>
+          <a:fillRef idx="3">
+            <a:schemeClr val="accent1"/>
+          </a:fillRef>
+          <a:effectRef idx="2">
+            <a:schemeClr val="accent1"/>
+          </a:effectRef>
+          <a:fontRef idx="minor">
+            <a:schemeClr val="lt1"/>
+          </a:fontRef>
+        </p:style>
+        <p:txBody>
+          <a:bodyPr rtlCol="0" anchor="ctr"/>
+          <a:lstStyle/>
+          <a:p>
+            <a:endParaRPr/>
+          </a:p>
+        </p:txBody>
+      </p:sp>
+      <p:sp>
+        <p:nvSpPr>
+          <p:cNvPr id="6" name="TextBox 5">
+            <a:extLst>
+              <a:ext uri="{FF2B5EF4-FFF2-40B4-BE49-F238E27FC236}">
+                <a16:creationId xmlns:a16="http://schemas.microsoft.com/office/drawing/2014/main" id="{976ECDF5-CE5F-82E7-30B1-C2D9419CDE27}"/>
+              </a:ext>
+            </a:extLst>
+          </p:cNvPr>
+          <p:cNvSpPr txBox="1"/>
+          <p:nvPr/>
+        </p:nvSpPr>
+        <p:spPr>
+          <a:xfrm>
+            <a:off x="457200" y="4892040"/>
+            <a:ext cx="8229600" cy="228600"/>
+          </a:xfrm>
+          <a:prstGeom prst="rect">
+            <a:avLst/>
+          </a:prstGeom>
+          <a:noFill/>
+        </p:spPr>
+        <p:txBody>
+          <a:bodyPr wrap="square" lIns="0" tIns="0" rIns="0" bIns="0" anchor="ctr">
+            <a:spAutoFit/>
+          </a:bodyPr>
+          <a:lstStyle/>
+          <a:p>
+            <a:pPr algn="l"/>
+            <a:r>
+              <a:rPr sz="800" b="0" i="0">
+                <a:solidFill>
+                  <a:srgbClr val="666666"/>
+                </a:solidFill>
+                <a:latin typeface="Calibri"/>
+              </a:rPr>
+              <a:t>UDEM  |  Modelos de Analítica Predictiva  |  Jorge A. Ramírez García, M.Eng.</a:t>
+            </a:r>
+          </a:p>
+        </p:txBody>
+      </p:sp>
+      <p:pic>
+        <p:nvPicPr>
+          <p:cNvPr id="8" name="Imagen 7">
+            <a:extLst>
+              <a:ext uri="{FF2B5EF4-FFF2-40B4-BE49-F238E27FC236}">
+                <a16:creationId xmlns:a16="http://schemas.microsoft.com/office/drawing/2014/main" id="{318C78A7-5A2A-2BDF-7B59-E049211970B1}"/>
+              </a:ext>
+            </a:extLst>
+          </p:cNvPr>
+          <p:cNvPicPr>
+            <a:picLocks noChangeAspect="1"/>
+          </p:cNvPicPr>
+          <p:nvPr/>
+        </p:nvPicPr>
+        <p:blipFill>
+          <a:blip r:embed="rId2"/>
+          <a:stretch>
+            <a:fillRect/>
+          </a:stretch>
+        </p:blipFill>
+        <p:spPr>
+          <a:xfrm>
+            <a:off x="457200" y="1051560"/>
+            <a:ext cx="2985840" cy="2651760"/>
+          </a:xfrm>
+          <a:prstGeom prst="rect">
+            <a:avLst/>
+          </a:prstGeom>
+          <a:ln w="9525">
+            <a:solidFill>
+              <a:srgbClr val="D9D9D9"/>
+            </a:solidFill>
+          </a:ln>
+        </p:spPr>
+      </p:pic>
+      <p:sp>
+        <p:nvSpPr>
+          <p:cNvPr id="9" name="TextBox 8"/>
+          <p:cNvSpPr txBox="1"/>
+          <p:nvPr/>
+        </p:nvSpPr>
+        <p:spPr>
+          <a:xfrm>
+            <a:off x="457200" y="3749039"/>
+            <a:ext cx="2985840" cy="228600"/>
+          </a:xfrm>
+          <a:prstGeom prst="rect">
+            <a:avLst/>
+          </a:prstGeom>
+          <a:noFill/>
+        </p:spPr>
+        <p:txBody>
+          <a:bodyPr wrap="square" lIns="0" rIns="0" tIns="0" bIns="0" anchor="t">
+            <a:spAutoFit/>
+          </a:bodyPr>
+          <a:lstStyle/>
+          <a:p>
+            <a:pPr algn="ctr"/>
+            <a:r>
+              <a:rPr sz="900" b="0" i="1">
+                <a:solidFill>
+                  <a:srgbClr val="666666"/>
+                </a:solidFill>
+                <a:latin typeface="Calibri"/>
+              </a:rPr>
+              <a:t>Cada color = un tramo (cluster) encontrado por DBSCAN</a:t>
+            </a:r>
+          </a:p>
+        </p:txBody>
+      </p:sp>
+      <p:sp>
+        <p:nvSpPr>
+          <p:cNvPr id="10" name="Oval 9"/>
+          <p:cNvSpPr/>
+          <p:nvPr/>
+        </p:nvSpPr>
+        <p:spPr>
+          <a:xfrm>
+            <a:off x="4343400" y="1161288"/>
+            <a:ext cx="320040" cy="320040"/>
+          </a:xfrm>
+          <a:prstGeom prst="ellipse">
+            <a:avLst/>
+          </a:prstGeom>
+          <a:solidFill>
+            <a:srgbClr val="F2F2F2"/>
+          </a:solidFill>
+          <a:ln>
+            <a:noFill/>
+          </a:ln>
+        </p:spPr>
+        <p:style>
+          <a:lnRef idx="1">
+            <a:schemeClr val="accent1"/>
+          </a:lnRef>
+          <a:fillRef idx="3">
+            <a:schemeClr val="accent1"/>
+          </a:fillRef>
+          <a:effectRef idx="2">
+            <a:schemeClr val="accent1"/>
+          </a:effectRef>
+          <a:fontRef idx="minor">
+            <a:schemeClr val="lt1"/>
+          </a:fontRef>
+        </p:style>
+        <p:txBody>
+          <a:bodyPr rtlCol="0" anchor="ctr" lIns="0" rIns="0" tIns="0" bIns="0"/>
+          <a:lstStyle/>
+          <a:p>
+            <a:pPr algn="ctr"/>
+            <a:r>
+              <a:rPr sz="1300" b="1" i="0">
+                <a:solidFill>
+                  <a:srgbClr val="B3B3B3"/>
+                </a:solidFill>
+                <a:latin typeface="Arial"/>
+              </a:rPr>
+              <a:t>1</a:t>
+            </a:r>
+          </a:p>
+        </p:txBody>
+      </p:sp>
+      <p:sp>
+        <p:nvSpPr>
+          <p:cNvPr id="11" name="TextBox 10"/>
+          <p:cNvSpPr txBox="1"/>
+          <p:nvPr/>
+        </p:nvSpPr>
+        <p:spPr>
+          <a:xfrm>
+            <a:off x="4800600" y="1143000"/>
+            <a:ext cx="3886200" cy="640080"/>
+          </a:xfrm>
+          <a:prstGeom prst="rect">
+            <a:avLst/>
+          </a:prstGeom>
+          <a:noFill/>
+        </p:spPr>
+        <p:txBody>
+          <a:bodyPr wrap="square" lIns="0" rIns="0" tIns="0" bIns="0" anchor="t">
+            <a:spAutoFit/>
+          </a:bodyPr>
+          <a:lstStyle/>
+          <a:p>
+            <a:pPr algn="l"/>
+            <a:r>
+              <a:rPr sz="1000" b="1" i="0">
+                <a:solidFill>
+                  <a:srgbClr val="B3B3B3"/>
+                </a:solidFill>
+                <a:latin typeface="Calibri"/>
+              </a:rPr>
+              <a:t>Definir "estado estable"</a:t>
+            </a:r>
+          </a:p>
+          <a:p>
+            <a:pPr algn="l"/>
+            <a:r>
+              <a:rPr sz="1000" b="0" i="0">
+                <a:solidFill>
+                  <a:srgbClr val="B3B3B3"/>
+                </a:solidFill>
+                <a:latin typeface="Calibri"/>
+              </a:rPr>
+              <a:t>Con carga, de subida, sin cambio de pendiente y a velocidad estable</a:t>
+            </a:r>
+          </a:p>
+        </p:txBody>
+      </p:sp>
+      <p:sp>
+        <p:nvSpPr>
+          <p:cNvPr id="12" name="Rectangle 11"/>
+          <p:cNvSpPr/>
+          <p:nvPr/>
+        </p:nvSpPr>
+        <p:spPr>
+          <a:xfrm>
+            <a:off x="4494276" y="1508760"/>
+            <a:ext cx="18288" cy="292608"/>
+          </a:xfrm>
+          <a:prstGeom prst="rect">
+            <a:avLst/>
+          </a:prstGeom>
+          <a:solidFill>
+            <a:srgbClr val="D9D9D9"/>
+          </a:solidFill>
+          <a:ln>
+            <a:noFill/>
+          </a:ln>
+        </p:spPr>
+        <p:style>
+          <a:lnRef idx="1">
+            <a:schemeClr val="accent1"/>
+          </a:lnRef>
+          <a:fillRef idx="3">
+            <a:schemeClr val="accent1"/>
+          </a:fillRef>
+          <a:effectRef idx="2">
+            <a:schemeClr val="accent1"/>
+          </a:effectRef>
+          <a:fontRef idx="minor">
+            <a:schemeClr val="lt1"/>
+          </a:fontRef>
+        </p:style>
+        <p:txBody>
+          <a:bodyPr rtlCol="0" anchor="ctr"/>
+          <a:lstStyle/>
+          <a:p/>
+        </p:txBody>
+      </p:sp>
+      <p:sp>
+        <p:nvSpPr>
+          <p:cNvPr id="13" name="Oval 12"/>
+          <p:cNvSpPr/>
+          <p:nvPr/>
+        </p:nvSpPr>
+        <p:spPr>
+          <a:xfrm>
+            <a:off x="4343400" y="1837943"/>
+            <a:ext cx="320040" cy="320040"/>
+          </a:xfrm>
+          <a:prstGeom prst="ellipse">
+            <a:avLst/>
+          </a:prstGeom>
+          <a:solidFill>
+            <a:srgbClr val="F2F2F2"/>
+          </a:solidFill>
+          <a:ln>
+            <a:noFill/>
+          </a:ln>
+        </p:spPr>
+        <p:style>
+          <a:lnRef idx="1">
+            <a:schemeClr val="accent1"/>
+          </a:lnRef>
+          <a:fillRef idx="3">
+            <a:schemeClr val="accent1"/>
+          </a:fillRef>
+          <a:effectRef idx="2">
+            <a:schemeClr val="accent1"/>
+          </a:effectRef>
+          <a:fontRef idx="minor">
+            <a:schemeClr val="lt1"/>
+          </a:fontRef>
+        </p:style>
+        <p:txBody>
+          <a:bodyPr rtlCol="0" anchor="ctr" lIns="0" rIns="0" tIns="0" bIns="0"/>
+          <a:lstStyle/>
+          <a:p>
+            <a:pPr algn="ctr"/>
+            <a:r>
+              <a:rPr sz="1300" b="1" i="0">
+                <a:solidFill>
+                  <a:srgbClr val="B3B3B3"/>
+                </a:solidFill>
+                <a:latin typeface="Arial"/>
+              </a:rPr>
+              <a:t>2</a:t>
+            </a:r>
+          </a:p>
+        </p:txBody>
+      </p:sp>
+      <p:sp>
+        <p:nvSpPr>
+          <p:cNvPr id="14" name="TextBox 13"/>
+          <p:cNvSpPr txBox="1"/>
+          <p:nvPr/>
+        </p:nvSpPr>
+        <p:spPr>
+          <a:xfrm>
+            <a:off x="4800600" y="1819656"/>
+            <a:ext cx="3886200" cy="640080"/>
+          </a:xfrm>
+          <a:prstGeom prst="rect">
+            <a:avLst/>
+          </a:prstGeom>
+          <a:noFill/>
+        </p:spPr>
+        <p:txBody>
+          <a:bodyPr wrap="square" lIns="0" rIns="0" tIns="0" bIns="0" anchor="t">
+            <a:spAutoFit/>
+          </a:bodyPr>
+          <a:lstStyle/>
+          <a:p>
+            <a:pPr algn="l"/>
+            <a:r>
+              <a:rPr sz="1000" b="1" i="0">
+                <a:solidFill>
+                  <a:srgbClr val="B3B3B3"/>
+                </a:solidFill>
+                <a:latin typeface="Calibri"/>
+              </a:rPr>
+              <a:t>Extraer y particionar</a:t>
+            </a:r>
+          </a:p>
+          <a:p>
+            <a:pPr algn="l"/>
+            <a:r>
+              <a:rPr sz="1000" b="0" i="0">
+                <a:solidFill>
+                  <a:srgbClr val="B3B3B3"/>
+                </a:solidFill>
+                <a:latin typeface="Calibri"/>
+              </a:rPr>
+              <a:t>Toda la serie de tiempo → una tabla con estadísticos por evento</a:t>
+            </a:r>
+          </a:p>
+        </p:txBody>
+      </p:sp>
+      <p:sp>
+        <p:nvSpPr>
+          <p:cNvPr id="15" name="Rectangle 14"/>
+          <p:cNvSpPr/>
+          <p:nvPr/>
+        </p:nvSpPr>
+        <p:spPr>
+          <a:xfrm>
+            <a:off x="4494276" y="2185416"/>
+            <a:ext cx="18288" cy="292608"/>
+          </a:xfrm>
+          <a:prstGeom prst="rect">
+            <a:avLst/>
+          </a:prstGeom>
+          <a:solidFill>
+            <a:srgbClr val="D9D9D9"/>
+          </a:solidFill>
+          <a:ln>
+            <a:noFill/>
+          </a:ln>
+        </p:spPr>
+        <p:style>
+          <a:lnRef idx="1">
+            <a:schemeClr val="accent1"/>
+          </a:lnRef>
+          <a:fillRef idx="3">
+            <a:schemeClr val="accent1"/>
+          </a:fillRef>
+          <a:effectRef idx="2">
+            <a:schemeClr val="accent1"/>
+          </a:effectRef>
+          <a:fontRef idx="minor">
+            <a:schemeClr val="lt1"/>
+          </a:fontRef>
+        </p:style>
+        <p:txBody>
+          <a:bodyPr rtlCol="0" anchor="ctr"/>
+          <a:lstStyle/>
+          <a:p/>
+        </p:txBody>
+      </p:sp>
+      <p:sp>
+        <p:nvSpPr>
+          <p:cNvPr id="16" name="Oval 15"/>
+          <p:cNvSpPr/>
+          <p:nvPr/>
+        </p:nvSpPr>
+        <p:spPr>
+          <a:xfrm>
+            <a:off x="4343400" y="2514600"/>
+            <a:ext cx="320040" cy="320040"/>
+          </a:xfrm>
+          <a:prstGeom prst="ellipse">
+            <a:avLst/>
+          </a:prstGeom>
+          <a:solidFill>
+            <a:srgbClr val="F2F2F2"/>
+          </a:solidFill>
+          <a:ln>
+            <a:noFill/>
+          </a:ln>
+        </p:spPr>
+        <p:style>
+          <a:lnRef idx="1">
+            <a:schemeClr val="accent1"/>
+          </a:lnRef>
+          <a:fillRef idx="3">
+            <a:schemeClr val="accent1"/>
+          </a:fillRef>
+          <a:effectRef idx="2">
+            <a:schemeClr val="accent1"/>
+          </a:effectRef>
+          <a:fontRef idx="minor">
+            <a:schemeClr val="lt1"/>
+          </a:fontRef>
+        </p:style>
+        <p:txBody>
+          <a:bodyPr rtlCol="0" anchor="ctr" lIns="0" rIns="0" tIns="0" bIns="0"/>
+          <a:lstStyle/>
+          <a:p>
+            <a:pPr algn="ctr"/>
+            <a:r>
+              <a:rPr sz="1300" b="1" i="0">
+                <a:solidFill>
+                  <a:srgbClr val="B3B3B3"/>
+                </a:solidFill>
+                <a:latin typeface="Arial"/>
+              </a:rPr>
+              <a:t>3</a:t>
+            </a:r>
+          </a:p>
+        </p:txBody>
+      </p:sp>
+      <p:sp>
+        <p:nvSpPr>
+          <p:cNvPr id="17" name="TextBox 16"/>
+          <p:cNvSpPr txBox="1"/>
+          <p:nvPr/>
+        </p:nvSpPr>
+        <p:spPr>
+          <a:xfrm>
+            <a:off x="4800600" y="2496312"/>
+            <a:ext cx="3886200" cy="640080"/>
+          </a:xfrm>
+          <a:prstGeom prst="rect">
+            <a:avLst/>
+          </a:prstGeom>
+          <a:noFill/>
+        </p:spPr>
+        <p:txBody>
+          <a:bodyPr wrap="square" lIns="0" rIns="0" tIns="0" bIns="0" anchor="t">
+            <a:spAutoFit/>
+          </a:bodyPr>
+          <a:lstStyle/>
+          <a:p>
+            <a:pPr algn="l"/>
+            <a:r>
+              <a:rPr sz="1000" b="1" i="0">
+                <a:solidFill>
+                  <a:srgbClr val="B3B3B3"/>
+                </a:solidFill>
+                <a:latin typeface="Calibri"/>
+              </a:rPr>
+              <a:t>Mapear inicio y fin</a:t>
+            </a:r>
+          </a:p>
+          <a:p>
+            <a:pPr algn="l"/>
+            <a:r>
+              <a:rPr sz="1000" b="0" i="0">
+                <a:solidFill>
+                  <a:srgbClr val="B3B3B3"/>
+                </a:solidFill>
+                <a:latin typeface="Calibri"/>
+              </a:rPr>
+              <a:t>Cada evento es una línea recta sobre el mapa de la mina</a:t>
+            </a:r>
+          </a:p>
+        </p:txBody>
+      </p:sp>
+      <p:sp>
+        <p:nvSpPr>
+          <p:cNvPr id="18" name="Rectangle 17"/>
+          <p:cNvSpPr/>
+          <p:nvPr/>
+        </p:nvSpPr>
+        <p:spPr>
+          <a:xfrm>
+            <a:off x="4494276" y="2862072"/>
+            <a:ext cx="18288" cy="292608"/>
+          </a:xfrm>
+          <a:prstGeom prst="rect">
+            <a:avLst/>
+          </a:prstGeom>
+          <a:solidFill>
+            <a:srgbClr val="D9D9D9"/>
+          </a:solidFill>
+          <a:ln>
+            <a:noFill/>
+          </a:ln>
+        </p:spPr>
+        <p:style>
+          <a:lnRef idx="1">
+            <a:schemeClr val="accent1"/>
+          </a:lnRef>
+          <a:fillRef idx="3">
+            <a:schemeClr val="accent1"/>
+          </a:fillRef>
+          <a:effectRef idx="2">
+            <a:schemeClr val="accent1"/>
+          </a:effectRef>
+          <a:fontRef idx="minor">
+            <a:schemeClr val="lt1"/>
+          </a:fontRef>
+        </p:style>
+        <p:txBody>
+          <a:bodyPr rtlCol="0" anchor="ctr"/>
+          <a:lstStyle/>
+          <a:p/>
+        </p:txBody>
+      </p:sp>
+      <p:sp>
+        <p:nvSpPr>
+          <p:cNvPr id="19" name="Oval 18"/>
+          <p:cNvSpPr/>
+          <p:nvPr/>
+        </p:nvSpPr>
+        <p:spPr>
+          <a:xfrm>
+            <a:off x="4343400" y="3191256"/>
+            <a:ext cx="320040" cy="320040"/>
+          </a:xfrm>
+          <a:prstGeom prst="ellipse">
+            <a:avLst/>
+          </a:prstGeom>
+          <a:solidFill>
+            <a:srgbClr val="FFF500"/>
+          </a:solidFill>
+          <a:ln>
+            <a:noFill/>
+          </a:ln>
+        </p:spPr>
+        <p:style>
+          <a:lnRef idx="1">
+            <a:schemeClr val="accent1"/>
+          </a:lnRef>
+          <a:fillRef idx="3">
+            <a:schemeClr val="accent1"/>
+          </a:fillRef>
+          <a:effectRef idx="2">
+            <a:schemeClr val="accent1"/>
+          </a:effectRef>
+          <a:fontRef idx="minor">
+            <a:schemeClr val="lt1"/>
+          </a:fontRef>
+        </p:style>
+        <p:txBody>
+          <a:bodyPr rtlCol="0" anchor="ctr" lIns="0" rIns="0" tIns="0" bIns="0"/>
+          <a:lstStyle/>
+          <a:p>
+            <a:pPr algn="ctr"/>
+            <a:r>
+              <a:rPr sz="1300" b="1" i="0">
+                <a:solidFill>
+                  <a:srgbClr val="1A1A1A"/>
+                </a:solidFill>
+                <a:latin typeface="Arial"/>
+              </a:rPr>
+              <a:t>4</a:t>
+            </a:r>
+          </a:p>
+        </p:txBody>
+      </p:sp>
+      <p:sp>
+        <p:nvSpPr>
+          <p:cNvPr id="20" name="TextBox 19"/>
+          <p:cNvSpPr txBox="1"/>
+          <p:nvPr/>
+        </p:nvSpPr>
+        <p:spPr>
+          <a:xfrm>
+            <a:off x="4800600" y="3172968"/>
+            <a:ext cx="3886200" cy="640080"/>
+          </a:xfrm>
+          <a:prstGeom prst="rect">
+            <a:avLst/>
+          </a:prstGeom>
+          <a:noFill/>
+        </p:spPr>
+        <p:txBody>
+          <a:bodyPr wrap="square" lIns="0" rIns="0" tIns="0" bIns="0" anchor="t">
+            <a:spAutoFit/>
+          </a:bodyPr>
+          <a:lstStyle/>
+          <a:p>
+            <a:pPr algn="l"/>
+            <a:r>
+              <a:rPr sz="1100" b="1" i="0">
+                <a:solidFill>
+                  <a:srgbClr val="1A1A1A"/>
+                </a:solidFill>
+                <a:latin typeface="Calibri"/>
+              </a:rPr>
+              <a:t>Agrupar con DBSCAN</a:t>
+            </a:r>
+          </a:p>
+          <a:p>
+            <a:pPr algn="l"/>
+            <a:r>
+              <a:rPr sz="1100" b="0" i="0">
+                <a:solidFill>
+                  <a:srgbClr val="1A1A1A"/>
+                </a:solidFill>
+                <a:latin typeface="Calibri"/>
+              </a:rPr>
+              <a:t>Junta los eventos que recorren el mismo tramo, aunque estén muy cerca de otro</a:t>
+            </a:r>
+          </a:p>
+        </p:txBody>
+      </p:sp>
+      <p:sp>
+        <p:nvSpPr>
+          <p:cNvPr id="21" name="Rounded Rectangle 20"/>
+          <p:cNvSpPr/>
+          <p:nvPr/>
+        </p:nvSpPr>
+        <p:spPr>
+          <a:xfrm>
+            <a:off x="457200" y="3977639"/>
+            <a:ext cx="8229600" cy="640080"/>
+          </a:xfrm>
+          <a:prstGeom prst="roundRect">
+            <a:avLst>
+              <a:gd name="adj" fmla="val 3571"/>
+            </a:avLst>
+          </a:prstGeom>
+          <a:solidFill>
+            <a:srgbClr val="E8F5E9"/>
+          </a:solidFill>
+          <a:ln>
+            <a:noFill/>
+          </a:ln>
+        </p:spPr>
+        <p:style>
+          <a:lnRef idx="1">
+            <a:schemeClr val="accent1"/>
+          </a:lnRef>
+          <a:fillRef idx="3">
+            <a:schemeClr val="accent1"/>
+          </a:fillRef>
+          <a:effectRef idx="2">
+            <a:schemeClr val="accent1"/>
+          </a:effectRef>
+          <a:fontRef idx="minor">
+            <a:schemeClr val="lt1"/>
+          </a:fontRef>
+        </p:style>
+        <p:txBody>
+          <a:bodyPr rtlCol="0" anchor="ctr"/>
+          <a:lstStyle/>
+          <a:p/>
+        </p:txBody>
+      </p:sp>
+      <p:sp>
+        <p:nvSpPr>
+          <p:cNvPr id="22" name="TextBox 21"/>
+          <p:cNvSpPr txBox="1"/>
+          <p:nvPr/>
+        </p:nvSpPr>
+        <p:spPr>
+          <a:xfrm>
+            <a:off x="594360" y="4050791"/>
+            <a:ext cx="7955279" cy="493775"/>
+          </a:xfrm>
+          <a:prstGeom prst="rect">
+            <a:avLst/>
+          </a:prstGeom>
+          <a:noFill/>
+        </p:spPr>
+        <p:txBody>
+          <a:bodyPr wrap="square" lIns="0" rIns="0" tIns="0" bIns="0" anchor="ctr">
+            <a:spAutoFit/>
+          </a:bodyPr>
+          <a:lstStyle/>
+          <a:p>
+            <a:pPr algn="l"/>
+            <a:r>
+              <a:rPr sz="1200" b="0" i="0">
+                <a:solidFill>
+                  <a:srgbClr val="2E7D32"/>
+                </a:solidFill>
+                <a:latin typeface="Calibri"/>
+              </a:rPr>
+              <a:t>Resultado: tramos con </a:t>
+            </a:r>
+            <a:r>
+              <a:rPr sz="1200" b="1" i="0">
+                <a:solidFill>
+                  <a:srgbClr val="2E7D32"/>
+                </a:solidFill>
+                <a:latin typeface="Calibri"/>
+              </a:rPr>
+              <a:t>forma libre</a:t>
+            </a:r>
+            <a:r>
+              <a:rPr sz="1200" b="0" i="0">
+                <a:solidFill>
+                  <a:srgbClr val="2E7D32"/>
+                </a:solidFill>
+                <a:latin typeface="Calibri"/>
+              </a:rPr>
+              <a:t> y sin decir cuántos hay. Ahí se compara a todas las máquinas en las mismas condiciones.</a:t>
+            </a:r>
+          </a:p>
+        </p:txBody>
+      </p:sp>
+    </p:spTree>
+    <p:extLst>
+      <p:ext uri="{BB962C8B-B14F-4D97-AF65-F5344CB8AC3E}">
+        <p14:creationId xmlns:p14="http://schemas.microsoft.com/office/powerpoint/2010/main" val="562064144"/>
+      </p:ext>
+    </p:extLst>
+  </p:cSld>
+  <p:clrMapOvr>
+    <a:masterClrMapping/>
+  </p:clrMapOvr>
+</p:sld>
+</file>
+
+<file path=ppt/slides/slide14.xml><?xml version="1.0" encoding="utf-8"?>
+<p:sld xmlns:a="http://schemas.openxmlformats.org/drawingml/2006/main" xmlns:r="http://schemas.openxmlformats.org/officeDocument/2006/relationships" xmlns:p="http://schemas.openxmlformats.org/presentationml/2006/main">
   <p:cSld>
     <p:bg>
       <p:bgPr>
@@ -4770,7 +6839,14 @@
         <p:cNvGrpSpPr/>
         <p:nvPr/>
       </p:nvGrpSpPr>
-      <p:grpSpPr/>
+      <p:grpSpPr>
+        <a:xfrm>
+          <a:off x="0" y="0"/>
+          <a:ext cx="0" cy="0"/>
+          <a:chOff x="0" y="0"/>
+          <a:chExt cx="0" cy="0"/>
+        </a:xfrm>
+      </p:grpSpPr>
       <p:sp>
         <p:nvSpPr>
           <p:cNvPr id="2" name="Rectangle 1"/>
@@ -4809,7 +6885,9 @@
         <p:txBody>
           <a:bodyPr rtlCol="0" anchor="ctr"/>
           <a:lstStyle/>
-          <a:p/>
+          <a:p>
+            <a:endParaRPr/>
+          </a:p>
         </p:txBody>
       </p:sp>
       <p:sp>
@@ -4850,7 +6928,9 @@
         <p:txBody>
           <a:bodyPr rtlCol="0" anchor="ctr"/>
           <a:lstStyle/>
-          <a:p/>
+          <a:p>
+            <a:endParaRPr/>
+          </a:p>
         </p:txBody>
       </p:sp>
       <p:sp>
@@ -4870,7 +6950,7 @@
           <a:noFill/>
         </p:spPr>
         <p:txBody>
-          <a:bodyPr wrap="square" lIns="0" rIns="0" tIns="0" bIns="0" anchor="ctr">
+          <a:bodyPr wrap="square" lIns="0" tIns="0" rIns="0" bIns="0" anchor="ctr">
             <a:spAutoFit/>
           </a:bodyPr>
           <a:lstStyle/>
@@ -4926,7 +7006,9 @@
         <p:txBody>
           <a:bodyPr rtlCol="0" anchor="ctr"/>
           <a:lstStyle/>
-          <a:p/>
+          <a:p>
+            <a:endParaRPr/>
+          </a:p>
         </p:txBody>
       </p:sp>
       <p:sp>
@@ -4946,7 +7028,7 @@
           <a:noFill/>
         </p:spPr>
         <p:txBody>
-          <a:bodyPr wrap="square" lIns="0" rIns="0" tIns="0" bIns="0" anchor="ctr">
+          <a:bodyPr wrap="square" lIns="0" tIns="0" rIns="0" bIns="0" anchor="ctr">
             <a:spAutoFit/>
           </a:bodyPr>
           <a:lstStyle/>
@@ -4983,10 +7065,34 @@
                 <a:tableStyleId>{5C22544A-7EE6-4342-B048-85BDC9FD1C3A}</a:tableStyleId>
               </a:tblPr>
               <a:tblGrid>
-                <a:gridCol w="731520"/>
-                <a:gridCol w="1371600"/>
-                <a:gridCol w="2103120"/>
-                <a:gridCol w="4023360"/>
+                <a:gridCol w="731520">
+                  <a:extLst>
+                    <a:ext uri="{9D8B030D-6E8A-4147-A177-3AD203B41FA5}">
+                      <a16:colId xmlns:a16="http://schemas.microsoft.com/office/drawing/2014/main" val="20000"/>
+                    </a:ext>
+                  </a:extLst>
+                </a:gridCol>
+                <a:gridCol w="1371600">
+                  <a:extLst>
+                    <a:ext uri="{9D8B030D-6E8A-4147-A177-3AD203B41FA5}">
+                      <a16:colId xmlns:a16="http://schemas.microsoft.com/office/drawing/2014/main" val="20001"/>
+                    </a:ext>
+                  </a:extLst>
+                </a:gridCol>
+                <a:gridCol w="2103120">
+                  <a:extLst>
+                    <a:ext uri="{9D8B030D-6E8A-4147-A177-3AD203B41FA5}">
+                      <a16:colId xmlns:a16="http://schemas.microsoft.com/office/drawing/2014/main" val="20002"/>
+                    </a:ext>
+                  </a:extLst>
+                </a:gridCol>
+                <a:gridCol w="4023360">
+                  <a:extLst>
+                    <a:ext uri="{9D8B030D-6E8A-4147-A177-3AD203B41FA5}">
+                      <a16:colId xmlns:a16="http://schemas.microsoft.com/office/drawing/2014/main" val="20003"/>
+                    </a:ext>
+                  </a:extLst>
+                </a:gridCol>
               </a:tblGrid>
               <a:tr h="502920">
                 <a:tc>
@@ -5077,6 +7183,11 @@
                     </a:solidFill>
                   </a:tcPr>
                 </a:tc>
+                <a:extLst>
+                  <a:ext uri="{0D108BD9-81ED-4DB2-BD59-A6C34878D82A}">
+                    <a16:rowId xmlns:a16="http://schemas.microsoft.com/office/drawing/2014/main" val="10000"/>
+                  </a:ext>
+                </a:extLst>
               </a:tr>
               <a:tr h="502920">
                 <a:tc>
@@ -5167,6 +7278,11 @@
                     </a:solidFill>
                   </a:tcPr>
                 </a:tc>
+                <a:extLst>
+                  <a:ext uri="{0D108BD9-81ED-4DB2-BD59-A6C34878D82A}">
+                    <a16:rowId xmlns:a16="http://schemas.microsoft.com/office/drawing/2014/main" val="10001"/>
+                  </a:ext>
+                </a:extLst>
               </a:tr>
               <a:tr h="502920">
                 <a:tc>
@@ -5257,6 +7373,11 @@
                     </a:solidFill>
                   </a:tcPr>
                 </a:tc>
+                <a:extLst>
+                  <a:ext uri="{0D108BD9-81ED-4DB2-BD59-A6C34878D82A}">
+                    <a16:rowId xmlns:a16="http://schemas.microsoft.com/office/drawing/2014/main" val="10002"/>
+                  </a:ext>
+                </a:extLst>
               </a:tr>
               <a:tr h="502920">
                 <a:tc>
@@ -5347,6 +7468,11 @@
                     </a:solidFill>
                   </a:tcPr>
                 </a:tc>
+                <a:extLst>
+                  <a:ext uri="{0D108BD9-81ED-4DB2-BD59-A6C34878D82A}">
+                    <a16:rowId xmlns:a16="http://schemas.microsoft.com/office/drawing/2014/main" val="10003"/>
+                  </a:ext>
+                </a:extLst>
               </a:tr>
               <a:tr h="502920">
                 <a:tc>
@@ -5437,6 +7563,11 @@
                     </a:solidFill>
                   </a:tcPr>
                 </a:tc>
+                <a:extLst>
+                  <a:ext uri="{0D108BD9-81ED-4DB2-BD59-A6C34878D82A}">
+                    <a16:rowId xmlns:a16="http://schemas.microsoft.com/office/drawing/2014/main" val="10004"/>
+                  </a:ext>
+                </a:extLst>
               </a:tr>
               <a:tr h="502920">
                 <a:tc>
@@ -5527,6 +7658,11 @@
                     </a:solidFill>
                   </a:tcPr>
                 </a:tc>
+                <a:extLst>
+                  <a:ext uri="{0D108BD9-81ED-4DB2-BD59-A6C34878D82A}">
+                    <a16:rowId xmlns:a16="http://schemas.microsoft.com/office/drawing/2014/main" val="10005"/>
+                  </a:ext>
+                </a:extLst>
               </a:tr>
             </a:tbl>
           </a:graphicData>
@@ -5540,8 +7676,8 @@
 </p:sld>
 </file>
 
-<file path=ppt/slides/slide13.xml><?xml version="1.0" encoding="utf-8"?>
-<p:sld xmlns:a="http://schemas.openxmlformats.org/drawingml/2006/main" xmlns:p="http://schemas.openxmlformats.org/presentationml/2006/main" xmlns:r="http://schemas.openxmlformats.org/officeDocument/2006/relationships">
+<file path=ppt/slides/slide15.xml><?xml version="1.0" encoding="utf-8"?>
+<p:sld xmlns:a="http://schemas.openxmlformats.org/drawingml/2006/main" xmlns:r="http://schemas.openxmlformats.org/officeDocument/2006/relationships" xmlns:p="http://schemas.openxmlformats.org/presentationml/2006/main">
   <p:cSld>
     <p:bg>
       <p:bgPr>
@@ -5557,7 +7693,14 @@
         <p:cNvGrpSpPr/>
         <p:nvPr/>
       </p:nvGrpSpPr>
-      <p:grpSpPr/>
+      <p:grpSpPr>
+        <a:xfrm>
+          <a:off x="0" y="0"/>
+          <a:ext cx="0" cy="0"/>
+          <a:chOff x="0" y="0"/>
+          <a:chExt cx="0" cy="0"/>
+        </a:xfrm>
+      </p:grpSpPr>
       <p:sp>
         <p:nvSpPr>
           <p:cNvPr id="2" name="Rectangle 1"/>
@@ -5596,7 +7739,9 @@
         <p:txBody>
           <a:bodyPr rtlCol="0" anchor="ctr"/>
           <a:lstStyle/>
-          <a:p/>
+          <a:p>
+            <a:endParaRPr/>
+          </a:p>
         </p:txBody>
       </p:sp>
       <p:sp>
@@ -5616,7 +7761,7 @@
           <a:noFill/>
         </p:spPr>
         <p:txBody>
-          <a:bodyPr wrap="square" lIns="0" rIns="0" tIns="0" bIns="0" anchor="ctr">
+          <a:bodyPr wrap="square" lIns="0" tIns="0" rIns="0" bIns="0" anchor="ctr">
             <a:spAutoFit/>
           </a:bodyPr>
           <a:lstStyle/>
@@ -5672,7 +7817,9 @@
         <p:txBody>
           <a:bodyPr rtlCol="0" anchor="ctr"/>
           <a:lstStyle/>
-          <a:p/>
+          <a:p>
+            <a:endParaRPr/>
+          </a:p>
         </p:txBody>
       </p:sp>
       <p:sp>
@@ -5711,7 +7858,7 @@
           </a:fontRef>
         </p:style>
         <p:txBody>
-          <a:bodyPr rtlCol="0" anchor="ctr" lIns="0" rIns="0" tIns="0" bIns="0"/>
+          <a:bodyPr lIns="0" tIns="0" rIns="0" bIns="0" rtlCol="0" anchor="ctr"/>
           <a:lstStyle/>
           <a:p>
             <a:pPr algn="ctr"/>
@@ -5744,7 +7891,7 @@
           <a:noFill/>
         </p:spPr>
         <p:txBody>
-          <a:bodyPr wrap="square" lIns="0" rIns="0" tIns="0" bIns="0" anchor="ctr">
+          <a:bodyPr wrap="square" lIns="0" tIns="0" rIns="0" bIns="0" anchor="ctr">
             <a:spAutoFit/>
           </a:bodyPr>
           <a:lstStyle/>
@@ -5798,7 +7945,7 @@
           </a:fontRef>
         </p:style>
         <p:txBody>
-          <a:bodyPr rtlCol="0" anchor="ctr" lIns="0" rIns="0" tIns="0" bIns="0"/>
+          <a:bodyPr lIns="0" tIns="0" rIns="0" bIns="0" rtlCol="0" anchor="ctr"/>
           <a:lstStyle/>
           <a:p>
             <a:pPr algn="ctr"/>
@@ -5831,7 +7978,7 @@
           <a:noFill/>
         </p:spPr>
         <p:txBody>
-          <a:bodyPr wrap="square" lIns="0" rIns="0" tIns="0" bIns="0" anchor="ctr">
+          <a:bodyPr wrap="square" lIns="0" tIns="0" rIns="0" bIns="0" anchor="ctr">
             <a:spAutoFit/>
           </a:bodyPr>
           <a:lstStyle/>
@@ -5885,7 +8032,7 @@
           </a:fontRef>
         </p:style>
         <p:txBody>
-          <a:bodyPr rtlCol="0" anchor="ctr" lIns="0" rIns="0" tIns="0" bIns="0"/>
+          <a:bodyPr lIns="0" tIns="0" rIns="0" bIns="0" rtlCol="0" anchor="ctr"/>
           <a:lstStyle/>
           <a:p>
             <a:pPr algn="ctr"/>
@@ -5918,7 +8065,7 @@
           <a:noFill/>
         </p:spPr>
         <p:txBody>
-          <a:bodyPr wrap="square" lIns="0" rIns="0" tIns="0" bIns="0" anchor="ctr">
+          <a:bodyPr wrap="square" lIns="0" tIns="0" rIns="0" bIns="0" anchor="ctr">
             <a:spAutoFit/>
           </a:bodyPr>
           <a:lstStyle/>
@@ -5972,7 +8119,7 @@
           </a:fontRef>
         </p:style>
         <p:txBody>
-          <a:bodyPr rtlCol="0" anchor="ctr" lIns="0" rIns="0" tIns="0" bIns="0"/>
+          <a:bodyPr lIns="0" tIns="0" rIns="0" bIns="0" rtlCol="0" anchor="ctr"/>
           <a:lstStyle/>
           <a:p>
             <a:pPr algn="ctr"/>
@@ -6005,7 +8152,7 @@
           <a:noFill/>
         </p:spPr>
         <p:txBody>
-          <a:bodyPr wrap="square" lIns="0" rIns="0" tIns="0" bIns="0" anchor="ctr">
+          <a:bodyPr wrap="square" lIns="0" tIns="0" rIns="0" bIns="0" anchor="ctr">
             <a:spAutoFit/>
           </a:bodyPr>
           <a:lstStyle/>
@@ -6059,7 +8206,7 @@
           </a:fontRef>
         </p:style>
         <p:txBody>
-          <a:bodyPr rtlCol="0" anchor="ctr" lIns="0" rIns="0" tIns="0" bIns="0"/>
+          <a:bodyPr lIns="0" tIns="0" rIns="0" bIns="0" rtlCol="0" anchor="ctr"/>
           <a:lstStyle/>
           <a:p>
             <a:pPr algn="ctr"/>
@@ -6092,7 +8239,7 @@
           <a:noFill/>
         </p:spPr>
         <p:txBody>
-          <a:bodyPr wrap="square" lIns="0" rIns="0" tIns="0" bIns="0" anchor="ctr">
+          <a:bodyPr wrap="square" lIns="0" tIns="0" rIns="0" bIns="0" anchor="ctr">
             <a:spAutoFit/>
           </a:bodyPr>
           <a:lstStyle/>
@@ -6119,7 +8266,7 @@
 </file>
 
 <file path=ppt/slides/slide2.xml><?xml version="1.0" encoding="utf-8"?>
-<p:sld xmlns:a="http://schemas.openxmlformats.org/drawingml/2006/main" xmlns:p="http://schemas.openxmlformats.org/presentationml/2006/main" xmlns:r="http://schemas.openxmlformats.org/officeDocument/2006/relationships">
+<p:sld xmlns:a="http://schemas.openxmlformats.org/drawingml/2006/main" xmlns:r="http://schemas.openxmlformats.org/officeDocument/2006/relationships" xmlns:p="http://schemas.openxmlformats.org/presentationml/2006/main">
   <p:cSld>
     <p:bg>
       <p:bgPr>
@@ -6135,7 +8282,14 @@
         <p:cNvGrpSpPr/>
         <p:nvPr/>
       </p:nvGrpSpPr>
-      <p:grpSpPr/>
+      <p:grpSpPr>
+        <a:xfrm>
+          <a:off x="0" y="0"/>
+          <a:ext cx="0" cy="0"/>
+          <a:chOff x="0" y="0"/>
+          <a:chExt cx="0" cy="0"/>
+        </a:xfrm>
+      </p:grpSpPr>
       <p:sp>
         <p:nvSpPr>
           <p:cNvPr id="2" name="Rectangle 1"/>
@@ -6174,7 +8328,9 @@
         <p:txBody>
           <a:bodyPr rtlCol="0" anchor="ctr"/>
           <a:lstStyle/>
-          <a:p/>
+          <a:p>
+            <a:endParaRPr/>
+          </a:p>
         </p:txBody>
       </p:sp>
       <p:sp>
@@ -6215,7 +8371,9 @@
         <p:txBody>
           <a:bodyPr rtlCol="0" anchor="ctr"/>
           <a:lstStyle/>
-          <a:p/>
+          <a:p>
+            <a:endParaRPr/>
+          </a:p>
         </p:txBody>
       </p:sp>
       <p:sp>
@@ -6235,7 +8393,7 @@
           <a:noFill/>
         </p:spPr>
         <p:txBody>
-          <a:bodyPr wrap="square" lIns="0" rIns="0" tIns="0" bIns="0" anchor="ctr">
+          <a:bodyPr wrap="square" lIns="0" tIns="0" rIns="0" bIns="0" anchor="ctr">
             <a:spAutoFit/>
           </a:bodyPr>
           <a:lstStyle/>
@@ -6291,7 +8449,9 @@
         <p:txBody>
           <a:bodyPr rtlCol="0" anchor="ctr"/>
           <a:lstStyle/>
-          <a:p/>
+          <a:p>
+            <a:endParaRPr/>
+          </a:p>
         </p:txBody>
       </p:sp>
       <p:sp>
@@ -6311,7 +8471,7 @@
           <a:noFill/>
         </p:spPr>
         <p:txBody>
-          <a:bodyPr wrap="square" lIns="0" rIns="0" tIns="0" bIns="0" anchor="ctr">
+          <a:bodyPr wrap="square" lIns="0" tIns="0" rIns="0" bIns="0" anchor="ctr">
             <a:spAutoFit/>
           </a:bodyPr>
           <a:lstStyle/>
@@ -6378,7 +8538,9 @@
         <p:txBody>
           <a:bodyPr rtlCol="0" anchor="ctr"/>
           <a:lstStyle/>
-          <a:p/>
+          <a:p>
+            <a:endParaRPr/>
+          </a:p>
         </p:txBody>
       </p:sp>
       <p:sp>
@@ -6398,7 +8560,7 @@
           <a:noFill/>
         </p:spPr>
         <p:txBody>
-          <a:bodyPr wrap="square" lIns="0" rIns="0" tIns="0" bIns="0" anchor="t">
+          <a:bodyPr wrap="square" lIns="0" tIns="0" rIns="0" bIns="0" anchor="t">
             <a:spAutoFit/>
           </a:bodyPr>
           <a:lstStyle/>
@@ -6433,7 +8595,7 @@
           <a:noFill/>
         </p:spPr>
         <p:txBody>
-          <a:bodyPr wrap="square" lIns="0" rIns="0" tIns="0" bIns="0" anchor="t">
+          <a:bodyPr wrap="square" lIns="0" tIns="0" rIns="0" bIns="0" anchor="t">
             <a:spAutoFit/>
           </a:bodyPr>
           <a:lstStyle/>
@@ -6545,7 +8707,9 @@
         <p:txBody>
           <a:bodyPr rtlCol="0" anchor="ctr"/>
           <a:lstStyle/>
-          <a:p/>
+          <a:p>
+            <a:endParaRPr/>
+          </a:p>
         </p:txBody>
       </p:sp>
       <p:sp>
@@ -6565,7 +8729,7 @@
           <a:noFill/>
         </p:spPr>
         <p:txBody>
-          <a:bodyPr wrap="square" lIns="0" rIns="0" tIns="0" bIns="0" anchor="t">
+          <a:bodyPr wrap="square" lIns="0" tIns="0" rIns="0" bIns="0" anchor="t">
             <a:spAutoFit/>
           </a:bodyPr>
           <a:lstStyle/>
@@ -6600,7 +8764,7 @@
           <a:noFill/>
         </p:spPr>
         <p:txBody>
-          <a:bodyPr wrap="square" lIns="0" rIns="0" tIns="0" bIns="0" anchor="t">
+          <a:bodyPr wrap="square" lIns="0" tIns="0" rIns="0" bIns="0" anchor="t">
             <a:spAutoFit/>
           </a:bodyPr>
           <a:lstStyle/>
@@ -6682,11 +8846,41 @@
                 <a:tableStyleId>{5C22544A-7EE6-4342-B048-85BDC9FD1C3A}</a:tableStyleId>
               </a:tblPr>
               <a:tblGrid>
-                <a:gridCol w="1097280"/>
-                <a:gridCol w="914400"/>
-                <a:gridCol w="1097280"/>
-                <a:gridCol w="1371600"/>
-                <a:gridCol w="1005840"/>
+                <a:gridCol w="1097280">
+                  <a:extLst>
+                    <a:ext uri="{9D8B030D-6E8A-4147-A177-3AD203B41FA5}">
+                      <a16:colId xmlns:a16="http://schemas.microsoft.com/office/drawing/2014/main" val="20000"/>
+                    </a:ext>
+                  </a:extLst>
+                </a:gridCol>
+                <a:gridCol w="914400">
+                  <a:extLst>
+                    <a:ext uri="{9D8B030D-6E8A-4147-A177-3AD203B41FA5}">
+                      <a16:colId xmlns:a16="http://schemas.microsoft.com/office/drawing/2014/main" val="20001"/>
+                    </a:ext>
+                  </a:extLst>
+                </a:gridCol>
+                <a:gridCol w="1097280">
+                  <a:extLst>
+                    <a:ext uri="{9D8B030D-6E8A-4147-A177-3AD203B41FA5}">
+                      <a16:colId xmlns:a16="http://schemas.microsoft.com/office/drawing/2014/main" val="20002"/>
+                    </a:ext>
+                  </a:extLst>
+                </a:gridCol>
+                <a:gridCol w="1371600">
+                  <a:extLst>
+                    <a:ext uri="{9D8B030D-6E8A-4147-A177-3AD203B41FA5}">
+                      <a16:colId xmlns:a16="http://schemas.microsoft.com/office/drawing/2014/main" val="20003"/>
+                    </a:ext>
+                  </a:extLst>
+                </a:gridCol>
+                <a:gridCol w="1005840">
+                  <a:extLst>
+                    <a:ext uri="{9D8B030D-6E8A-4147-A177-3AD203B41FA5}">
+                      <a16:colId xmlns:a16="http://schemas.microsoft.com/office/drawing/2014/main" val="20004"/>
+                    </a:ext>
+                  </a:extLst>
+                </a:gridCol>
               </a:tblGrid>
               <a:tr h="274320">
                 <a:tc>
@@ -6799,6 +8993,11 @@
                     </a:solidFill>
                   </a:tcPr>
                 </a:tc>
+                <a:extLst>
+                  <a:ext uri="{0D108BD9-81ED-4DB2-BD59-A6C34878D82A}">
+                    <a16:rowId xmlns:a16="http://schemas.microsoft.com/office/drawing/2014/main" val="10000"/>
+                  </a:ext>
+                </a:extLst>
               </a:tr>
               <a:tr h="274320">
                 <a:tc>
@@ -6911,6 +9110,11 @@
                     </a:solidFill>
                   </a:tcPr>
                 </a:tc>
+                <a:extLst>
+                  <a:ext uri="{0D108BD9-81ED-4DB2-BD59-A6C34878D82A}">
+                    <a16:rowId xmlns:a16="http://schemas.microsoft.com/office/drawing/2014/main" val="10001"/>
+                  </a:ext>
+                </a:extLst>
               </a:tr>
               <a:tr h="274320">
                 <a:tc>
@@ -7023,6 +9227,11 @@
                     </a:solidFill>
                   </a:tcPr>
                 </a:tc>
+                <a:extLst>
+                  <a:ext uri="{0D108BD9-81ED-4DB2-BD59-A6C34878D82A}">
+                    <a16:rowId xmlns:a16="http://schemas.microsoft.com/office/drawing/2014/main" val="10002"/>
+                  </a:ext>
+                </a:extLst>
               </a:tr>
               <a:tr h="274320">
                 <a:tc>
@@ -7135,6 +9344,11 @@
                     </a:solidFill>
                   </a:tcPr>
                 </a:tc>
+                <a:extLst>
+                  <a:ext uri="{0D108BD9-81ED-4DB2-BD59-A6C34878D82A}">
+                    <a16:rowId xmlns:a16="http://schemas.microsoft.com/office/drawing/2014/main" val="10003"/>
+                  </a:ext>
+                </a:extLst>
               </a:tr>
             </a:tbl>
           </a:graphicData>
@@ -7180,7 +9394,9 @@
         <p:txBody>
           <a:bodyPr rtlCol="0" anchor="ctr"/>
           <a:lstStyle/>
-          <a:p/>
+          <a:p>
+            <a:endParaRPr/>
+          </a:p>
         </p:txBody>
       </p:sp>
       <p:sp>
@@ -7200,7 +9416,7 @@
           <a:noFill/>
         </p:spPr>
         <p:txBody>
-          <a:bodyPr wrap="square" lIns="0" rIns="0" tIns="0" bIns="0" anchor="ctr">
+          <a:bodyPr wrap="square" lIns="0" tIns="0" rIns="0" bIns="0" anchor="ctr">
             <a:spAutoFit/>
           </a:bodyPr>
           <a:lstStyle/>
@@ -7263,7 +9479,7 @@
 </file>
 
 <file path=ppt/slides/slide3.xml><?xml version="1.0" encoding="utf-8"?>
-<p:sld xmlns:a="http://schemas.openxmlformats.org/drawingml/2006/main" xmlns:p="http://schemas.openxmlformats.org/presentationml/2006/main" xmlns:r="http://schemas.openxmlformats.org/officeDocument/2006/relationships">
+<p:sld xmlns:a="http://schemas.openxmlformats.org/drawingml/2006/main" xmlns:r="http://schemas.openxmlformats.org/officeDocument/2006/relationships" xmlns:p="http://schemas.openxmlformats.org/presentationml/2006/main">
   <p:cSld>
     <p:bg>
       <p:bgPr>
@@ -7279,7 +9495,14 @@
         <p:cNvGrpSpPr/>
         <p:nvPr/>
       </p:nvGrpSpPr>
-      <p:grpSpPr/>
+      <p:grpSpPr>
+        <a:xfrm>
+          <a:off x="0" y="0"/>
+          <a:ext cx="0" cy="0"/>
+          <a:chOff x="0" y="0"/>
+          <a:chExt cx="0" cy="0"/>
+        </a:xfrm>
+      </p:grpSpPr>
       <p:sp>
         <p:nvSpPr>
           <p:cNvPr id="2" name="Rectangle 1"/>
@@ -7318,7 +9541,9 @@
         <p:txBody>
           <a:bodyPr rtlCol="0" anchor="ctr"/>
           <a:lstStyle/>
-          <a:p/>
+          <a:p>
+            <a:endParaRPr/>
+          </a:p>
         </p:txBody>
       </p:sp>
       <p:sp>
@@ -7359,7 +9584,9 @@
         <p:txBody>
           <a:bodyPr rtlCol="0" anchor="ctr"/>
           <a:lstStyle/>
-          <a:p/>
+          <a:p>
+            <a:endParaRPr/>
+          </a:p>
         </p:txBody>
       </p:sp>
       <p:sp>
@@ -7379,7 +9606,7 @@
           <a:noFill/>
         </p:spPr>
         <p:txBody>
-          <a:bodyPr wrap="square" lIns="0" rIns="0" tIns="0" bIns="0" anchor="ctr">
+          <a:bodyPr wrap="square" lIns="0" tIns="0" rIns="0" bIns="0" anchor="ctr">
             <a:spAutoFit/>
           </a:bodyPr>
           <a:lstStyle/>
@@ -7435,7 +9662,9 @@
         <p:txBody>
           <a:bodyPr rtlCol="0" anchor="ctr"/>
           <a:lstStyle/>
-          <a:p/>
+          <a:p>
+            <a:endParaRPr/>
+          </a:p>
         </p:txBody>
       </p:sp>
       <p:sp>
@@ -7455,7 +9684,7 @@
           <a:noFill/>
         </p:spPr>
         <p:txBody>
-          <a:bodyPr wrap="square" lIns="0" rIns="0" tIns="0" bIns="0" anchor="ctr">
+          <a:bodyPr wrap="square" lIns="0" tIns="0" rIns="0" bIns="0" anchor="ctr">
             <a:spAutoFit/>
           </a:bodyPr>
           <a:lstStyle/>
@@ -7546,7 +9775,9 @@
         <p:txBody>
           <a:bodyPr rtlCol="0" anchor="ctr"/>
           <a:lstStyle/>
-          <a:p/>
+          <a:p>
+            <a:endParaRPr/>
+          </a:p>
         </p:txBody>
       </p:sp>
       <p:sp>
@@ -7566,7 +9797,7 @@
           <a:noFill/>
         </p:spPr>
         <p:txBody>
-          <a:bodyPr wrap="square" lIns="0" rIns="0" tIns="0" bIns="0" anchor="t">
+          <a:bodyPr wrap="square" lIns="0" tIns="0" rIns="0" bIns="0" anchor="t">
             <a:spAutoFit/>
           </a:bodyPr>
           <a:lstStyle/>
@@ -7601,7 +9832,7 @@
           <a:noFill/>
         </p:spPr>
         <p:txBody>
-          <a:bodyPr wrap="square" lIns="0" rIns="0" tIns="0" bIns="0" anchor="t">
+          <a:bodyPr wrap="square" lIns="0" tIns="0" rIns="0" bIns="0" anchor="t">
             <a:spAutoFit/>
           </a:bodyPr>
           <a:lstStyle/>
@@ -7731,7 +9962,9 @@
         <p:txBody>
           <a:bodyPr rtlCol="0" anchor="ctr"/>
           <a:lstStyle/>
-          <a:p/>
+          <a:p>
+            <a:endParaRPr/>
+          </a:p>
         </p:txBody>
       </p:sp>
       <p:sp>
@@ -7751,7 +9984,7 @@
           <a:noFill/>
         </p:spPr>
         <p:txBody>
-          <a:bodyPr wrap="square" lIns="0" rIns="0" tIns="0" bIns="0" anchor="ctr">
+          <a:bodyPr wrap="square" lIns="0" tIns="0" rIns="0" bIns="0" anchor="ctr">
             <a:spAutoFit/>
           </a:bodyPr>
           <a:lstStyle/>
@@ -7796,7 +10029,7 @@
 </file>
 
 <file path=ppt/slides/slide4.xml><?xml version="1.0" encoding="utf-8"?>
-<p:sld xmlns:a="http://schemas.openxmlformats.org/drawingml/2006/main" xmlns:p="http://schemas.openxmlformats.org/presentationml/2006/main" xmlns:r="http://schemas.openxmlformats.org/officeDocument/2006/relationships">
+<p:sld xmlns:a="http://schemas.openxmlformats.org/drawingml/2006/main" xmlns:r="http://schemas.openxmlformats.org/officeDocument/2006/relationships" xmlns:p="http://schemas.openxmlformats.org/presentationml/2006/main">
   <p:cSld>
     <p:bg>
       <p:bgPr>
@@ -7812,7 +10045,14 @@
         <p:cNvGrpSpPr/>
         <p:nvPr/>
       </p:nvGrpSpPr>
-      <p:grpSpPr/>
+      <p:grpSpPr>
+        <a:xfrm>
+          <a:off x="0" y="0"/>
+          <a:ext cx="0" cy="0"/>
+          <a:chOff x="0" y="0"/>
+          <a:chExt cx="0" cy="0"/>
+        </a:xfrm>
+      </p:grpSpPr>
       <p:sp>
         <p:nvSpPr>
           <p:cNvPr id="2" name="Rectangle 1"/>
@@ -7851,7 +10091,9 @@
         <p:txBody>
           <a:bodyPr rtlCol="0" anchor="ctr"/>
           <a:lstStyle/>
-          <a:p/>
+          <a:p>
+            <a:endParaRPr/>
+          </a:p>
         </p:txBody>
       </p:sp>
       <p:sp>
@@ -7892,7 +10134,9 @@
         <p:txBody>
           <a:bodyPr rtlCol="0" anchor="ctr"/>
           <a:lstStyle/>
-          <a:p/>
+          <a:p>
+            <a:endParaRPr/>
+          </a:p>
         </p:txBody>
       </p:sp>
       <p:sp>
@@ -7912,7 +10156,7 @@
           <a:noFill/>
         </p:spPr>
         <p:txBody>
-          <a:bodyPr wrap="square" lIns="0" rIns="0" tIns="0" bIns="0" anchor="ctr">
+          <a:bodyPr wrap="square" lIns="0" tIns="0" rIns="0" bIns="0" anchor="ctr">
             <a:spAutoFit/>
           </a:bodyPr>
           <a:lstStyle/>
@@ -7968,7 +10212,9 @@
         <p:txBody>
           <a:bodyPr rtlCol="0" anchor="ctr"/>
           <a:lstStyle/>
-          <a:p/>
+          <a:p>
+            <a:endParaRPr/>
+          </a:p>
         </p:txBody>
       </p:sp>
       <p:sp>
@@ -7988,7 +10234,7 @@
           <a:noFill/>
         </p:spPr>
         <p:txBody>
-          <a:bodyPr wrap="square" lIns="0" rIns="0" tIns="0" bIns="0" anchor="ctr">
+          <a:bodyPr wrap="square" lIns="0" tIns="0" rIns="0" bIns="0" anchor="ctr">
             <a:spAutoFit/>
           </a:bodyPr>
           <a:lstStyle/>
@@ -8055,7 +10301,9 @@
         <p:txBody>
           <a:bodyPr rtlCol="0" anchor="ctr"/>
           <a:lstStyle/>
-          <a:p/>
+          <a:p>
+            <a:endParaRPr/>
+          </a:p>
         </p:txBody>
       </p:sp>
       <p:sp>
@@ -8075,7 +10323,7 @@
           <a:noFill/>
         </p:spPr>
         <p:txBody>
-          <a:bodyPr wrap="square" lIns="0" rIns="0" tIns="0" bIns="0" anchor="t">
+          <a:bodyPr wrap="square" lIns="0" tIns="0" rIns="0" bIns="0" anchor="t">
             <a:spAutoFit/>
           </a:bodyPr>
           <a:lstStyle/>
@@ -8110,7 +10358,7 @@
           <a:noFill/>
         </p:spPr>
         <p:txBody>
-          <a:bodyPr wrap="square" lIns="0" rIns="0" tIns="0" bIns="0" anchor="t">
+          <a:bodyPr wrap="square" lIns="0" tIns="0" rIns="0" bIns="0" anchor="t">
             <a:spAutoFit/>
           </a:bodyPr>
           <a:lstStyle/>
@@ -8247,7 +10495,9 @@
         <p:txBody>
           <a:bodyPr rtlCol="0" anchor="ctr"/>
           <a:lstStyle/>
-          <a:p/>
+          <a:p>
+            <a:endParaRPr/>
+          </a:p>
         </p:txBody>
       </p:sp>
       <p:sp>
@@ -8267,7 +10517,7 @@
           <a:noFill/>
         </p:spPr>
         <p:txBody>
-          <a:bodyPr wrap="square" lIns="0" rIns="0" tIns="0" bIns="0" anchor="t">
+          <a:bodyPr wrap="square" lIns="0" tIns="0" rIns="0" bIns="0" anchor="t">
             <a:spAutoFit/>
           </a:bodyPr>
           <a:lstStyle/>
@@ -8302,7 +10552,7 @@
           <a:noFill/>
         </p:spPr>
         <p:txBody>
-          <a:bodyPr wrap="square" lIns="0" rIns="0" tIns="0" bIns="0" anchor="t">
+          <a:bodyPr wrap="square" lIns="0" tIns="0" rIns="0" bIns="0" anchor="t">
             <a:spAutoFit/>
           </a:bodyPr>
           <a:lstStyle/>
@@ -8405,7 +10655,9 @@
         <p:txBody>
           <a:bodyPr rtlCol="0" anchor="ctr"/>
           <a:lstStyle/>
-          <a:p/>
+          <a:p>
+            <a:endParaRPr/>
+          </a:p>
         </p:txBody>
       </p:sp>
       <p:sp>
@@ -8425,7 +10677,7 @@
           <a:noFill/>
         </p:spPr>
         <p:txBody>
-          <a:bodyPr wrap="square" lIns="0" rIns="0" tIns="0" bIns="0" anchor="t">
+          <a:bodyPr wrap="square" lIns="0" tIns="0" rIns="0" bIns="0" anchor="t">
             <a:spAutoFit/>
           </a:bodyPr>
           <a:lstStyle/>
@@ -8460,7 +10712,7 @@
           <a:noFill/>
         </p:spPr>
         <p:txBody>
-          <a:bodyPr wrap="square" lIns="0" rIns="0" tIns="0" bIns="0" anchor="t">
+          <a:bodyPr wrap="square" lIns="0" tIns="0" rIns="0" bIns="0" anchor="t">
             <a:spAutoFit/>
           </a:bodyPr>
           <a:lstStyle/>
@@ -8606,7 +10858,9 @@
         <p:txBody>
           <a:bodyPr rtlCol="0" anchor="ctr"/>
           <a:lstStyle/>
-          <a:p/>
+          <a:p>
+            <a:endParaRPr/>
+          </a:p>
         </p:txBody>
       </p:sp>
       <p:sp>
@@ -8626,7 +10880,7 @@
           <a:noFill/>
         </p:spPr>
         <p:txBody>
-          <a:bodyPr wrap="square" lIns="0" rIns="0" tIns="0" bIns="0" anchor="ctr">
+          <a:bodyPr wrap="square" lIns="0" tIns="0" rIns="0" bIns="0" anchor="ctr">
             <a:spAutoFit/>
           </a:bodyPr>
           <a:lstStyle/>
@@ -8653,7 +10907,7 @@
 </file>
 
 <file path=ppt/slides/slide5.xml><?xml version="1.0" encoding="utf-8"?>
-<p:sld xmlns:a="http://schemas.openxmlformats.org/drawingml/2006/main" xmlns:p="http://schemas.openxmlformats.org/presentationml/2006/main" xmlns:r="http://schemas.openxmlformats.org/officeDocument/2006/relationships">
+<p:sld xmlns:a="http://schemas.openxmlformats.org/drawingml/2006/main" xmlns:r="http://schemas.openxmlformats.org/officeDocument/2006/relationships" xmlns:p="http://schemas.openxmlformats.org/presentationml/2006/main">
   <p:cSld>
     <p:bg>
       <p:bgPr>
@@ -8669,7 +10923,14 @@
         <p:cNvGrpSpPr/>
         <p:nvPr/>
       </p:nvGrpSpPr>
-      <p:grpSpPr/>
+      <p:grpSpPr>
+        <a:xfrm>
+          <a:off x="0" y="0"/>
+          <a:ext cx="0" cy="0"/>
+          <a:chOff x="0" y="0"/>
+          <a:chExt cx="0" cy="0"/>
+        </a:xfrm>
+      </p:grpSpPr>
       <p:sp>
         <p:nvSpPr>
           <p:cNvPr id="2" name="Rectangle 1"/>
@@ -8708,7 +10969,9 @@
         <p:txBody>
           <a:bodyPr rtlCol="0" anchor="ctr"/>
           <a:lstStyle/>
-          <a:p/>
+          <a:p>
+            <a:endParaRPr/>
+          </a:p>
         </p:txBody>
       </p:sp>
       <p:sp>
@@ -8749,7 +11012,9 @@
         <p:txBody>
           <a:bodyPr rtlCol="0" anchor="ctr"/>
           <a:lstStyle/>
-          <a:p/>
+          <a:p>
+            <a:endParaRPr/>
+          </a:p>
         </p:txBody>
       </p:sp>
       <p:sp>
@@ -8769,7 +11034,7 @@
           <a:noFill/>
         </p:spPr>
         <p:txBody>
-          <a:bodyPr wrap="square" lIns="0" rIns="0" tIns="0" bIns="0" anchor="ctr">
+          <a:bodyPr wrap="square" lIns="0" tIns="0" rIns="0" bIns="0" anchor="ctr">
             <a:spAutoFit/>
           </a:bodyPr>
           <a:lstStyle/>
@@ -8825,7 +11090,9 @@
         <p:txBody>
           <a:bodyPr rtlCol="0" anchor="ctr"/>
           <a:lstStyle/>
-          <a:p/>
+          <a:p>
+            <a:endParaRPr/>
+          </a:p>
         </p:txBody>
       </p:sp>
       <p:sp>
@@ -8845,7 +11112,7 @@
           <a:noFill/>
         </p:spPr>
         <p:txBody>
-          <a:bodyPr wrap="square" lIns="0" rIns="0" tIns="0" bIns="0" anchor="ctr">
+          <a:bodyPr wrap="square" lIns="0" tIns="0" rIns="0" bIns="0" anchor="ctr">
             <a:spAutoFit/>
           </a:bodyPr>
           <a:lstStyle/>
@@ -8936,7 +11203,9 @@
         <p:txBody>
           <a:bodyPr rtlCol="0" anchor="ctr"/>
           <a:lstStyle/>
-          <a:p/>
+          <a:p>
+            <a:endParaRPr/>
+          </a:p>
         </p:txBody>
       </p:sp>
       <p:sp>
@@ -8956,7 +11225,7 @@
           <a:noFill/>
         </p:spPr>
         <p:txBody>
-          <a:bodyPr wrap="square" lIns="0" rIns="0" tIns="0" bIns="0" anchor="t">
+          <a:bodyPr wrap="square" lIns="0" tIns="0" rIns="0" bIns="0" anchor="t">
             <a:spAutoFit/>
           </a:bodyPr>
           <a:lstStyle/>
@@ -8991,7 +11260,7 @@
           <a:noFill/>
         </p:spPr>
         <p:txBody>
-          <a:bodyPr wrap="square" lIns="0" rIns="0" tIns="0" bIns="0" anchor="t">
+          <a:bodyPr wrap="square" lIns="0" tIns="0" rIns="0" bIns="0" anchor="t">
             <a:spAutoFit/>
           </a:bodyPr>
           <a:lstStyle/>
@@ -9126,7 +11395,9 @@
         <p:txBody>
           <a:bodyPr rtlCol="0" anchor="ctr"/>
           <a:lstStyle/>
-          <a:p/>
+          <a:p>
+            <a:endParaRPr/>
+          </a:p>
         </p:txBody>
       </p:sp>
       <p:sp>
@@ -9146,7 +11417,7 @@
           <a:noFill/>
         </p:spPr>
         <p:txBody>
-          <a:bodyPr wrap="square" lIns="0" rIns="0" tIns="0" bIns="0" anchor="ctr">
+          <a:bodyPr wrap="square" lIns="0" tIns="0" rIns="0" bIns="0" anchor="ctr">
             <a:spAutoFit/>
           </a:bodyPr>
           <a:lstStyle/>
@@ -9173,7 +11444,7 @@
 </file>
 
 <file path=ppt/slides/slide6.xml><?xml version="1.0" encoding="utf-8"?>
-<p:sld xmlns:a="http://schemas.openxmlformats.org/drawingml/2006/main" xmlns:p="http://schemas.openxmlformats.org/presentationml/2006/main" xmlns:r="http://schemas.openxmlformats.org/officeDocument/2006/relationships">
+<p:sld xmlns:a="http://schemas.openxmlformats.org/drawingml/2006/main" xmlns:r="http://schemas.openxmlformats.org/officeDocument/2006/relationships" xmlns:p="http://schemas.openxmlformats.org/presentationml/2006/main">
   <p:cSld>
     <p:bg>
       <p:bgPr>
@@ -9189,7 +11460,14 @@
         <p:cNvGrpSpPr/>
         <p:nvPr/>
       </p:nvGrpSpPr>
-      <p:grpSpPr/>
+      <p:grpSpPr>
+        <a:xfrm>
+          <a:off x="0" y="0"/>
+          <a:ext cx="0" cy="0"/>
+          <a:chOff x="0" y="0"/>
+          <a:chExt cx="0" cy="0"/>
+        </a:xfrm>
+      </p:grpSpPr>
       <p:sp>
         <p:nvSpPr>
           <p:cNvPr id="2" name="Rectangle 1"/>
@@ -9228,7 +11506,9 @@
         <p:txBody>
           <a:bodyPr rtlCol="0" anchor="ctr"/>
           <a:lstStyle/>
-          <a:p/>
+          <a:p>
+            <a:endParaRPr/>
+          </a:p>
         </p:txBody>
       </p:sp>
       <p:sp>
@@ -9269,7 +11549,9 @@
         <p:txBody>
           <a:bodyPr rtlCol="0" anchor="ctr"/>
           <a:lstStyle/>
-          <a:p/>
+          <a:p>
+            <a:endParaRPr/>
+          </a:p>
         </p:txBody>
       </p:sp>
       <p:sp>
@@ -9289,7 +11571,7 @@
           <a:noFill/>
         </p:spPr>
         <p:txBody>
-          <a:bodyPr wrap="square" lIns="0" rIns="0" tIns="0" bIns="0" anchor="ctr">
+          <a:bodyPr wrap="square" lIns="0" tIns="0" rIns="0" bIns="0" anchor="ctr">
             <a:spAutoFit/>
           </a:bodyPr>
           <a:lstStyle/>
@@ -9345,7 +11627,9 @@
         <p:txBody>
           <a:bodyPr rtlCol="0" anchor="ctr"/>
           <a:lstStyle/>
-          <a:p/>
+          <a:p>
+            <a:endParaRPr/>
+          </a:p>
         </p:txBody>
       </p:sp>
       <p:sp>
@@ -9365,7 +11649,7 @@
           <a:noFill/>
         </p:spPr>
         <p:txBody>
-          <a:bodyPr wrap="square" lIns="0" rIns="0" tIns="0" bIns="0" anchor="ctr">
+          <a:bodyPr wrap="square" lIns="0" tIns="0" rIns="0" bIns="0" anchor="ctr">
             <a:spAutoFit/>
           </a:bodyPr>
           <a:lstStyle/>
@@ -9432,7 +11716,9 @@
         <p:txBody>
           <a:bodyPr rtlCol="0" anchor="ctr"/>
           <a:lstStyle/>
-          <a:p/>
+          <a:p>
+            <a:endParaRPr/>
+          </a:p>
         </p:txBody>
       </p:sp>
       <p:sp>
@@ -9452,7 +11738,7 @@
           <a:noFill/>
         </p:spPr>
         <p:txBody>
-          <a:bodyPr wrap="square" lIns="0" rIns="0" tIns="0" bIns="0" anchor="ctr">
+          <a:bodyPr wrap="square" lIns="0" tIns="0" rIns="0" bIns="0" anchor="ctr">
             <a:spAutoFit/>
           </a:bodyPr>
           <a:lstStyle/>
@@ -9487,7 +11773,7 @@
           <a:noFill/>
         </p:spPr>
         <p:txBody>
-          <a:bodyPr wrap="square" lIns="0" rIns="0" tIns="0" bIns="0" anchor="ctr">
+          <a:bodyPr wrap="square" lIns="0" tIns="0" rIns="0" bIns="0" anchor="ctr">
             <a:spAutoFit/>
           </a:bodyPr>
           <a:lstStyle/>
@@ -9554,7 +11840,9 @@
         <p:txBody>
           <a:bodyPr rtlCol="0" anchor="ctr"/>
           <a:lstStyle/>
-          <a:p/>
+          <a:p>
+            <a:endParaRPr/>
+          </a:p>
         </p:txBody>
       </p:sp>
       <p:sp>
@@ -9574,7 +11862,7 @@
           <a:noFill/>
         </p:spPr>
         <p:txBody>
-          <a:bodyPr wrap="square" lIns="0" rIns="0" tIns="0" bIns="0" anchor="ctr">
+          <a:bodyPr wrap="square" lIns="0" tIns="0" rIns="0" bIns="0" anchor="ctr">
             <a:spAutoFit/>
           </a:bodyPr>
           <a:lstStyle/>
@@ -9609,7 +11897,7 @@
           <a:noFill/>
         </p:spPr>
         <p:txBody>
-          <a:bodyPr wrap="square" lIns="0" rIns="0" tIns="0" bIns="0" anchor="ctr">
+          <a:bodyPr wrap="square" lIns="0" tIns="0" rIns="0" bIns="0" anchor="ctr">
             <a:spAutoFit/>
           </a:bodyPr>
           <a:lstStyle/>
@@ -9676,7 +11964,9 @@
         <p:txBody>
           <a:bodyPr rtlCol="0" anchor="ctr"/>
           <a:lstStyle/>
-          <a:p/>
+          <a:p>
+            <a:endParaRPr/>
+          </a:p>
         </p:txBody>
       </p:sp>
       <p:sp>
@@ -9696,7 +11986,7 @@
           <a:noFill/>
         </p:spPr>
         <p:txBody>
-          <a:bodyPr wrap="square" lIns="0" rIns="0" tIns="0" bIns="0" anchor="ctr">
+          <a:bodyPr wrap="square" lIns="0" tIns="0" rIns="0" bIns="0" anchor="ctr">
             <a:spAutoFit/>
           </a:bodyPr>
           <a:lstStyle/>
@@ -9731,7 +12021,7 @@
           <a:noFill/>
         </p:spPr>
         <p:txBody>
-          <a:bodyPr wrap="square" lIns="0" rIns="0" tIns="0" bIns="0" anchor="ctr">
+          <a:bodyPr wrap="square" lIns="0" tIns="0" rIns="0" bIns="0" anchor="ctr">
             <a:spAutoFit/>
           </a:bodyPr>
           <a:lstStyle/>
@@ -9798,7 +12088,9 @@
         <p:txBody>
           <a:bodyPr rtlCol="0" anchor="ctr"/>
           <a:lstStyle/>
-          <a:p/>
+          <a:p>
+            <a:endParaRPr/>
+          </a:p>
         </p:txBody>
       </p:sp>
       <p:sp>
@@ -9818,7 +12110,7 @@
           <a:noFill/>
         </p:spPr>
         <p:txBody>
-          <a:bodyPr wrap="square" lIns="0" rIns="0" tIns="0" bIns="0" anchor="ctr">
+          <a:bodyPr wrap="square" lIns="0" tIns="0" rIns="0" bIns="0" anchor="ctr">
             <a:spAutoFit/>
           </a:bodyPr>
           <a:lstStyle/>
@@ -9853,7 +12145,7 @@
           <a:noFill/>
         </p:spPr>
         <p:txBody>
-          <a:bodyPr wrap="square" lIns="0" rIns="0" tIns="0" bIns="0" anchor="ctr">
+          <a:bodyPr wrap="square" lIns="0" tIns="0" rIns="0" bIns="0" anchor="ctr">
             <a:spAutoFit/>
           </a:bodyPr>
           <a:lstStyle/>
@@ -9920,7 +12212,9 @@
         <p:txBody>
           <a:bodyPr rtlCol="0" anchor="ctr"/>
           <a:lstStyle/>
-          <a:p/>
+          <a:p>
+            <a:endParaRPr/>
+          </a:p>
         </p:txBody>
       </p:sp>
       <p:sp>
@@ -9940,7 +12234,7 @@
           <a:noFill/>
         </p:spPr>
         <p:txBody>
-          <a:bodyPr wrap="square" lIns="0" rIns="0" tIns="0" bIns="0" anchor="ctr">
+          <a:bodyPr wrap="square" lIns="0" tIns="0" rIns="0" bIns="0" anchor="ctr">
             <a:spAutoFit/>
           </a:bodyPr>
           <a:lstStyle/>
@@ -9975,7 +12269,7 @@
           <a:noFill/>
         </p:spPr>
         <p:txBody>
-          <a:bodyPr wrap="square" lIns="0" rIns="0" tIns="0" bIns="0" anchor="ctr">
+          <a:bodyPr wrap="square" lIns="0" tIns="0" rIns="0" bIns="0" anchor="ctr">
             <a:spAutoFit/>
           </a:bodyPr>
           <a:lstStyle/>
@@ -10042,7 +12336,9 @@
         <p:txBody>
           <a:bodyPr rtlCol="0" anchor="ctr"/>
           <a:lstStyle/>
-          <a:p/>
+          <a:p>
+            <a:endParaRPr/>
+          </a:p>
         </p:txBody>
       </p:sp>
       <p:sp>
@@ -10062,7 +12358,7 @@
           <a:noFill/>
         </p:spPr>
         <p:txBody>
-          <a:bodyPr wrap="square" lIns="0" rIns="0" tIns="0" bIns="0" anchor="ctr">
+          <a:bodyPr wrap="square" lIns="0" tIns="0" rIns="0" bIns="0" anchor="ctr">
             <a:spAutoFit/>
           </a:bodyPr>
           <a:lstStyle/>
@@ -10129,7 +12425,9 @@
         <p:txBody>
           <a:bodyPr rtlCol="0" anchor="ctr"/>
           <a:lstStyle/>
-          <a:p/>
+          <a:p>
+            <a:endParaRPr/>
+          </a:p>
         </p:txBody>
       </p:sp>
       <p:sp>
@@ -10149,7 +12447,7 @@
           <a:noFill/>
         </p:spPr>
         <p:txBody>
-          <a:bodyPr wrap="square" lIns="0" rIns="0" tIns="0" bIns="0" anchor="t">
+          <a:bodyPr wrap="square" lIns="0" tIns="0" rIns="0" bIns="0" anchor="t">
             <a:spAutoFit/>
           </a:bodyPr>
           <a:lstStyle/>
@@ -10184,7 +12482,7 @@
           <a:noFill/>
         </p:spPr>
         <p:txBody>
-          <a:bodyPr wrap="square" lIns="0" rIns="0" tIns="0" bIns="0" anchor="t">
+          <a:bodyPr wrap="square" lIns="0" tIns="0" rIns="0" bIns="0" anchor="t">
             <a:spAutoFit/>
           </a:bodyPr>
           <a:lstStyle/>
@@ -10305,7 +12603,9 @@
         <p:txBody>
           <a:bodyPr rtlCol="0" anchor="ctr"/>
           <a:lstStyle/>
-          <a:p/>
+          <a:p>
+            <a:endParaRPr/>
+          </a:p>
         </p:txBody>
       </p:sp>
       <p:sp>
@@ -10325,7 +12625,7 @@
           <a:noFill/>
         </p:spPr>
         <p:txBody>
-          <a:bodyPr wrap="square" lIns="0" rIns="0" tIns="0" bIns="0" anchor="t">
+          <a:bodyPr wrap="square" lIns="0" tIns="0" rIns="0" bIns="0" anchor="t">
             <a:spAutoFit/>
           </a:bodyPr>
           <a:lstStyle/>
@@ -10360,7 +12660,7 @@
           <a:noFill/>
         </p:spPr>
         <p:txBody>
-          <a:bodyPr wrap="square" lIns="0" rIns="0" tIns="0" bIns="0" anchor="t">
+          <a:bodyPr wrap="square" lIns="0" tIns="0" rIns="0" bIns="0" anchor="t">
             <a:spAutoFit/>
           </a:bodyPr>
           <a:lstStyle/>
@@ -10463,7 +12763,9 @@
         <p:txBody>
           <a:bodyPr rtlCol="0" anchor="ctr"/>
           <a:lstStyle/>
-          <a:p/>
+          <a:p>
+            <a:endParaRPr/>
+          </a:p>
         </p:txBody>
       </p:sp>
       <p:sp>
@@ -10483,7 +12785,7 @@
           <a:noFill/>
         </p:spPr>
         <p:txBody>
-          <a:bodyPr wrap="square" lIns="0" rIns="0" tIns="0" bIns="0" anchor="t">
+          <a:bodyPr wrap="square" lIns="0" tIns="0" rIns="0" bIns="0" anchor="t">
             <a:spAutoFit/>
           </a:bodyPr>
           <a:lstStyle/>
@@ -10518,7 +12820,7 @@
           <a:noFill/>
         </p:spPr>
         <p:txBody>
-          <a:bodyPr wrap="square" lIns="0" rIns="0" tIns="0" bIns="0" anchor="t">
+          <a:bodyPr wrap="square" lIns="0" tIns="0" rIns="0" bIns="0" anchor="t">
             <a:spAutoFit/>
           </a:bodyPr>
           <a:lstStyle/>
@@ -10599,7 +12901,7 @@
 </file>
 
 <file path=ppt/slides/slide7.xml><?xml version="1.0" encoding="utf-8"?>
-<p:sld xmlns:a="http://schemas.openxmlformats.org/drawingml/2006/main" xmlns:p="http://schemas.openxmlformats.org/presentationml/2006/main" xmlns:r="http://schemas.openxmlformats.org/officeDocument/2006/relationships">
+<p:sld xmlns:a="http://schemas.openxmlformats.org/drawingml/2006/main" xmlns:r="http://schemas.openxmlformats.org/officeDocument/2006/relationships" xmlns:p="http://schemas.openxmlformats.org/presentationml/2006/main">
   <p:cSld>
     <p:bg>
       <p:bgPr>
@@ -10615,7 +12917,14 @@
         <p:cNvGrpSpPr/>
         <p:nvPr/>
       </p:nvGrpSpPr>
-      <p:grpSpPr/>
+      <p:grpSpPr>
+        <a:xfrm>
+          <a:off x="0" y="0"/>
+          <a:ext cx="0" cy="0"/>
+          <a:chOff x="0" y="0"/>
+          <a:chExt cx="0" cy="0"/>
+        </a:xfrm>
+      </p:grpSpPr>
       <p:sp>
         <p:nvSpPr>
           <p:cNvPr id="2" name="Rectangle 1"/>
@@ -10654,7 +12963,9 @@
         <p:txBody>
           <a:bodyPr rtlCol="0" anchor="ctr"/>
           <a:lstStyle/>
-          <a:p/>
+          <a:p>
+            <a:endParaRPr/>
+          </a:p>
         </p:txBody>
       </p:sp>
       <p:sp>
@@ -10695,7 +13006,9 @@
         <p:txBody>
           <a:bodyPr rtlCol="0" anchor="ctr"/>
           <a:lstStyle/>
-          <a:p/>
+          <a:p>
+            <a:endParaRPr/>
+          </a:p>
         </p:txBody>
       </p:sp>
       <p:sp>
@@ -10715,7 +13028,7 @@
           <a:noFill/>
         </p:spPr>
         <p:txBody>
-          <a:bodyPr wrap="square" lIns="0" rIns="0" tIns="0" bIns="0" anchor="ctr">
+          <a:bodyPr wrap="square" lIns="0" tIns="0" rIns="0" bIns="0" anchor="ctr">
             <a:spAutoFit/>
           </a:bodyPr>
           <a:lstStyle/>
@@ -10771,7 +13084,9 @@
         <p:txBody>
           <a:bodyPr rtlCol="0" anchor="ctr"/>
           <a:lstStyle/>
-          <a:p/>
+          <a:p>
+            <a:endParaRPr/>
+          </a:p>
         </p:txBody>
       </p:sp>
       <p:sp>
@@ -10791,7 +13106,7 @@
           <a:noFill/>
         </p:spPr>
         <p:txBody>
-          <a:bodyPr wrap="square" lIns="0" rIns="0" tIns="0" bIns="0" anchor="ctr">
+          <a:bodyPr wrap="square" lIns="0" tIns="0" rIns="0" bIns="0" anchor="ctr">
             <a:spAutoFit/>
           </a:bodyPr>
           <a:lstStyle/>
@@ -10828,9 +13143,27 @@
                 <a:tableStyleId>{5C22544A-7EE6-4342-B048-85BDC9FD1C3A}</a:tableStyleId>
               </a:tblPr>
               <a:tblGrid>
-                <a:gridCol w="1005840"/>
-                <a:gridCol w="2377440"/>
-                <a:gridCol w="2011680"/>
+                <a:gridCol w="1005840">
+                  <a:extLst>
+                    <a:ext uri="{9D8B030D-6E8A-4147-A177-3AD203B41FA5}">
+                      <a16:colId xmlns:a16="http://schemas.microsoft.com/office/drawing/2014/main" val="20000"/>
+                    </a:ext>
+                  </a:extLst>
+                </a:gridCol>
+                <a:gridCol w="2377440">
+                  <a:extLst>
+                    <a:ext uri="{9D8B030D-6E8A-4147-A177-3AD203B41FA5}">
+                      <a16:colId xmlns:a16="http://schemas.microsoft.com/office/drawing/2014/main" val="20001"/>
+                    </a:ext>
+                  </a:extLst>
+                </a:gridCol>
+                <a:gridCol w="2011680">
+                  <a:extLst>
+                    <a:ext uri="{9D8B030D-6E8A-4147-A177-3AD203B41FA5}">
+                      <a16:colId xmlns:a16="http://schemas.microsoft.com/office/drawing/2014/main" val="20002"/>
+                    </a:ext>
+                  </a:extLst>
+                </a:gridCol>
               </a:tblGrid>
               <a:tr h="457200">
                 <a:tc>
@@ -10899,6 +13232,11 @@
                     </a:solidFill>
                   </a:tcPr>
                 </a:tc>
+                <a:extLst>
+                  <a:ext uri="{0D108BD9-81ED-4DB2-BD59-A6C34878D82A}">
+                    <a16:rowId xmlns:a16="http://schemas.microsoft.com/office/drawing/2014/main" val="10000"/>
+                  </a:ext>
+                </a:extLst>
               </a:tr>
               <a:tr h="457200">
                 <a:tc>
@@ -10967,6 +13305,11 @@
                     </a:solidFill>
                   </a:tcPr>
                 </a:tc>
+                <a:extLst>
+                  <a:ext uri="{0D108BD9-81ED-4DB2-BD59-A6C34878D82A}">
+                    <a16:rowId xmlns:a16="http://schemas.microsoft.com/office/drawing/2014/main" val="10001"/>
+                  </a:ext>
+                </a:extLst>
               </a:tr>
               <a:tr h="457200">
                 <a:tc>
@@ -11035,6 +13378,11 @@
                     </a:solidFill>
                   </a:tcPr>
                 </a:tc>
+                <a:extLst>
+                  <a:ext uri="{0D108BD9-81ED-4DB2-BD59-A6C34878D82A}">
+                    <a16:rowId xmlns:a16="http://schemas.microsoft.com/office/drawing/2014/main" val="10002"/>
+                  </a:ext>
+                </a:extLst>
               </a:tr>
               <a:tr h="457200">
                 <a:tc>
@@ -11103,6 +13451,11 @@
                     </a:solidFill>
                   </a:tcPr>
                 </a:tc>
+                <a:extLst>
+                  <a:ext uri="{0D108BD9-81ED-4DB2-BD59-A6C34878D82A}">
+                    <a16:rowId xmlns:a16="http://schemas.microsoft.com/office/drawing/2014/main" val="10003"/>
+                  </a:ext>
+                </a:extLst>
               </a:tr>
               <a:tr h="457200">
                 <a:tc>
@@ -11171,6 +13524,11 @@
                     </a:solidFill>
                   </a:tcPr>
                 </a:tc>
+                <a:extLst>
+                  <a:ext uri="{0D108BD9-81ED-4DB2-BD59-A6C34878D82A}">
+                    <a16:rowId xmlns:a16="http://schemas.microsoft.com/office/drawing/2014/main" val="10004"/>
+                  </a:ext>
+                </a:extLst>
               </a:tr>
             </a:tbl>
           </a:graphicData>
@@ -11238,7 +13596,9 @@
         <p:txBody>
           <a:bodyPr rtlCol="0" anchor="ctr"/>
           <a:lstStyle/>
-          <a:p/>
+          <a:p>
+            <a:endParaRPr/>
+          </a:p>
         </p:txBody>
       </p:sp>
       <p:sp>
@@ -11258,7 +13618,7 @@
           <a:noFill/>
         </p:spPr>
         <p:txBody>
-          <a:bodyPr wrap="square" lIns="0" rIns="0" tIns="0" bIns="0" anchor="ctr">
+          <a:bodyPr wrap="square" lIns="0" tIns="0" rIns="0" bIns="0" anchor="ctr">
             <a:spAutoFit/>
           </a:bodyPr>
           <a:lstStyle/>
@@ -11285,7 +13645,7 @@
 </file>
 
 <file path=ppt/slides/slide8.xml><?xml version="1.0" encoding="utf-8"?>
-<p:sld xmlns:a="http://schemas.openxmlformats.org/drawingml/2006/main" xmlns:p="http://schemas.openxmlformats.org/presentationml/2006/main" xmlns:r="http://schemas.openxmlformats.org/officeDocument/2006/relationships">
+<p:sld xmlns:a="http://schemas.openxmlformats.org/drawingml/2006/main" xmlns:r="http://schemas.openxmlformats.org/officeDocument/2006/relationships" xmlns:p="http://schemas.openxmlformats.org/presentationml/2006/main">
   <p:cSld>
     <p:bg>
       <p:bgPr>
@@ -11301,7 +13661,14 @@
         <p:cNvGrpSpPr/>
         <p:nvPr/>
       </p:nvGrpSpPr>
-      <p:grpSpPr/>
+      <p:grpSpPr>
+        <a:xfrm>
+          <a:off x="0" y="0"/>
+          <a:ext cx="0" cy="0"/>
+          <a:chOff x="0" y="0"/>
+          <a:chExt cx="0" cy="0"/>
+        </a:xfrm>
+      </p:grpSpPr>
       <p:sp>
         <p:nvSpPr>
           <p:cNvPr id="2" name="Rectangle 1"/>
@@ -11340,7 +13707,9 @@
         <p:txBody>
           <a:bodyPr rtlCol="0" anchor="ctr"/>
           <a:lstStyle/>
-          <a:p/>
+          <a:p>
+            <a:endParaRPr/>
+          </a:p>
         </p:txBody>
       </p:sp>
       <p:sp>
@@ -11381,7 +13750,9 @@
         <p:txBody>
           <a:bodyPr rtlCol="0" anchor="ctr"/>
           <a:lstStyle/>
-          <a:p/>
+          <a:p>
+            <a:endParaRPr/>
+          </a:p>
         </p:txBody>
       </p:sp>
       <p:sp>
@@ -11401,7 +13772,7 @@
           <a:noFill/>
         </p:spPr>
         <p:txBody>
-          <a:bodyPr wrap="square" lIns="0" rIns="0" tIns="0" bIns="0" anchor="ctr">
+          <a:bodyPr wrap="square" lIns="0" tIns="0" rIns="0" bIns="0" anchor="ctr">
             <a:spAutoFit/>
           </a:bodyPr>
           <a:lstStyle/>
@@ -11457,7 +13828,9 @@
         <p:txBody>
           <a:bodyPr rtlCol="0" anchor="ctr"/>
           <a:lstStyle/>
-          <a:p/>
+          <a:p>
+            <a:endParaRPr/>
+          </a:p>
         </p:txBody>
       </p:sp>
       <p:sp>
@@ -11477,7 +13850,7 @@
           <a:noFill/>
         </p:spPr>
         <p:txBody>
-          <a:bodyPr wrap="square" lIns="0" rIns="0" tIns="0" bIns="0" anchor="ctr">
+          <a:bodyPr wrap="square" lIns="0" tIns="0" rIns="0" bIns="0" anchor="ctr">
             <a:spAutoFit/>
           </a:bodyPr>
           <a:lstStyle/>
@@ -11514,9 +13887,27 @@
                 <a:tableStyleId>{5C22544A-7EE6-4342-B048-85BDC9FD1C3A}</a:tableStyleId>
               </a:tblPr>
               <a:tblGrid>
-                <a:gridCol w="1188720"/>
-                <a:gridCol w="1280160"/>
-                <a:gridCol w="1463040"/>
+                <a:gridCol w="1188720">
+                  <a:extLst>
+                    <a:ext uri="{9D8B030D-6E8A-4147-A177-3AD203B41FA5}">
+                      <a16:colId xmlns:a16="http://schemas.microsoft.com/office/drawing/2014/main" val="20000"/>
+                    </a:ext>
+                  </a:extLst>
+                </a:gridCol>
+                <a:gridCol w="1280160">
+                  <a:extLst>
+                    <a:ext uri="{9D8B030D-6E8A-4147-A177-3AD203B41FA5}">
+                      <a16:colId xmlns:a16="http://schemas.microsoft.com/office/drawing/2014/main" val="20001"/>
+                    </a:ext>
+                  </a:extLst>
+                </a:gridCol>
+                <a:gridCol w="1463040">
+                  <a:extLst>
+                    <a:ext uri="{9D8B030D-6E8A-4147-A177-3AD203B41FA5}">
+                      <a16:colId xmlns:a16="http://schemas.microsoft.com/office/drawing/2014/main" val="20002"/>
+                    </a:ext>
+                  </a:extLst>
+                </a:gridCol>
               </a:tblGrid>
               <a:tr h="329184">
                 <a:tc>
@@ -11585,6 +13976,11 @@
                     </a:solidFill>
                   </a:tcPr>
                 </a:tc>
+                <a:extLst>
+                  <a:ext uri="{0D108BD9-81ED-4DB2-BD59-A6C34878D82A}">
+                    <a16:rowId xmlns:a16="http://schemas.microsoft.com/office/drawing/2014/main" val="10000"/>
+                  </a:ext>
+                </a:extLst>
               </a:tr>
               <a:tr h="329184">
                 <a:tc>
@@ -11653,6 +14049,11 @@
                     </a:solidFill>
                   </a:tcPr>
                 </a:tc>
+                <a:extLst>
+                  <a:ext uri="{0D108BD9-81ED-4DB2-BD59-A6C34878D82A}">
+                    <a16:rowId xmlns:a16="http://schemas.microsoft.com/office/drawing/2014/main" val="10001"/>
+                  </a:ext>
+                </a:extLst>
               </a:tr>
               <a:tr h="329184">
                 <a:tc>
@@ -11721,6 +14122,11 @@
                     </a:solidFill>
                   </a:tcPr>
                 </a:tc>
+                <a:extLst>
+                  <a:ext uri="{0D108BD9-81ED-4DB2-BD59-A6C34878D82A}">
+                    <a16:rowId xmlns:a16="http://schemas.microsoft.com/office/drawing/2014/main" val="10002"/>
+                  </a:ext>
+                </a:extLst>
               </a:tr>
             </a:tbl>
           </a:graphicData>
@@ -11766,7 +14172,9 @@
         <p:txBody>
           <a:bodyPr rtlCol="0" anchor="ctr"/>
           <a:lstStyle/>
-          <a:p/>
+          <a:p>
+            <a:endParaRPr/>
+          </a:p>
         </p:txBody>
       </p:sp>
       <p:sp>
@@ -11786,7 +14194,7 @@
           <a:noFill/>
         </p:spPr>
         <p:txBody>
-          <a:bodyPr wrap="square" lIns="0" rIns="0" tIns="0" bIns="0" anchor="ctr">
+          <a:bodyPr wrap="square" lIns="0" tIns="0" rIns="0" bIns="0" anchor="ctr">
             <a:spAutoFit/>
           </a:bodyPr>
           <a:lstStyle/>
@@ -11880,7 +14288,9 @@
         <p:txBody>
           <a:bodyPr rtlCol="0" anchor="ctr"/>
           <a:lstStyle/>
-          <a:p/>
+          <a:p>
+            <a:endParaRPr/>
+          </a:p>
         </p:txBody>
       </p:sp>
       <p:sp>
@@ -11900,7 +14310,7 @@
           <a:noFill/>
         </p:spPr>
         <p:txBody>
-          <a:bodyPr wrap="square" lIns="0" rIns="0" tIns="0" bIns="0" anchor="ctr">
+          <a:bodyPr wrap="square" lIns="0" tIns="0" rIns="0" bIns="0" anchor="ctr">
             <a:spAutoFit/>
           </a:bodyPr>
           <a:lstStyle/>
@@ -11985,7 +14395,9 @@
         <p:txBody>
           <a:bodyPr rtlCol="0" anchor="ctr"/>
           <a:lstStyle/>
-          <a:p/>
+          <a:p>
+            <a:endParaRPr/>
+          </a:p>
         </p:txBody>
       </p:sp>
       <p:sp>
@@ -12005,7 +14417,7 @@
           <a:noFill/>
         </p:spPr>
         <p:txBody>
-          <a:bodyPr wrap="square" lIns="0" rIns="0" tIns="0" bIns="0" anchor="t">
+          <a:bodyPr wrap="square" lIns="0" tIns="0" rIns="0" bIns="0" anchor="t">
             <a:spAutoFit/>
           </a:bodyPr>
           <a:lstStyle/>
@@ -12040,7 +14452,7 @@
           <a:noFill/>
         </p:spPr>
         <p:txBody>
-          <a:bodyPr wrap="square" lIns="0" rIns="0" tIns="0" bIns="0" anchor="t">
+          <a:bodyPr wrap="square" lIns="0" tIns="0" rIns="0" bIns="0" anchor="t">
             <a:spAutoFit/>
           </a:bodyPr>
           <a:lstStyle/>
@@ -12180,7 +14592,7 @@
 </file>
 
 <file path=ppt/slides/slide9.xml><?xml version="1.0" encoding="utf-8"?>
-<p:sld xmlns:a="http://schemas.openxmlformats.org/drawingml/2006/main" xmlns:p="http://schemas.openxmlformats.org/presentationml/2006/main" xmlns:r="http://schemas.openxmlformats.org/officeDocument/2006/relationships">
+<p:sld xmlns:a="http://schemas.openxmlformats.org/drawingml/2006/main" xmlns:r="http://schemas.openxmlformats.org/officeDocument/2006/relationships" xmlns:p="http://schemas.openxmlformats.org/presentationml/2006/main">
   <p:cSld>
     <p:bg>
       <p:bgPr>
@@ -12196,7 +14608,14 @@
         <p:cNvGrpSpPr/>
         <p:nvPr/>
       </p:nvGrpSpPr>
-      <p:grpSpPr/>
+      <p:grpSpPr>
+        <a:xfrm>
+          <a:off x="0" y="0"/>
+          <a:ext cx="0" cy="0"/>
+          <a:chOff x="0" y="0"/>
+          <a:chExt cx="0" cy="0"/>
+        </a:xfrm>
+      </p:grpSpPr>
       <p:sp>
         <p:nvSpPr>
           <p:cNvPr id="2" name="Rectangle 1"/>
@@ -12235,7 +14654,9 @@
         <p:txBody>
           <a:bodyPr rtlCol="0" anchor="ctr"/>
           <a:lstStyle/>
-          <a:p/>
+          <a:p>
+            <a:endParaRPr/>
+          </a:p>
         </p:txBody>
       </p:sp>
       <p:sp>
@@ -12276,7 +14697,9 @@
         <p:txBody>
           <a:bodyPr rtlCol="0" anchor="ctr"/>
           <a:lstStyle/>
-          <a:p/>
+          <a:p>
+            <a:endParaRPr/>
+          </a:p>
         </p:txBody>
       </p:sp>
       <p:sp>
@@ -12296,7 +14719,7 @@
           <a:noFill/>
         </p:spPr>
         <p:txBody>
-          <a:bodyPr wrap="square" lIns="0" rIns="0" tIns="0" bIns="0" anchor="ctr">
+          <a:bodyPr wrap="square" lIns="0" tIns="0" rIns="0" bIns="0" anchor="ctr">
             <a:spAutoFit/>
           </a:bodyPr>
           <a:lstStyle/>
@@ -12352,7 +14775,9 @@
         <p:txBody>
           <a:bodyPr rtlCol="0" anchor="ctr"/>
           <a:lstStyle/>
-          <a:p/>
+          <a:p>
+            <a:endParaRPr/>
+          </a:p>
         </p:txBody>
       </p:sp>
       <p:sp>
@@ -12372,7 +14797,7 @@
           <a:noFill/>
         </p:spPr>
         <p:txBody>
-          <a:bodyPr wrap="square" lIns="0" rIns="0" tIns="0" bIns="0" anchor="ctr">
+          <a:bodyPr wrap="square" lIns="0" tIns="0" rIns="0" bIns="0" anchor="ctr">
             <a:spAutoFit/>
           </a:bodyPr>
           <a:lstStyle/>
@@ -12463,7 +14888,9 @@
         <p:txBody>
           <a:bodyPr rtlCol="0" anchor="ctr"/>
           <a:lstStyle/>
-          <a:p/>
+          <a:p>
+            <a:endParaRPr/>
+          </a:p>
         </p:txBody>
       </p:sp>
       <p:sp>
@@ -12483,7 +14910,7 @@
           <a:noFill/>
         </p:spPr>
         <p:txBody>
-          <a:bodyPr wrap="square" lIns="0" rIns="0" tIns="0" bIns="0" anchor="t">
+          <a:bodyPr wrap="square" lIns="0" tIns="0" rIns="0" bIns="0" anchor="t">
             <a:spAutoFit/>
           </a:bodyPr>
           <a:lstStyle/>
@@ -12518,7 +14945,7 @@
           <a:noFill/>
         </p:spPr>
         <p:txBody>
-          <a:bodyPr wrap="square" lIns="0" rIns="0" tIns="0" bIns="0" anchor="t">
+          <a:bodyPr wrap="square" lIns="0" tIns="0" rIns="0" bIns="0" anchor="t">
             <a:spAutoFit/>
           </a:bodyPr>
           <a:lstStyle/>
@@ -12639,7 +15066,9 @@
         <p:txBody>
           <a:bodyPr rtlCol="0" anchor="ctr"/>
           <a:lstStyle/>
-          <a:p/>
+          <a:p>
+            <a:endParaRPr/>
+          </a:p>
         </p:txBody>
       </p:sp>
       <p:sp>
@@ -12659,7 +15088,7 @@
           <a:noFill/>
         </p:spPr>
         <p:txBody>
-          <a:bodyPr wrap="square" lIns="0" rIns="0" tIns="0" bIns="0" anchor="t">
+          <a:bodyPr wrap="square" lIns="0" tIns="0" rIns="0" bIns="0" anchor="t">
             <a:spAutoFit/>
           </a:bodyPr>
           <a:lstStyle/>
@@ -12694,7 +15123,7 @@
           <a:noFill/>
         </p:spPr>
         <p:txBody>
-          <a:bodyPr wrap="square" lIns="0" rIns="0" tIns="0" bIns="0" anchor="t">
+          <a:bodyPr wrap="square" lIns="0" tIns="0" rIns="0" bIns="0" anchor="t">
             <a:spAutoFit/>
           </a:bodyPr>
           <a:lstStyle/>
@@ -12788,7 +15217,9 @@
         <p:txBody>
           <a:bodyPr rtlCol="0" anchor="ctr"/>
           <a:lstStyle/>
-          <a:p/>
+          <a:p>
+            <a:endParaRPr/>
+          </a:p>
         </p:txBody>
       </p:sp>
       <p:sp>
@@ -12808,7 +15239,7 @@
           <a:noFill/>
         </p:spPr>
         <p:txBody>
-          <a:bodyPr wrap="square" lIns="0" rIns="0" tIns="0" bIns="0" anchor="ctr">
+          <a:bodyPr wrap="square" lIns="0" tIns="0" rIns="0" bIns="0" anchor="ctr">
             <a:spAutoFit/>
           </a:bodyPr>
           <a:lstStyle/>

--- a/00-fundamentos/slides/Introducción al Aprendizaje No Supervisado - UDEM.pptx
+++ b/00-fundamentos/slides/Introducción al Aprendizaje No Supervisado - UDEM.pptx
@@ -18,8 +18,9 @@
     <p:sldId id="269" r:id="rId12"/>
     <p:sldId id="266" r:id="rId13"/>
     <p:sldId id="270" r:id="rId14"/>
-    <p:sldId id="267" r:id="rId15"/>
-    <p:sldId id="268" r:id="rId16"/>
+    <p:sldId id="271" r:id="rId15"/>
+    <p:sldId id="267" r:id="rId16"/>
+    <p:sldId id="268" r:id="rId17"/>
   </p:sldIdLst>
   <p:sldSz cx="9144000" cy="5143500" type="screen16x9"/>
   <p:notesSz cx="6858000" cy="9144000"/>
@@ -4309,7 +4310,7 @@
           <a:noFill/>
         </p:spPr>
         <p:txBody>
-          <a:bodyPr wrap="square" lIns="0" rIns="0" tIns="0" bIns="0" anchor="t">
+          <a:bodyPr wrap="square" lIns="0" tIns="0" rIns="0" bIns="0" anchor="t">
             <a:spAutoFit/>
           </a:bodyPr>
           <a:lstStyle/>
@@ -4363,7 +4364,7 @@
           </a:fontRef>
         </p:style>
         <p:txBody>
-          <a:bodyPr rtlCol="0" anchor="ctr" lIns="0" rIns="0" tIns="0" bIns="0"/>
+          <a:bodyPr lIns="0" tIns="0" rIns="0" bIns="0" rtlCol="0" anchor="ctr"/>
           <a:lstStyle/>
           <a:p>
             <a:pPr algn="ctr"/>
@@ -4396,7 +4397,7 @@
           <a:noFill/>
         </p:spPr>
         <p:txBody>
-          <a:bodyPr wrap="square" lIns="0" rIns="0" tIns="0" bIns="0" anchor="t">
+          <a:bodyPr wrap="square" lIns="0" tIns="0" rIns="0" bIns="0" anchor="t">
             <a:spAutoFit/>
           </a:bodyPr>
           <a:lstStyle/>
@@ -4464,7 +4465,9 @@
         <p:txBody>
           <a:bodyPr rtlCol="0" anchor="ctr"/>
           <a:lstStyle/>
-          <a:p/>
+          <a:p>
+            <a:endParaRPr/>
+          </a:p>
         </p:txBody>
       </p:sp>
       <p:sp>
@@ -4503,7 +4506,7 @@
           </a:fontRef>
         </p:style>
         <p:txBody>
-          <a:bodyPr rtlCol="0" anchor="ctr" lIns="0" rIns="0" tIns="0" bIns="0"/>
+          <a:bodyPr lIns="0" tIns="0" rIns="0" bIns="0" rtlCol="0" anchor="ctr"/>
           <a:lstStyle/>
           <a:p>
             <a:pPr algn="ctr"/>
@@ -4536,7 +4539,7 @@
           <a:noFill/>
         </p:spPr>
         <p:txBody>
-          <a:bodyPr wrap="square" lIns="0" rIns="0" tIns="0" bIns="0" anchor="t">
+          <a:bodyPr wrap="square" lIns="0" tIns="0" rIns="0" bIns="0" anchor="t">
             <a:spAutoFit/>
           </a:bodyPr>
           <a:lstStyle/>
@@ -4604,7 +4607,9 @@
         <p:txBody>
           <a:bodyPr rtlCol="0" anchor="ctr"/>
           <a:lstStyle/>
-          <a:p/>
+          <a:p>
+            <a:endParaRPr/>
+          </a:p>
         </p:txBody>
       </p:sp>
       <p:sp>
@@ -4643,7 +4648,7 @@
           </a:fontRef>
         </p:style>
         <p:txBody>
-          <a:bodyPr rtlCol="0" anchor="ctr" lIns="0" rIns="0" tIns="0" bIns="0"/>
+          <a:bodyPr lIns="0" tIns="0" rIns="0" bIns="0" rtlCol="0" anchor="ctr"/>
           <a:lstStyle/>
           <a:p>
             <a:pPr algn="ctr"/>
@@ -4676,7 +4681,7 @@
           <a:noFill/>
         </p:spPr>
         <p:txBody>
-          <a:bodyPr wrap="square" lIns="0" rIns="0" tIns="0" bIns="0" anchor="t">
+          <a:bodyPr wrap="square" lIns="0" tIns="0" rIns="0" bIns="0" anchor="t">
             <a:spAutoFit/>
           </a:bodyPr>
           <a:lstStyle/>
@@ -4744,7 +4749,9 @@
         <p:txBody>
           <a:bodyPr rtlCol="0" anchor="ctr"/>
           <a:lstStyle/>
-          <a:p/>
+          <a:p>
+            <a:endParaRPr/>
+          </a:p>
         </p:txBody>
       </p:sp>
       <p:sp>
@@ -4783,7 +4790,7 @@
           </a:fontRef>
         </p:style>
         <p:txBody>
-          <a:bodyPr rtlCol="0" anchor="ctr" lIns="0" rIns="0" tIns="0" bIns="0"/>
+          <a:bodyPr lIns="0" tIns="0" rIns="0" bIns="0" rtlCol="0" anchor="ctr"/>
           <a:lstStyle/>
           <a:p>
             <a:pPr algn="ctr"/>
@@ -4816,7 +4823,7 @@
           <a:noFill/>
         </p:spPr>
         <p:txBody>
-          <a:bodyPr wrap="square" lIns="0" rIns="0" tIns="0" bIns="0" anchor="t">
+          <a:bodyPr wrap="square" lIns="0" tIns="0" rIns="0" bIns="0" anchor="t">
             <a:spAutoFit/>
           </a:bodyPr>
           <a:lstStyle/>
@@ -4886,7 +4893,9 @@
         <p:txBody>
           <a:bodyPr rtlCol="0" anchor="ctr"/>
           <a:lstStyle/>
-          <a:p/>
+          <a:p>
+            <a:endParaRPr/>
+          </a:p>
         </p:txBody>
       </p:sp>
       <p:sp>
@@ -4906,7 +4915,7 @@
           <a:noFill/>
         </p:spPr>
         <p:txBody>
-          <a:bodyPr wrap="square" lIns="0" rIns="0" tIns="0" bIns="0" anchor="ctr">
+          <a:bodyPr wrap="square" lIns="0" tIns="0" rIns="0" bIns="0" anchor="ctr">
             <a:spAutoFit/>
           </a:bodyPr>
           <a:lstStyle/>
@@ -5231,7 +5240,7 @@
           <a:noFill/>
         </p:spPr>
         <p:txBody>
-          <a:bodyPr wrap="square" lIns="0" rIns="0" tIns="0" bIns="0" anchor="t">
+          <a:bodyPr wrap="square" lIns="0" tIns="0" rIns="0" bIns="0" anchor="t">
             <a:spAutoFit/>
           </a:bodyPr>
           <a:lstStyle/>
@@ -5285,7 +5294,7 @@
           </a:fontRef>
         </p:style>
         <p:txBody>
-          <a:bodyPr rtlCol="0" anchor="ctr" lIns="0" rIns="0" tIns="0" bIns="0"/>
+          <a:bodyPr lIns="0" tIns="0" rIns="0" bIns="0" rtlCol="0" anchor="ctr"/>
           <a:lstStyle/>
           <a:p>
             <a:pPr algn="ctr"/>
@@ -5318,7 +5327,7 @@
           <a:noFill/>
         </p:spPr>
         <p:txBody>
-          <a:bodyPr wrap="square" lIns="0" rIns="0" tIns="0" bIns="0" anchor="t">
+          <a:bodyPr wrap="square" lIns="0" tIns="0" rIns="0" bIns="0" anchor="t">
             <a:spAutoFit/>
           </a:bodyPr>
           <a:lstStyle/>
@@ -5386,7 +5395,9 @@
         <p:txBody>
           <a:bodyPr rtlCol="0" anchor="ctr"/>
           <a:lstStyle/>
-          <a:p/>
+          <a:p>
+            <a:endParaRPr/>
+          </a:p>
         </p:txBody>
       </p:sp>
       <p:sp>
@@ -5425,7 +5436,7 @@
           </a:fontRef>
         </p:style>
         <p:txBody>
-          <a:bodyPr rtlCol="0" anchor="ctr" lIns="0" rIns="0" tIns="0" bIns="0"/>
+          <a:bodyPr lIns="0" tIns="0" rIns="0" bIns="0" rtlCol="0" anchor="ctr"/>
           <a:lstStyle/>
           <a:p>
             <a:pPr algn="ctr"/>
@@ -5458,7 +5469,7 @@
           <a:noFill/>
         </p:spPr>
         <p:txBody>
-          <a:bodyPr wrap="square" lIns="0" rIns="0" tIns="0" bIns="0" anchor="t">
+          <a:bodyPr wrap="square" lIns="0" tIns="0" rIns="0" bIns="0" anchor="t">
             <a:spAutoFit/>
           </a:bodyPr>
           <a:lstStyle/>
@@ -5526,7 +5537,9 @@
         <p:txBody>
           <a:bodyPr rtlCol="0" anchor="ctr"/>
           <a:lstStyle/>
-          <a:p/>
+          <a:p>
+            <a:endParaRPr/>
+          </a:p>
         </p:txBody>
       </p:sp>
       <p:sp>
@@ -5565,7 +5578,7 @@
           </a:fontRef>
         </p:style>
         <p:txBody>
-          <a:bodyPr rtlCol="0" anchor="ctr" lIns="0" rIns="0" tIns="0" bIns="0"/>
+          <a:bodyPr lIns="0" tIns="0" rIns="0" bIns="0" rtlCol="0" anchor="ctr"/>
           <a:lstStyle/>
           <a:p>
             <a:pPr algn="ctr"/>
@@ -5598,7 +5611,7 @@
           <a:noFill/>
         </p:spPr>
         <p:txBody>
-          <a:bodyPr wrap="square" lIns="0" rIns="0" tIns="0" bIns="0" anchor="t">
+          <a:bodyPr wrap="square" lIns="0" tIns="0" rIns="0" bIns="0" anchor="t">
             <a:spAutoFit/>
           </a:bodyPr>
           <a:lstStyle/>
@@ -5666,7 +5679,9 @@
         <p:txBody>
           <a:bodyPr rtlCol="0" anchor="ctr"/>
           <a:lstStyle/>
-          <a:p/>
+          <a:p>
+            <a:endParaRPr/>
+          </a:p>
         </p:txBody>
       </p:sp>
       <p:sp>
@@ -5705,7 +5720,7 @@
           </a:fontRef>
         </p:style>
         <p:txBody>
-          <a:bodyPr rtlCol="0" anchor="ctr" lIns="0" rIns="0" tIns="0" bIns="0"/>
+          <a:bodyPr lIns="0" tIns="0" rIns="0" bIns="0" rtlCol="0" anchor="ctr"/>
           <a:lstStyle/>
           <a:p>
             <a:pPr algn="ctr"/>
@@ -5738,7 +5753,7 @@
           <a:noFill/>
         </p:spPr>
         <p:txBody>
-          <a:bodyPr wrap="square" lIns="0" rIns="0" tIns="0" bIns="0" anchor="t">
+          <a:bodyPr wrap="square" lIns="0" tIns="0" rIns="0" bIns="0" anchor="t">
             <a:spAutoFit/>
           </a:bodyPr>
           <a:lstStyle/>
@@ -5808,7 +5823,9 @@
         <p:txBody>
           <a:bodyPr rtlCol="0" anchor="ctr"/>
           <a:lstStyle/>
-          <a:p/>
+          <a:p>
+            <a:endParaRPr/>
+          </a:p>
         </p:txBody>
       </p:sp>
       <p:sp>
@@ -5828,7 +5845,7 @@
           <a:noFill/>
         </p:spPr>
         <p:txBody>
-          <a:bodyPr wrap="square" lIns="0" rIns="0" tIns="0" bIns="0" anchor="ctr">
+          <a:bodyPr wrap="square" lIns="0" tIns="0" rIns="0" bIns="0" anchor="ctr">
             <a:spAutoFit/>
           </a:bodyPr>
           <a:lstStyle/>
@@ -6176,7 +6193,7 @@
           <a:noFill/>
         </p:spPr>
         <p:txBody>
-          <a:bodyPr wrap="square" lIns="0" rIns="0" tIns="0" bIns="0" anchor="t">
+          <a:bodyPr wrap="square" lIns="0" tIns="0" rIns="0" bIns="0" anchor="t">
             <a:spAutoFit/>
           </a:bodyPr>
           <a:lstStyle/>
@@ -6230,7 +6247,7 @@
           </a:fontRef>
         </p:style>
         <p:txBody>
-          <a:bodyPr rtlCol="0" anchor="ctr" lIns="0" rIns="0" tIns="0" bIns="0"/>
+          <a:bodyPr lIns="0" tIns="0" rIns="0" bIns="0" rtlCol="0" anchor="ctr"/>
           <a:lstStyle/>
           <a:p>
             <a:pPr algn="ctr"/>
@@ -6263,7 +6280,7 @@
           <a:noFill/>
         </p:spPr>
         <p:txBody>
-          <a:bodyPr wrap="square" lIns="0" rIns="0" tIns="0" bIns="0" anchor="t">
+          <a:bodyPr wrap="square" lIns="0" tIns="0" rIns="0" bIns="0" anchor="t">
             <a:spAutoFit/>
           </a:bodyPr>
           <a:lstStyle/>
@@ -6331,7 +6348,9 @@
         <p:txBody>
           <a:bodyPr rtlCol="0" anchor="ctr"/>
           <a:lstStyle/>
-          <a:p/>
+          <a:p>
+            <a:endParaRPr/>
+          </a:p>
         </p:txBody>
       </p:sp>
       <p:sp>
@@ -6370,7 +6389,7 @@
           </a:fontRef>
         </p:style>
         <p:txBody>
-          <a:bodyPr rtlCol="0" anchor="ctr" lIns="0" rIns="0" tIns="0" bIns="0"/>
+          <a:bodyPr lIns="0" tIns="0" rIns="0" bIns="0" rtlCol="0" anchor="ctr"/>
           <a:lstStyle/>
           <a:p>
             <a:pPr algn="ctr"/>
@@ -6403,7 +6422,7 @@
           <a:noFill/>
         </p:spPr>
         <p:txBody>
-          <a:bodyPr wrap="square" lIns="0" rIns="0" tIns="0" bIns="0" anchor="t">
+          <a:bodyPr wrap="square" lIns="0" tIns="0" rIns="0" bIns="0" anchor="t">
             <a:spAutoFit/>
           </a:bodyPr>
           <a:lstStyle/>
@@ -6471,7 +6490,9 @@
         <p:txBody>
           <a:bodyPr rtlCol="0" anchor="ctr"/>
           <a:lstStyle/>
-          <a:p/>
+          <a:p>
+            <a:endParaRPr/>
+          </a:p>
         </p:txBody>
       </p:sp>
       <p:sp>
@@ -6510,7 +6531,7 @@
           </a:fontRef>
         </p:style>
         <p:txBody>
-          <a:bodyPr rtlCol="0" anchor="ctr" lIns="0" rIns="0" tIns="0" bIns="0"/>
+          <a:bodyPr lIns="0" tIns="0" rIns="0" bIns="0" rtlCol="0" anchor="ctr"/>
           <a:lstStyle/>
           <a:p>
             <a:pPr algn="ctr"/>
@@ -6543,7 +6564,7 @@
           <a:noFill/>
         </p:spPr>
         <p:txBody>
-          <a:bodyPr wrap="square" lIns="0" rIns="0" tIns="0" bIns="0" anchor="t">
+          <a:bodyPr wrap="square" lIns="0" tIns="0" rIns="0" bIns="0" anchor="t">
             <a:spAutoFit/>
           </a:bodyPr>
           <a:lstStyle/>
@@ -6611,7 +6632,9 @@
         <p:txBody>
           <a:bodyPr rtlCol="0" anchor="ctr"/>
           <a:lstStyle/>
-          <a:p/>
+          <a:p>
+            <a:endParaRPr/>
+          </a:p>
         </p:txBody>
       </p:sp>
       <p:sp>
@@ -6650,7 +6673,7 @@
           </a:fontRef>
         </p:style>
         <p:txBody>
-          <a:bodyPr rtlCol="0" anchor="ctr" lIns="0" rIns="0" tIns="0" bIns="0"/>
+          <a:bodyPr lIns="0" tIns="0" rIns="0" bIns="0" rtlCol="0" anchor="ctr"/>
           <a:lstStyle/>
           <a:p>
             <a:pPr algn="ctr"/>
@@ -6683,7 +6706,7 @@
           <a:noFill/>
         </p:spPr>
         <p:txBody>
-          <a:bodyPr wrap="square" lIns="0" rIns="0" tIns="0" bIns="0" anchor="t">
+          <a:bodyPr wrap="square" lIns="0" tIns="0" rIns="0" bIns="0" anchor="t">
             <a:spAutoFit/>
           </a:bodyPr>
           <a:lstStyle/>
@@ -6753,7 +6776,9 @@
         <p:txBody>
           <a:bodyPr rtlCol="0" anchor="ctr"/>
           <a:lstStyle/>
-          <a:p/>
+          <a:p>
+            <a:endParaRPr/>
+          </a:p>
         </p:txBody>
       </p:sp>
       <p:sp>
@@ -6773,7 +6798,7 @@
           <a:noFill/>
         </p:spPr>
         <p:txBody>
-          <a:bodyPr wrap="square" lIns="0" rIns="0" tIns="0" bIns="0" anchor="ctr">
+          <a:bodyPr wrap="square" lIns="0" tIns="0" rIns="0" bIns="0" anchor="ctr">
             <a:spAutoFit/>
           </a:bodyPr>
           <a:lstStyle/>
@@ -6823,6 +6848,441 @@
 </file>
 
 <file path=ppt/slides/slide14.xml><?xml version="1.0" encoding="utf-8"?>
+<p:sld xmlns:a="http://schemas.openxmlformats.org/drawingml/2006/main" xmlns:r="http://schemas.openxmlformats.org/officeDocument/2006/relationships" xmlns:p="http://schemas.openxmlformats.org/presentationml/2006/main">
+  <p:cSld>
+    <p:spTree>
+      <p:nvGrpSpPr>
+        <p:cNvPr id="1" name="">
+          <a:extLst>
+            <a:ext uri="{FF2B5EF4-FFF2-40B4-BE49-F238E27FC236}">
+              <a16:creationId xmlns:a16="http://schemas.microsoft.com/office/drawing/2014/main" id="{E825B686-6D8C-BB28-A206-871CB9604132}"/>
+            </a:ext>
+          </a:extLst>
+        </p:cNvPr>
+        <p:cNvGrpSpPr/>
+        <p:nvPr/>
+      </p:nvGrpSpPr>
+      <p:grpSpPr>
+        <a:xfrm>
+          <a:off x="0" y="0"/>
+          <a:ext cx="0" cy="0"/>
+          <a:chOff x="0" y="0"/>
+          <a:chExt cx="0" cy="0"/>
+        </a:xfrm>
+      </p:grpSpPr>
+      <p:sp>
+        <p:nvSpPr>
+          <p:cNvPr id="2" name="Rectangle 1">
+            <a:extLst>
+              <a:ext uri="{FF2B5EF4-FFF2-40B4-BE49-F238E27FC236}">
+                <a16:creationId xmlns:a16="http://schemas.microsoft.com/office/drawing/2014/main" id="{8EB35FDF-58D9-2D9F-8141-22BD87AAF26E}"/>
+              </a:ext>
+            </a:extLst>
+          </p:cNvPr>
+          <p:cNvSpPr/>
+          <p:nvPr/>
+        </p:nvSpPr>
+        <p:spPr>
+          <a:xfrm>
+            <a:off x="0" y="0"/>
+            <a:ext cx="9144000" cy="914400"/>
+          </a:xfrm>
+          <a:prstGeom prst="rect">
+            <a:avLst/>
+          </a:prstGeom>
+          <a:solidFill>
+            <a:srgbClr val="1A1A1A"/>
+          </a:solidFill>
+          <a:ln>
+            <a:noFill/>
+          </a:ln>
+        </p:spPr>
+        <p:style>
+          <a:lnRef idx="1">
+            <a:schemeClr val="accent1"/>
+          </a:lnRef>
+          <a:fillRef idx="3">
+            <a:schemeClr val="accent1"/>
+          </a:fillRef>
+          <a:effectRef idx="2">
+            <a:schemeClr val="accent1"/>
+          </a:effectRef>
+          <a:fontRef idx="minor">
+            <a:schemeClr val="lt1"/>
+          </a:fontRef>
+        </p:style>
+        <p:txBody>
+          <a:bodyPr rtlCol="0" anchor="ctr"/>
+          <a:lstStyle/>
+          <a:p>
+            <a:endParaRPr/>
+          </a:p>
+        </p:txBody>
+      </p:sp>
+      <p:sp>
+        <p:nvSpPr>
+          <p:cNvPr id="3" name="Rectangle 2">
+            <a:extLst>
+              <a:ext uri="{FF2B5EF4-FFF2-40B4-BE49-F238E27FC236}">
+                <a16:creationId xmlns:a16="http://schemas.microsoft.com/office/drawing/2014/main" id="{7C0B45B5-CF4C-BC77-A430-4CA9E2F9CB2E}"/>
+              </a:ext>
+            </a:extLst>
+          </p:cNvPr>
+          <p:cNvSpPr/>
+          <p:nvPr/>
+        </p:nvSpPr>
+        <p:spPr>
+          <a:xfrm>
+            <a:off x="0" y="868680"/>
+            <a:ext cx="9144000" cy="45720"/>
+          </a:xfrm>
+          <a:prstGeom prst="rect">
+            <a:avLst/>
+          </a:prstGeom>
+          <a:solidFill>
+            <a:srgbClr val="FFF500"/>
+          </a:solidFill>
+          <a:ln>
+            <a:noFill/>
+          </a:ln>
+        </p:spPr>
+        <p:style>
+          <a:lnRef idx="1">
+            <a:schemeClr val="accent1"/>
+          </a:lnRef>
+          <a:fillRef idx="3">
+            <a:schemeClr val="accent1"/>
+          </a:fillRef>
+          <a:effectRef idx="2">
+            <a:schemeClr val="accent1"/>
+          </a:effectRef>
+          <a:fontRef idx="minor">
+            <a:schemeClr val="lt1"/>
+          </a:fontRef>
+        </p:style>
+        <p:txBody>
+          <a:bodyPr rtlCol="0" anchor="ctr"/>
+          <a:lstStyle/>
+          <a:p>
+            <a:endParaRPr/>
+          </a:p>
+        </p:txBody>
+      </p:sp>
+      <p:sp>
+        <p:nvSpPr>
+          <p:cNvPr id="4" name="TextBox 3">
+            <a:extLst>
+              <a:ext uri="{FF2B5EF4-FFF2-40B4-BE49-F238E27FC236}">
+                <a16:creationId xmlns:a16="http://schemas.microsoft.com/office/drawing/2014/main" id="{2077CF77-64BC-C9B0-8B3B-0A2B7C30DDAE}"/>
+              </a:ext>
+            </a:extLst>
+          </p:cNvPr>
+          <p:cNvSpPr txBox="1"/>
+          <p:nvPr/>
+        </p:nvSpPr>
+        <p:spPr>
+          <a:xfrm>
+            <a:off x="548640" y="137160"/>
+            <a:ext cx="8046720" cy="640080"/>
+          </a:xfrm>
+          <a:prstGeom prst="rect">
+            <a:avLst/>
+          </a:prstGeom>
+          <a:noFill/>
+        </p:spPr>
+        <p:txBody>
+          <a:bodyPr wrap="square" lIns="0" tIns="0" rIns="0" bIns="0" anchor="ctr">
+            <a:spAutoFit/>
+          </a:bodyPr>
+          <a:lstStyle/>
+          <a:p>
+            <a:pPr algn="l"/>
+            <a:r>
+              <a:rPr sz="2800" b="1" i="0">
+                <a:solidFill>
+                  <a:srgbClr val="FFFFFF"/>
+                </a:solidFill>
+                <a:latin typeface="Arial"/>
+              </a:rPr>
+              <a:t>Caso de estudio: minería (Caterpillar)</a:t>
+            </a:r>
+          </a:p>
+        </p:txBody>
+      </p:sp>
+      <p:sp>
+        <p:nvSpPr>
+          <p:cNvPr id="5" name="Rectangle 4">
+            <a:extLst>
+              <a:ext uri="{FF2B5EF4-FFF2-40B4-BE49-F238E27FC236}">
+                <a16:creationId xmlns:a16="http://schemas.microsoft.com/office/drawing/2014/main" id="{30196DE1-7B6A-AFDB-AED4-2FB94374E216}"/>
+              </a:ext>
+            </a:extLst>
+          </p:cNvPr>
+          <p:cNvSpPr/>
+          <p:nvPr/>
+        </p:nvSpPr>
+        <p:spPr>
+          <a:xfrm>
+            <a:off x="0" y="4873752"/>
+            <a:ext cx="9144000" cy="274320"/>
+          </a:xfrm>
+          <a:prstGeom prst="rect">
+            <a:avLst/>
+          </a:prstGeom>
+          <a:solidFill>
+            <a:srgbClr val="1A1A1A"/>
+          </a:solidFill>
+          <a:ln>
+            <a:noFill/>
+          </a:ln>
+        </p:spPr>
+        <p:style>
+          <a:lnRef idx="1">
+            <a:schemeClr val="accent1"/>
+          </a:lnRef>
+          <a:fillRef idx="3">
+            <a:schemeClr val="accent1"/>
+          </a:fillRef>
+          <a:effectRef idx="2">
+            <a:schemeClr val="accent1"/>
+          </a:effectRef>
+          <a:fontRef idx="minor">
+            <a:schemeClr val="lt1"/>
+          </a:fontRef>
+        </p:style>
+        <p:txBody>
+          <a:bodyPr rtlCol="0" anchor="ctr"/>
+          <a:lstStyle/>
+          <a:p>
+            <a:endParaRPr/>
+          </a:p>
+        </p:txBody>
+      </p:sp>
+      <p:sp>
+        <p:nvSpPr>
+          <p:cNvPr id="6" name="TextBox 5">
+            <a:extLst>
+              <a:ext uri="{FF2B5EF4-FFF2-40B4-BE49-F238E27FC236}">
+                <a16:creationId xmlns:a16="http://schemas.microsoft.com/office/drawing/2014/main" id="{A8419360-62AC-C835-B918-F75076C18B46}"/>
+              </a:ext>
+            </a:extLst>
+          </p:cNvPr>
+          <p:cNvSpPr txBox="1"/>
+          <p:nvPr/>
+        </p:nvSpPr>
+        <p:spPr>
+          <a:xfrm>
+            <a:off x="457200" y="4892040"/>
+            <a:ext cx="8229600" cy="228600"/>
+          </a:xfrm>
+          <a:prstGeom prst="rect">
+            <a:avLst/>
+          </a:prstGeom>
+          <a:noFill/>
+        </p:spPr>
+        <p:txBody>
+          <a:bodyPr wrap="square" lIns="0" tIns="0" rIns="0" bIns="0" anchor="ctr">
+            <a:spAutoFit/>
+          </a:bodyPr>
+          <a:lstStyle/>
+          <a:p>
+            <a:pPr algn="l"/>
+            <a:r>
+              <a:rPr sz="800" b="0" i="0">
+                <a:solidFill>
+                  <a:srgbClr val="666666"/>
+                </a:solidFill>
+                <a:latin typeface="Calibri"/>
+              </a:rPr>
+              <a:t>UDEM  |  Modelos de Analítica Predictiva  |  Jorge A. Ramírez García, M.Eng.</a:t>
+            </a:r>
+          </a:p>
+        </p:txBody>
+      </p:sp>
+      <p:sp>
+        <p:nvSpPr>
+          <p:cNvPr id="21" name="Rounded Rectangle 20">
+            <a:extLst>
+              <a:ext uri="{FF2B5EF4-FFF2-40B4-BE49-F238E27FC236}">
+                <a16:creationId xmlns:a16="http://schemas.microsoft.com/office/drawing/2014/main" id="{E124D3E0-6751-1204-B9D4-39FF42DF54B7}"/>
+              </a:ext>
+            </a:extLst>
+          </p:cNvPr>
+          <p:cNvSpPr/>
+          <p:nvPr/>
+        </p:nvSpPr>
+        <p:spPr>
+          <a:xfrm>
+            <a:off x="457200" y="3977639"/>
+            <a:ext cx="8229600" cy="640080"/>
+          </a:xfrm>
+          <a:prstGeom prst="roundRect">
+            <a:avLst>
+              <a:gd name="adj" fmla="val 3571"/>
+            </a:avLst>
+          </a:prstGeom>
+          <a:solidFill>
+            <a:srgbClr val="E8F5E9"/>
+          </a:solidFill>
+          <a:ln>
+            <a:noFill/>
+          </a:ln>
+        </p:spPr>
+        <p:style>
+          <a:lnRef idx="1">
+            <a:schemeClr val="accent1"/>
+          </a:lnRef>
+          <a:fillRef idx="3">
+            <a:schemeClr val="accent1"/>
+          </a:fillRef>
+          <a:effectRef idx="2">
+            <a:schemeClr val="accent1"/>
+          </a:effectRef>
+          <a:fontRef idx="minor">
+            <a:schemeClr val="lt1"/>
+          </a:fontRef>
+        </p:style>
+        <p:txBody>
+          <a:bodyPr rtlCol="0" anchor="ctr"/>
+          <a:lstStyle/>
+          <a:p>
+            <a:endParaRPr/>
+          </a:p>
+        </p:txBody>
+      </p:sp>
+      <p:sp>
+        <p:nvSpPr>
+          <p:cNvPr id="22" name="TextBox 21">
+            <a:extLst>
+              <a:ext uri="{FF2B5EF4-FFF2-40B4-BE49-F238E27FC236}">
+                <a16:creationId xmlns:a16="http://schemas.microsoft.com/office/drawing/2014/main" id="{7802007B-F394-72F2-19EE-D19B4B86747E}"/>
+              </a:ext>
+            </a:extLst>
+          </p:cNvPr>
+          <p:cNvSpPr txBox="1"/>
+          <p:nvPr/>
+        </p:nvSpPr>
+        <p:spPr>
+          <a:xfrm>
+            <a:off x="594360" y="4050791"/>
+            <a:ext cx="7955279" cy="493775"/>
+          </a:xfrm>
+          <a:prstGeom prst="rect">
+            <a:avLst/>
+          </a:prstGeom>
+          <a:noFill/>
+        </p:spPr>
+        <p:txBody>
+          <a:bodyPr wrap="square" lIns="0" tIns="0" rIns="0" bIns="0" anchor="ctr">
+            <a:spAutoFit/>
+          </a:bodyPr>
+          <a:lstStyle/>
+          <a:p>
+            <a:pPr algn="l"/>
+            <a:r>
+              <a:rPr sz="1200" b="0" i="0">
+                <a:solidFill>
+                  <a:srgbClr val="2E7D32"/>
+                </a:solidFill>
+                <a:latin typeface="Calibri"/>
+              </a:rPr>
+              <a:t>Resultado: tramos con </a:t>
+            </a:r>
+            <a:r>
+              <a:rPr sz="1200" b="1" i="0">
+                <a:solidFill>
+                  <a:srgbClr val="2E7D32"/>
+                </a:solidFill>
+                <a:latin typeface="Calibri"/>
+              </a:rPr>
+              <a:t>forma libre</a:t>
+            </a:r>
+            <a:r>
+              <a:rPr sz="1200" b="0" i="0">
+                <a:solidFill>
+                  <a:srgbClr val="2E7D32"/>
+                </a:solidFill>
+                <a:latin typeface="Calibri"/>
+              </a:rPr>
+              <a:t> y sin decir cuántos hay. Ahí se compara a todas las máquinas en las mismas condiciones.</a:t>
+            </a:r>
+          </a:p>
+        </p:txBody>
+      </p:sp>
+      <p:pic>
+        <p:nvPicPr>
+          <p:cNvPr id="26" name="Imagen 25">
+            <a:extLst>
+              <a:ext uri="{FF2B5EF4-FFF2-40B4-BE49-F238E27FC236}">
+                <a16:creationId xmlns:a16="http://schemas.microsoft.com/office/drawing/2014/main" id="{0A35F721-793B-2069-2BE5-EFA5F17290B8}"/>
+              </a:ext>
+            </a:extLst>
+          </p:cNvPr>
+          <p:cNvPicPr>
+            <a:picLocks noChangeAspect="1"/>
+          </p:cNvPicPr>
+          <p:nvPr/>
+        </p:nvPicPr>
+        <p:blipFill>
+          <a:blip r:embed="rId2"/>
+          <a:stretch>
+            <a:fillRect/>
+          </a:stretch>
+        </p:blipFill>
+        <p:spPr>
+          <a:xfrm>
+            <a:off x="822850" y="1378458"/>
+            <a:ext cx="2616200" cy="2324100"/>
+          </a:xfrm>
+          <a:prstGeom prst="rect">
+            <a:avLst/>
+          </a:prstGeom>
+        </p:spPr>
+      </p:pic>
+      <p:pic>
+        <p:nvPicPr>
+          <p:cNvPr id="27" name="Imagen 26">
+            <a:extLst>
+              <a:ext uri="{FF2B5EF4-FFF2-40B4-BE49-F238E27FC236}">
+                <a16:creationId xmlns:a16="http://schemas.microsoft.com/office/drawing/2014/main" id="{0F2F6977-F1AF-A00D-58B5-0176A7EB657F}"/>
+              </a:ext>
+            </a:extLst>
+          </p:cNvPr>
+          <p:cNvPicPr>
+            <a:picLocks noChangeAspect="1"/>
+          </p:cNvPicPr>
+          <p:nvPr/>
+        </p:nvPicPr>
+        <p:blipFill>
+          <a:blip r:embed="rId3"/>
+          <a:stretch>
+            <a:fillRect/>
+          </a:stretch>
+        </p:blipFill>
+        <p:spPr>
+          <a:xfrm>
+            <a:off x="3774550" y="2108708"/>
+            <a:ext cx="4546600" cy="863600"/>
+          </a:xfrm>
+          <a:prstGeom prst="rect">
+            <a:avLst/>
+          </a:prstGeom>
+        </p:spPr>
+      </p:pic>
+    </p:spTree>
+    <p:extLst>
+      <p:ext uri="{BB962C8B-B14F-4D97-AF65-F5344CB8AC3E}">
+        <p14:creationId xmlns:p14="http://schemas.microsoft.com/office/powerpoint/2010/main" val="3881868956"/>
+      </p:ext>
+    </p:extLst>
+  </p:cSld>
+  <p:clrMapOvr>
+    <a:masterClrMapping/>
+  </p:clrMapOvr>
+</p:sld>
+</file>
+
+<file path=ppt/slides/slide15.xml><?xml version="1.0" encoding="utf-8"?>
 <p:sld xmlns:a="http://schemas.openxmlformats.org/drawingml/2006/main" xmlns:r="http://schemas.openxmlformats.org/officeDocument/2006/relationships" xmlns:p="http://schemas.openxmlformats.org/presentationml/2006/main">
   <p:cSld>
     <p:bg>
@@ -7335,7 +7795,7 @@
                     <a:lstStyle/>
                     <a:p>
                       <a:r>
-                        <a:rPr sz="1100" b="0" i="0">
+                        <a:rPr sz="1100" b="0" i="0" dirty="0">
                           <a:solidFill>
                             <a:srgbClr val="1A1A1A"/>
                           </a:solidFill>
@@ -7430,13 +7890,49 @@
                     <a:lstStyle/>
                     <a:p>
                       <a:r>
-                        <a:rPr sz="1100" b="0" i="0">
+                        <a:rPr sz="1100" b="0" i="0" dirty="0">
                           <a:solidFill>
                             <a:srgbClr val="1A1A1A"/>
                           </a:solidFill>
                           <a:latin typeface="Calibri"/>
                         </a:rPr>
-                        <a:t>Mall + entregas GPS en Monterrey</a:t>
+                        <a:t>Mall + </a:t>
+                      </a:r>
+                      <a:r>
+                        <a:rPr sz="1100" b="0" i="0" dirty="0" err="1">
+                          <a:solidFill>
+                            <a:srgbClr val="1A1A1A"/>
+                          </a:solidFill>
+                          <a:latin typeface="Calibri"/>
+                        </a:rPr>
+                        <a:t>entregas</a:t>
+                      </a:r>
+                      <a:r>
+                        <a:rPr sz="1100" b="0" i="0" dirty="0">
+                          <a:solidFill>
+                            <a:srgbClr val="1A1A1A"/>
+                          </a:solidFill>
+                          <a:latin typeface="Calibri"/>
+                        </a:rPr>
+                        <a:t> GPS </a:t>
+                      </a:r>
+                      <a:r>
+                        <a:rPr sz="1100" b="0" i="0" dirty="0" err="1">
+                          <a:solidFill>
+                            <a:srgbClr val="1A1A1A"/>
+                          </a:solidFill>
+                          <a:latin typeface="Calibri"/>
+                        </a:rPr>
+                        <a:t>en</a:t>
+                      </a:r>
+                      <a:r>
+                        <a:rPr sz="1100" b="0" i="0" dirty="0">
+                          <a:solidFill>
+                            <a:srgbClr val="1A1A1A"/>
+                          </a:solidFill>
+                          <a:latin typeface="Calibri"/>
+                        </a:rPr>
+                        <a:t> Monterrey</a:t>
                       </a:r>
                     </a:p>
                   </a:txBody>
@@ -7452,13 +7948,139 @@
                     <a:lstStyle/>
                     <a:p>
                       <a:r>
-                        <a:rPr sz="1100" b="0" i="0">
+                        <a:rPr sz="1100" b="0" i="0" dirty="0">
                           <a:solidFill>
                             <a:srgbClr val="1A1A1A"/>
                           </a:solidFill>
                           <a:latin typeface="Calibri"/>
                         </a:rPr>
-                        <a:t>¿Qué clientes no encajan? ¿Dónde poner centros de distribución?</a:t>
+                        <a:t>¿</a:t>
+                      </a:r>
+                      <a:r>
+                        <a:rPr sz="1100" b="0" i="0" dirty="0" err="1">
+                          <a:solidFill>
+                            <a:srgbClr val="1A1A1A"/>
+                          </a:solidFill>
+                          <a:latin typeface="Calibri"/>
+                        </a:rPr>
+                        <a:t>Qué</a:t>
+                      </a:r>
+                      <a:r>
+                        <a:rPr sz="1100" b="0" i="0" dirty="0">
+                          <a:solidFill>
+                            <a:srgbClr val="1A1A1A"/>
+                          </a:solidFill>
+                          <a:latin typeface="Calibri"/>
+                        </a:rPr>
+                        <a:t> </a:t>
+                      </a:r>
+                      <a:r>
+                        <a:rPr sz="1100" b="0" i="0" dirty="0" err="1">
+                          <a:solidFill>
+                            <a:srgbClr val="1A1A1A"/>
+                          </a:solidFill>
+                          <a:latin typeface="Calibri"/>
+                        </a:rPr>
+                        <a:t>clientes</a:t>
+                      </a:r>
+                      <a:r>
+                        <a:rPr sz="1100" b="0" i="0" dirty="0">
+                          <a:solidFill>
+                            <a:srgbClr val="1A1A1A"/>
+                          </a:solidFill>
+                          <a:latin typeface="Calibri"/>
+                        </a:rPr>
+                        <a:t> no </a:t>
+                      </a:r>
+                      <a:r>
+                        <a:rPr sz="1100" b="0" i="0" dirty="0" err="1">
+                          <a:solidFill>
+                            <a:srgbClr val="1A1A1A"/>
+                          </a:solidFill>
+                          <a:latin typeface="Calibri"/>
+                        </a:rPr>
+                        <a:t>encajan</a:t>
+                      </a:r>
+                      <a:r>
+                        <a:rPr sz="1100" b="0" i="0" dirty="0">
+                          <a:solidFill>
+                            <a:srgbClr val="1A1A1A"/>
+                          </a:solidFill>
+                          <a:latin typeface="Calibri"/>
+                        </a:rPr>
+                        <a:t>? ¿</a:t>
+                      </a:r>
+                      <a:r>
+                        <a:rPr sz="1100" b="0" i="0" dirty="0" err="1">
+                          <a:solidFill>
+                            <a:srgbClr val="1A1A1A"/>
+                          </a:solidFill>
+                          <a:latin typeface="Calibri"/>
+                        </a:rPr>
+                        <a:t>Dónde</a:t>
+                      </a:r>
+                      <a:r>
+                        <a:rPr sz="1100" b="0" i="0" dirty="0">
+                          <a:solidFill>
+                            <a:srgbClr val="1A1A1A"/>
+                          </a:solidFill>
+                          <a:latin typeface="Calibri"/>
+                        </a:rPr>
+                        <a:t> </a:t>
+                      </a:r>
+                      <a:r>
+                        <a:rPr sz="1100" b="0" i="0" dirty="0" err="1">
+                          <a:solidFill>
+                            <a:srgbClr val="1A1A1A"/>
+                          </a:solidFill>
+                          <a:latin typeface="Calibri"/>
+                        </a:rPr>
+                        <a:t>poner</a:t>
+                      </a:r>
+                      <a:r>
+                        <a:rPr sz="1100" b="0" i="0" dirty="0">
+                          <a:solidFill>
+                            <a:srgbClr val="1A1A1A"/>
+                          </a:solidFill>
+                          <a:latin typeface="Calibri"/>
+                        </a:rPr>
+                        <a:t> </a:t>
+                      </a:r>
+                      <a:r>
+                        <a:rPr sz="1100" b="0" i="0" dirty="0" err="1">
+                          <a:solidFill>
+                            <a:srgbClr val="1A1A1A"/>
+                          </a:solidFill>
+                          <a:latin typeface="Calibri"/>
+                        </a:rPr>
+                        <a:t>centros</a:t>
+                      </a:r>
+                      <a:r>
+                        <a:rPr sz="1100" b="0" i="0" dirty="0">
+                          <a:solidFill>
+                            <a:srgbClr val="1A1A1A"/>
+                          </a:solidFill>
+                          <a:latin typeface="Calibri"/>
+                        </a:rPr>
+                        <a:t> de </a:t>
+                      </a:r>
+                      <a:r>
+                        <a:rPr sz="1100" b="0" i="0" dirty="0" err="1">
+                          <a:solidFill>
+                            <a:srgbClr val="1A1A1A"/>
+                          </a:solidFill>
+                          <a:latin typeface="Calibri"/>
+                        </a:rPr>
+                        <a:t>distribución</a:t>
+                      </a:r>
+                      <a:r>
+                        <a:rPr sz="1100" b="0" i="0" dirty="0">
+                          <a:solidFill>
+                            <a:srgbClr val="1A1A1A"/>
+                          </a:solidFill>
+                          <a:latin typeface="Calibri"/>
+                        </a:rPr>
+                        <a:t>?</a:t>
                       </a:r>
                     </a:p>
                   </a:txBody>
@@ -7547,13 +8169,121 @@
                     <a:lstStyle/>
                     <a:p>
                       <a:r>
-                        <a:rPr sz="1100" b="0" i="0">
+                        <a:rPr sz="1100" b="0" i="0" dirty="0">
                           <a:solidFill>
                             <a:srgbClr val="1A1A1A"/>
                           </a:solidFill>
                           <a:latin typeface="Calibri"/>
                         </a:rPr>
-                        <a:t>¿Cuántas medidas químicas necesitamos para distinguir los vinos?</a:t>
+                        <a:t>¿</a:t>
+                      </a:r>
+                      <a:r>
+                        <a:rPr sz="1100" b="0" i="0" dirty="0" err="1">
+                          <a:solidFill>
+                            <a:srgbClr val="1A1A1A"/>
+                          </a:solidFill>
+                          <a:latin typeface="Calibri"/>
+                        </a:rPr>
+                        <a:t>Cuántas</a:t>
+                      </a:r>
+                      <a:r>
+                        <a:rPr sz="1100" b="0" i="0" dirty="0">
+                          <a:solidFill>
+                            <a:srgbClr val="1A1A1A"/>
+                          </a:solidFill>
+                          <a:latin typeface="Calibri"/>
+                        </a:rPr>
+                        <a:t> </a:t>
+                      </a:r>
+                      <a:r>
+                        <a:rPr sz="1100" b="0" i="0" dirty="0" err="1">
+                          <a:solidFill>
+                            <a:srgbClr val="1A1A1A"/>
+                          </a:solidFill>
+                          <a:latin typeface="Calibri"/>
+                        </a:rPr>
+                        <a:t>medidas</a:t>
+                      </a:r>
+                      <a:r>
+                        <a:rPr sz="1100" b="0" i="0" dirty="0">
+                          <a:solidFill>
+                            <a:srgbClr val="1A1A1A"/>
+                          </a:solidFill>
+                          <a:latin typeface="Calibri"/>
+                        </a:rPr>
+                        <a:t> </a:t>
+                      </a:r>
+                      <a:r>
+                        <a:rPr sz="1100" b="0" i="0" dirty="0" err="1">
+                          <a:solidFill>
+                            <a:srgbClr val="1A1A1A"/>
+                          </a:solidFill>
+                          <a:latin typeface="Calibri"/>
+                        </a:rPr>
+                        <a:t>químicas</a:t>
+                      </a:r>
+                      <a:r>
+                        <a:rPr sz="1100" b="0" i="0" dirty="0">
+                          <a:solidFill>
+                            <a:srgbClr val="1A1A1A"/>
+                          </a:solidFill>
+                          <a:latin typeface="Calibri"/>
+                        </a:rPr>
+                        <a:t> </a:t>
+                      </a:r>
+                      <a:r>
+                        <a:rPr sz="1100" b="0" i="0" dirty="0" err="1">
+                          <a:solidFill>
+                            <a:srgbClr val="1A1A1A"/>
+                          </a:solidFill>
+                          <a:latin typeface="Calibri"/>
+                        </a:rPr>
+                        <a:t>necesitamos</a:t>
+                      </a:r>
+                      <a:r>
+                        <a:rPr sz="1100" b="0" i="0" dirty="0">
+                          <a:solidFill>
+                            <a:srgbClr val="1A1A1A"/>
+                          </a:solidFill>
+                          <a:latin typeface="Calibri"/>
+                        </a:rPr>
+                        <a:t> para </a:t>
+                      </a:r>
+                      <a:r>
+                        <a:rPr sz="1100" b="0" i="0" dirty="0" err="1">
+                          <a:solidFill>
+                            <a:srgbClr val="1A1A1A"/>
+                          </a:solidFill>
+                          <a:latin typeface="Calibri"/>
+                        </a:rPr>
+                        <a:t>distinguir</a:t>
+                      </a:r>
+                      <a:r>
+                        <a:rPr sz="1100" b="0" i="0" dirty="0">
+                          <a:solidFill>
+                            <a:srgbClr val="1A1A1A"/>
+                          </a:solidFill>
+                          <a:latin typeface="Calibri"/>
+                        </a:rPr>
+                        <a:t> </a:t>
+                      </a:r>
+                      <a:r>
+                        <a:rPr sz="1100" b="0" i="0" dirty="0" err="1">
+                          <a:solidFill>
+                            <a:srgbClr val="1A1A1A"/>
+                          </a:solidFill>
+                          <a:latin typeface="Calibri"/>
+                        </a:rPr>
+                        <a:t>los</a:t>
+                      </a:r>
+                      <a:r>
+                        <a:rPr sz="1100" b="0" i="0" dirty="0">
+                          <a:solidFill>
+                            <a:srgbClr val="1A1A1A"/>
+                          </a:solidFill>
+                          <a:latin typeface="Calibri"/>
+                        </a:rPr>
+                        <a:t> vinos?</a:t>
                       </a:r>
                     </a:p>
                   </a:txBody>
@@ -7642,13 +8372,103 @@
                     <a:lstStyle/>
                     <a:p>
                       <a:r>
-                        <a:rPr sz="1100" b="0" i="0">
+                        <a:rPr sz="1100" b="0" i="0" dirty="0">
                           <a:solidFill>
                             <a:srgbClr val="1A1A1A"/>
                           </a:solidFill>
                           <a:latin typeface="Calibri"/>
                         </a:rPr>
-                        <a:t>¿Cómo organizar a los clientes? (escalado → PCA → K-Means vs DBSCAN)</a:t>
+                        <a:t>¿</a:t>
+                      </a:r>
+                      <a:r>
+                        <a:rPr sz="1100" b="0" i="0" dirty="0" err="1">
+                          <a:solidFill>
+                            <a:srgbClr val="1A1A1A"/>
+                          </a:solidFill>
+                          <a:latin typeface="Calibri"/>
+                        </a:rPr>
+                        <a:t>Cómo</a:t>
+                      </a:r>
+                      <a:r>
+                        <a:rPr sz="1100" b="0" i="0" dirty="0">
+                          <a:solidFill>
+                            <a:srgbClr val="1A1A1A"/>
+                          </a:solidFill>
+                          <a:latin typeface="Calibri"/>
+                        </a:rPr>
+                        <a:t> </a:t>
+                      </a:r>
+                      <a:r>
+                        <a:rPr sz="1100" b="0" i="0" dirty="0" err="1">
+                          <a:solidFill>
+                            <a:srgbClr val="1A1A1A"/>
+                          </a:solidFill>
+                          <a:latin typeface="Calibri"/>
+                        </a:rPr>
+                        <a:t>organizar</a:t>
+                      </a:r>
+                      <a:r>
+                        <a:rPr sz="1100" b="0" i="0" dirty="0">
+                          <a:solidFill>
+                            <a:srgbClr val="1A1A1A"/>
+                          </a:solidFill>
+                          <a:latin typeface="Calibri"/>
+                        </a:rPr>
+                        <a:t> a </a:t>
+                      </a:r>
+                      <a:r>
+                        <a:rPr sz="1100" b="0" i="0" dirty="0" err="1">
+                          <a:solidFill>
+                            <a:srgbClr val="1A1A1A"/>
+                          </a:solidFill>
+                          <a:latin typeface="Calibri"/>
+                        </a:rPr>
+                        <a:t>los</a:t>
+                      </a:r>
+                      <a:r>
+                        <a:rPr sz="1100" b="0" i="0" dirty="0">
+                          <a:solidFill>
+                            <a:srgbClr val="1A1A1A"/>
+                          </a:solidFill>
+                          <a:latin typeface="Calibri"/>
+                        </a:rPr>
+                        <a:t> </a:t>
+                      </a:r>
+                      <a:r>
+                        <a:rPr sz="1100" b="0" i="0" dirty="0" err="1">
+                          <a:solidFill>
+                            <a:srgbClr val="1A1A1A"/>
+                          </a:solidFill>
+                          <a:latin typeface="Calibri"/>
+                        </a:rPr>
+                        <a:t>clientes</a:t>
+                      </a:r>
+                      <a:r>
+                        <a:rPr sz="1100" b="0" i="0" dirty="0">
+                          <a:solidFill>
+                            <a:srgbClr val="1A1A1A"/>
+                          </a:solidFill>
+                          <a:latin typeface="Calibri"/>
+                        </a:rPr>
+                        <a:t>? (</a:t>
+                      </a:r>
+                      <a:r>
+                        <a:rPr sz="1100" b="0" i="0" dirty="0" err="1">
+                          <a:solidFill>
+                            <a:srgbClr val="1A1A1A"/>
+                          </a:solidFill>
+                          <a:latin typeface="Calibri"/>
+                        </a:rPr>
+                        <a:t>escalado</a:t>
+                      </a:r>
+                      <a:r>
+                        <a:rPr sz="1100" b="0" i="0" dirty="0">
+                          <a:solidFill>
+                            <a:srgbClr val="1A1A1A"/>
+                          </a:solidFill>
+                          <a:latin typeface="Calibri"/>
+                        </a:rPr>
+                        <a:t> → PCA → K-Means vs DBSCAN)</a:t>
                       </a:r>
                     </a:p>
                   </a:txBody>
@@ -7676,7 +8496,7 @@
 </p:sld>
 </file>
 
-<file path=ppt/slides/slide15.xml><?xml version="1.0" encoding="utf-8"?>
+<file path=ppt/slides/slide16.xml><?xml version="1.0" encoding="utf-8"?>
 <p:sld xmlns:a="http://schemas.openxmlformats.org/drawingml/2006/main" xmlns:r="http://schemas.openxmlformats.org/officeDocument/2006/relationships" xmlns:p="http://schemas.openxmlformats.org/presentationml/2006/main">
   <p:cSld>
     <p:bg>
